--- a/public/fun/pack/pptx/review/보장점검양식_47_부부점검_성탄절우체국.pptx
+++ b/public/fun/pack/pptx/review/보장점검양식_47_부부점검_성탄절우체국.pptx
@@ -3286,6 +3286,14 @@
 <file path=ppt/slides/slide1.xml><?xml version="1.0" encoding="utf-8"?>
 <p:sld xmlns:a="http://schemas.openxmlformats.org/drawingml/2006/main" xmlns:p="http://schemas.openxmlformats.org/presentationml/2006/main" xmlns:r="http://schemas.openxmlformats.org/officeDocument/2006/relationships">
   <p:cSld>
+    <p:bg>
+      <p:bgPr>
+        <a:solidFill>
+          <a:srgbClr val="D5F6E0"/>
+        </a:solidFill>
+        <a:effectLst/>
+      </p:bgPr>
+    </p:bg>
     <p:spTree>
       <p:nvGrpSpPr>
         <p:cNvPr id="1" name=""/>
@@ -3293,30 +3301,106 @@
         <p:nvPr/>
       </p:nvGrpSpPr>
       <p:grpSpPr/>
-      <p:pic>
-        <p:nvPicPr>
-          <p:cNvPr id="3" name="표지 그림" descr="review-47.jpg"/>
-          <p:cNvPicPr>
-            <a:picLocks noChangeAspect="1"/>
-          </p:cNvPicPr>
+      <p:sp>
+        <p:nvSpPr>
+          <p:cNvPr id="3" name="장식"/>
+          <p:cNvSpPr/>
           <p:nvPr/>
-        </p:nvPicPr>
-        <p:blipFill>
-          <a:blip r:embed="rId2"/>
-          <a:stretch>
-            <a:fillRect/>
-          </a:stretch>
-        </p:blipFill>
-        <p:spPr>
-          <a:xfrm>
-            <a:off x="0" y="0"/>
-            <a:ext cx="12191695" cy="6858000"/>
+        </p:nvSpPr>
+        <p:spPr>
+          <a:xfrm>
+            <a:off x="7071183" y="960120"/>
+            <a:ext cx="3657508" cy="4526280"/>
+          </a:xfrm>
+          <a:prstGeom prst="roundRect">
+            <a:avLst>
+              <a:gd name="adj" fmla="val 4000"/>
+            </a:avLst>
+          </a:prstGeom>
+          <a:solidFill>
+            <a:srgbClr val="FFFFFF"/>
+          </a:solidFill>
+          <a:ln>
+            <a:noFill/>
+          </a:ln>
+        </p:spPr>
+        <p:txBody>
+          <a:bodyPr rtlCol="0" anchor="ctr"/>
+          <a:lstStyle/>
+          <a:p>
+            <a:pPr algn="ctr"/>
+          </a:p>
+        </p:txBody>
+      </p:sp>
+      <p:sp>
+        <p:nvSpPr>
+          <p:cNvPr id="4" name="장식"/>
+          <p:cNvSpPr/>
+          <p:nvPr/>
+        </p:nvSpPr>
+        <p:spPr>
+          <a:xfrm>
+            <a:off x="7558851" y="1234439"/>
+            <a:ext cx="3657508" cy="4526280"/>
+          </a:xfrm>
+          <a:prstGeom prst="roundRect">
+            <a:avLst>
+              <a:gd name="adj" fmla="val 4000"/>
+            </a:avLst>
+          </a:prstGeom>
+          <a:noFill/>
+          <a:ln w="9525">
+            <a:solidFill>
+              <a:srgbClr val="26231F"/>
+            </a:solidFill>
+          </a:ln>
+        </p:spPr>
+        <p:txBody>
+          <a:bodyPr rtlCol="0" anchor="ctr"/>
+          <a:lstStyle/>
+          <a:p>
+            <a:pPr algn="ctr"/>
+          </a:p>
+        </p:txBody>
+      </p:sp>
+      <p:sp>
+        <p:nvSpPr>
+          <p:cNvPr id="5" name="라벨"/>
+          <p:cNvSpPr txBox="1"/>
+          <p:nvPr/>
+        </p:nvSpPr>
+        <p:spPr>
+          <a:xfrm>
+            <a:off x="822960" y="2148840"/>
+            <a:ext cx="5608179" cy="274320"/>
           </a:xfrm>
           <a:prstGeom prst="rect">
             <a:avLst/>
           </a:prstGeom>
-        </p:spPr>
-      </p:pic>
+          <a:noFill/>
+        </p:spPr>
+        <p:txBody>
+          <a:bodyPr wrap="square" lIns="54864" rIns="54864" tIns="27432" bIns="27432" anchor="t">
+            <a:noAutofit/>
+          </a:bodyPr>
+          <a:lstStyle/>
+          <a:p>
+            <a:pPr algn="l">
+              <a:lnSpc>
+                <a:spcPct val="115000"/>
+              </a:lnSpc>
+            </a:pPr>
+            <a:r>
+              <a:rPr sz="1000" b="1" i="0" spc="250">
+                <a:solidFill>
+                  <a:srgbClr val="26231F"/>
+                </a:solidFill>
+              </a:rPr>
+              <a:t>INSURANCE CHECK</a:t>
+            </a:r>
+          </a:p>
+        </p:txBody>
+      </p:sp>
       <p:sp>
         <p:nvSpPr>
           <p:cNvPr id="2" name="Title 1"/>
@@ -3329,8 +3413,8 @@
         </p:nvSpPr>
         <p:spPr>
           <a:xfrm>
-            <a:off x="853418" y="2057400"/>
-            <a:ext cx="6095847" cy="1554480"/>
+            <a:off x="822960" y="2606040"/>
+            <a:ext cx="5608179" cy="1188720"/>
           </a:xfrm>
         </p:spPr>
         <p:txBody>
@@ -3347,7 +3431,7 @@
             <a:r>
               <a:rPr sz="3600" b="1" i="0">
                 <a:solidFill>
-                  <a:srgbClr val="183A23"/>
+                  <a:srgbClr val="26231F"/>
                 </a:solidFill>
               </a:rPr>
               <a:t>우리 보험 점검 시간</a:t>
@@ -3357,14 +3441,14 @@
       </p:sp>
       <p:sp>
         <p:nvSpPr>
-          <p:cNvPr id="4" name="한 줄 문구"/>
+          <p:cNvPr id="6" name="한 줄 문구"/>
           <p:cNvSpPr txBox="1"/>
           <p:nvPr/>
         </p:nvSpPr>
         <p:spPr>
           <a:xfrm>
-            <a:off x="853418" y="3749039"/>
-            <a:ext cx="6095847" cy="822960"/>
+            <a:off x="822960" y="3886200"/>
+            <a:ext cx="5608179" cy="822960"/>
           </a:xfrm>
           <a:prstGeom prst="rect">
             <a:avLst/>
@@ -3383,26 +3467,26 @@
               </a:lnSpc>
             </a:pPr>
             <a:r>
-              <a:rPr sz="1700" b="0" i="1">
+              <a:rPr sz="1700" b="0" i="0">
                 <a:solidFill>
-                  <a:srgbClr val="183A23"/>
+                  <a:srgbClr val="26231F"/>
                 </a:solidFill>
               </a:rPr>
-              <a:t>새해 계획 세울 때 같이 봅니다</a:t>
+              <a:t>계획 세울 때 같이 봅니다</a:t>
             </a:r>
           </a:p>
         </p:txBody>
       </p:sp>
       <p:sp>
         <p:nvSpPr>
-          <p:cNvPr id="5" name="안내 문구"/>
+          <p:cNvPr id="7" name="안내 문구"/>
           <p:cNvSpPr txBox="1"/>
           <p:nvPr/>
         </p:nvSpPr>
         <p:spPr>
           <a:xfrm>
-            <a:off x="853418" y="4617720"/>
-            <a:ext cx="6095847" cy="914400"/>
+            <a:off x="822960" y="4754880"/>
+            <a:ext cx="5608179" cy="914400"/>
           </a:xfrm>
           <a:prstGeom prst="rect">
             <a:avLst/>
@@ -3423,10 +3507,10 @@
             <a:r>
               <a:rPr sz="1400" b="0" i="0">
                 <a:solidFill>
-                  <a:srgbClr val="666666"/>
+                  <a:srgbClr val="26231F"/>
                 </a:solidFill>
               </a:rPr>
-              <a:t>부부 점검 · 2027. 00. 00</a:t>
+              <a:t>부부 점검 · 날짜 입력</a:t>
             </a:r>
           </a:p>
           <a:p>
@@ -3438,7 +3522,7 @@
             <a:r>
               <a:rPr sz="1400" b="0" i="0">
                 <a:solidFill>
-                  <a:srgbClr val="666666"/>
+                  <a:srgbClr val="26231F"/>
                 </a:solidFill>
               </a:rPr>
               <a:t>가입 내용을 정리하고 함께 확인하는 양식</a:t>
@@ -3480,14 +3564,43 @@
         </p:nvSpPr>
         <p:spPr>
           <a:xfrm>
-            <a:off x="9905695" y="-1463040"/>
-            <a:ext cx="3840480" cy="3840480"/>
+            <a:off x="0" y="6565392"/>
+            <a:ext cx="12191695" cy="292608"/>
+          </a:xfrm>
+          <a:prstGeom prst="rect">
+            <a:avLst/>
+          </a:prstGeom>
+          <a:solidFill>
+            <a:srgbClr val="ADEBC2"/>
+          </a:solidFill>
+          <a:ln>
+            <a:noFill/>
+          </a:ln>
+        </p:spPr>
+        <p:txBody>
+          <a:bodyPr rtlCol="0" anchor="ctr"/>
+          <a:lstStyle/>
+          <a:p>
+            <a:pPr algn="ctr"/>
+          </a:p>
+        </p:txBody>
+      </p:sp>
+      <p:sp>
+        <p:nvSpPr>
+          <p:cNvPr id="4" name="장식"/>
+          <p:cNvSpPr/>
+          <p:nvPr/>
+        </p:nvSpPr>
+        <p:spPr>
+          <a:xfrm>
+            <a:off x="10180015" y="-1645920"/>
+            <a:ext cx="3474720" cy="3474720"/>
           </a:xfrm>
           <a:prstGeom prst="ellipse">
             <a:avLst/>
           </a:prstGeom>
           <a:solidFill>
-            <a:srgbClr val="D2EFDC"/>
+            <a:srgbClr val="ADEBC2"/>
           </a:solidFill>
           <a:ln>
             <a:noFill/>
@@ -3503,20 +3616,58 @@
       </p:sp>
       <p:sp>
         <p:nvSpPr>
-          <p:cNvPr id="4" name="장식"/>
+          <p:cNvPr id="5" name="상단 라벨"/>
+          <p:cNvSpPr txBox="1"/>
+          <p:nvPr/>
+        </p:nvSpPr>
+        <p:spPr>
+          <a:xfrm>
+            <a:off x="640080" y="274320"/>
+            <a:ext cx="5486400" cy="274320"/>
+          </a:xfrm>
+          <a:prstGeom prst="rect">
+            <a:avLst/>
+          </a:prstGeom>
+          <a:noFill/>
+        </p:spPr>
+        <p:txBody>
+          <a:bodyPr wrap="square" lIns="54864" rIns="54864" tIns="27432" bIns="27432" anchor="ctr">
+            <a:noAutofit/>
+          </a:bodyPr>
+          <a:lstStyle/>
+          <a:p>
+            <a:pPr algn="l">
+              <a:lnSpc>
+                <a:spcPct val="115000"/>
+              </a:lnSpc>
+            </a:pPr>
+            <a:r>
+              <a:rPr sz="900" b="1" i="0" spc="250">
+                <a:solidFill>
+                  <a:srgbClr val="26231F"/>
+                </a:solidFill>
+              </a:rPr>
+              <a:t>INSURANCE CHECK</a:t>
+            </a:r>
+          </a:p>
+        </p:txBody>
+      </p:sp>
+      <p:sp>
+        <p:nvSpPr>
+          <p:cNvPr id="6" name="포인트"/>
           <p:cNvSpPr/>
           <p:nvPr/>
         </p:nvSpPr>
         <p:spPr>
           <a:xfrm>
-            <a:off x="11094415" y="274320"/>
-            <a:ext cx="411480" cy="411480"/>
-          </a:xfrm>
-          <a:prstGeom prst="ellipse">
+            <a:off x="11048695" y="502919"/>
+            <a:ext cx="274320" cy="274320"/>
+          </a:xfrm>
+          <a:prstGeom prst="star4">
             <a:avLst/>
           </a:prstGeom>
           <a:solidFill>
-            <a:srgbClr val="29653D"/>
+            <a:srgbClr val="FFFFFF"/>
           </a:solidFill>
           <a:ln>
             <a:noFill/>
@@ -3542,8 +3693,8 @@
         </p:nvSpPr>
         <p:spPr>
           <a:xfrm>
-            <a:off x="640080" y="457200"/>
-            <a:ext cx="9722815" cy="868680"/>
+            <a:off x="640080" y="658368"/>
+            <a:ext cx="9082735" cy="868680"/>
           </a:xfrm>
         </p:spPr>
         <p:txBody>
@@ -3560,7 +3711,7 @@
             <a:r>
               <a:rPr sz="3000" b="1" i="0">
                 <a:solidFill>
-                  <a:srgbClr val="183A23"/>
+                  <a:srgbClr val="26231F"/>
                 </a:solidFill>
               </a:rPr>
               <a:t>점검 대상 현황</a:t>
@@ -3570,14 +3721,14 @@
       </p:sp>
       <p:graphicFrame>
         <p:nvGraphicFramePr>
-          <p:cNvPr id="5" name="표"/>
+          <p:cNvPr id="7" name="표"/>
           <p:cNvGraphicFramePr>
             <a:graphicFrameLocks noGrp="1"/>
           </p:cNvGraphicFramePr>
           <p:nvPr/>
         </p:nvGraphicFramePr>
         <p:xfrm>
-          <a:off x="640080" y="1600200"/>
+          <a:off x="640080" y="1783080"/>
           <a:ext cx="10911534" cy="3657600"/>
         </p:xfrm>
         <a:graphic>
@@ -3601,7 +3752,7 @@
                       <a:r>
                         <a:rPr sz="1600" b="1">
                           <a:solidFill>
-                            <a:srgbClr val="FFFFFF"/>
+                            <a:srgbClr val="26231F"/>
                           </a:solidFill>
                         </a:rPr>
                         <a:t>구분</a:t>
@@ -3611,30 +3762,30 @@
                   <a:tcPr anchor="ctr" marL="73152" marR="73152">
                     <a:lnL w="9525" cap="flat" cmpd="sng" algn="ctr">
                       <a:solidFill>
-                        <a:srgbClr val="29653D"/>
+                        <a:srgbClr val="98E1B1"/>
                       </a:solidFill>
                       <a:prstDash val="solid"/>
                     </a:lnL>
                     <a:lnR w="9525" cap="flat" cmpd="sng" algn="ctr">
                       <a:solidFill>
-                        <a:srgbClr val="29653D"/>
+                        <a:srgbClr val="98E1B1"/>
                       </a:solidFill>
                       <a:prstDash val="solid"/>
                     </a:lnR>
                     <a:lnT w="9525" cap="flat" cmpd="sng" algn="ctr">
                       <a:solidFill>
-                        <a:srgbClr val="29653D"/>
+                        <a:srgbClr val="98E1B1"/>
                       </a:solidFill>
                       <a:prstDash val="solid"/>
                     </a:lnT>
                     <a:lnB w="9525" cap="flat" cmpd="sng" algn="ctr">
                       <a:solidFill>
-                        <a:srgbClr val="29653D"/>
+                        <a:srgbClr val="98E1B1"/>
                       </a:solidFill>
                       <a:prstDash val="solid"/>
                     </a:lnB>
                     <a:solidFill>
-                      <a:srgbClr val="29653D"/>
+                      <a:srgbClr val="98E1B1"/>
                     </a:solidFill>
                   </a:tcPr>
                 </a:tc>
@@ -3647,7 +3798,7 @@
                       <a:r>
                         <a:rPr sz="1600" b="1">
                           <a:solidFill>
-                            <a:srgbClr val="FFFFFF"/>
+                            <a:srgbClr val="26231F"/>
                           </a:solidFill>
                         </a:rPr>
                         <a:t>남편</a:t>
@@ -3657,30 +3808,30 @@
                   <a:tcPr anchor="ctr" marL="73152" marR="73152">
                     <a:lnL w="9525" cap="flat" cmpd="sng" algn="ctr">
                       <a:solidFill>
-                        <a:srgbClr val="29653D"/>
+                        <a:srgbClr val="98E1B1"/>
                       </a:solidFill>
                       <a:prstDash val="solid"/>
                     </a:lnL>
                     <a:lnR w="9525" cap="flat" cmpd="sng" algn="ctr">
                       <a:solidFill>
-                        <a:srgbClr val="29653D"/>
+                        <a:srgbClr val="98E1B1"/>
                       </a:solidFill>
                       <a:prstDash val="solid"/>
                     </a:lnR>
                     <a:lnT w="9525" cap="flat" cmpd="sng" algn="ctr">
                       <a:solidFill>
-                        <a:srgbClr val="29653D"/>
+                        <a:srgbClr val="98E1B1"/>
                       </a:solidFill>
                       <a:prstDash val="solid"/>
                     </a:lnT>
                     <a:lnB w="9525" cap="flat" cmpd="sng" algn="ctr">
                       <a:solidFill>
-                        <a:srgbClr val="29653D"/>
+                        <a:srgbClr val="98E1B1"/>
                       </a:solidFill>
                       <a:prstDash val="solid"/>
                     </a:lnB>
                     <a:solidFill>
-                      <a:srgbClr val="29653D"/>
+                      <a:srgbClr val="98E1B1"/>
                     </a:solidFill>
                   </a:tcPr>
                 </a:tc>
@@ -3693,7 +3844,7 @@
                       <a:r>
                         <a:rPr sz="1600" b="1">
                           <a:solidFill>
-                            <a:srgbClr val="FFFFFF"/>
+                            <a:srgbClr val="26231F"/>
                           </a:solidFill>
                         </a:rPr>
                         <a:t>아내</a:t>
@@ -3703,30 +3854,30 @@
                   <a:tcPr anchor="ctr" marL="73152" marR="73152">
                     <a:lnL w="9525" cap="flat" cmpd="sng" algn="ctr">
                       <a:solidFill>
-                        <a:srgbClr val="29653D"/>
+                        <a:srgbClr val="98E1B1"/>
                       </a:solidFill>
                       <a:prstDash val="solid"/>
                     </a:lnL>
                     <a:lnR w="9525" cap="flat" cmpd="sng" algn="ctr">
                       <a:solidFill>
-                        <a:srgbClr val="29653D"/>
+                        <a:srgbClr val="98E1B1"/>
                       </a:solidFill>
                       <a:prstDash val="solid"/>
                     </a:lnR>
                     <a:lnT w="9525" cap="flat" cmpd="sng" algn="ctr">
                       <a:solidFill>
-                        <a:srgbClr val="29653D"/>
+                        <a:srgbClr val="98E1B1"/>
                       </a:solidFill>
                       <a:prstDash val="solid"/>
                     </a:lnT>
                     <a:lnB w="9525" cap="flat" cmpd="sng" algn="ctr">
                       <a:solidFill>
-                        <a:srgbClr val="29653D"/>
+                        <a:srgbClr val="98E1B1"/>
                       </a:solidFill>
                       <a:prstDash val="solid"/>
                     </a:lnB>
                     <a:solidFill>
-                      <a:srgbClr val="29653D"/>
+                      <a:srgbClr val="98E1B1"/>
                     </a:solidFill>
                   </a:tcPr>
                 </a:tc>
@@ -3741,7 +3892,7 @@
                       <a:r>
                         <a:rPr sz="1600" b="1">
                           <a:solidFill>
-                            <a:srgbClr val="183A23"/>
+                            <a:srgbClr val="274932"/>
                           </a:solidFill>
                         </a:rPr>
                         <a:t>이름</a:t>
@@ -3751,30 +3902,30 @@
                   <a:tcPr anchor="ctr" marL="73152" marR="73152">
                     <a:lnL w="9525" cap="flat" cmpd="sng" algn="ctr">
                       <a:solidFill>
-                        <a:srgbClr val="D2EFDC"/>
+                        <a:srgbClr val="D5F6E0"/>
                       </a:solidFill>
                       <a:prstDash val="solid"/>
                     </a:lnL>
                     <a:lnR w="9525" cap="flat" cmpd="sng" algn="ctr">
                       <a:solidFill>
-                        <a:srgbClr val="D2EFDC"/>
+                        <a:srgbClr val="D5F6E0"/>
                       </a:solidFill>
                       <a:prstDash val="solid"/>
                     </a:lnR>
                     <a:lnT w="9525" cap="flat" cmpd="sng" algn="ctr">
                       <a:solidFill>
-                        <a:srgbClr val="D2EFDC"/>
+                        <a:srgbClr val="D5F6E0"/>
                       </a:solidFill>
                       <a:prstDash val="solid"/>
                     </a:lnT>
                     <a:lnB w="9525" cap="flat" cmpd="sng" algn="ctr">
                       <a:solidFill>
-                        <a:srgbClr val="D2EFDC"/>
+                        <a:srgbClr val="D5F6E0"/>
                       </a:solidFill>
                       <a:prstDash val="solid"/>
                     </a:lnB>
                     <a:solidFill>
-                      <a:srgbClr val="D2EFDC"/>
+                      <a:srgbClr val="D5F6E0"/>
                     </a:solidFill>
                   </a:tcPr>
                 </a:tc>
@@ -3787,7 +3938,7 @@
                       <a:r>
                         <a:rPr sz="1600" b="0">
                           <a:solidFill>
-                            <a:srgbClr val="2B2B2B"/>
+                            <a:srgbClr val="26231F"/>
                           </a:solidFill>
                         </a:rPr>
                         <a:t/>
@@ -3797,25 +3948,25 @@
                   <a:tcPr anchor="ctr" marL="73152" marR="73152">
                     <a:lnL w="9525" cap="flat" cmpd="sng" algn="ctr">
                       <a:solidFill>
-                        <a:srgbClr val="D2EFDC"/>
+                        <a:srgbClr val="D5F6E0"/>
                       </a:solidFill>
                       <a:prstDash val="solid"/>
                     </a:lnL>
                     <a:lnR w="9525" cap="flat" cmpd="sng" algn="ctr">
                       <a:solidFill>
-                        <a:srgbClr val="D2EFDC"/>
+                        <a:srgbClr val="D5F6E0"/>
                       </a:solidFill>
                       <a:prstDash val="solid"/>
                     </a:lnR>
                     <a:lnT w="9525" cap="flat" cmpd="sng" algn="ctr">
                       <a:solidFill>
-                        <a:srgbClr val="D2EFDC"/>
+                        <a:srgbClr val="D5F6E0"/>
                       </a:solidFill>
                       <a:prstDash val="solid"/>
                     </a:lnT>
                     <a:lnB w="9525" cap="flat" cmpd="sng" algn="ctr">
                       <a:solidFill>
-                        <a:srgbClr val="D2EFDC"/>
+                        <a:srgbClr val="D5F6E0"/>
                       </a:solidFill>
                       <a:prstDash val="solid"/>
                     </a:lnB>
@@ -3833,7 +3984,7 @@
                       <a:r>
                         <a:rPr sz="1600" b="0">
                           <a:solidFill>
-                            <a:srgbClr val="2B2B2B"/>
+                            <a:srgbClr val="26231F"/>
                           </a:solidFill>
                         </a:rPr>
                         <a:t/>
@@ -3843,25 +3994,25 @@
                   <a:tcPr anchor="ctr" marL="73152" marR="73152">
                     <a:lnL w="9525" cap="flat" cmpd="sng" algn="ctr">
                       <a:solidFill>
-                        <a:srgbClr val="D2EFDC"/>
+                        <a:srgbClr val="D5F6E0"/>
                       </a:solidFill>
                       <a:prstDash val="solid"/>
                     </a:lnL>
                     <a:lnR w="9525" cap="flat" cmpd="sng" algn="ctr">
                       <a:solidFill>
-                        <a:srgbClr val="D2EFDC"/>
+                        <a:srgbClr val="D5F6E0"/>
                       </a:solidFill>
                       <a:prstDash val="solid"/>
                     </a:lnR>
                     <a:lnT w="9525" cap="flat" cmpd="sng" algn="ctr">
                       <a:solidFill>
-                        <a:srgbClr val="D2EFDC"/>
+                        <a:srgbClr val="D5F6E0"/>
                       </a:solidFill>
                       <a:prstDash val="solid"/>
                     </a:lnT>
                     <a:lnB w="9525" cap="flat" cmpd="sng" algn="ctr">
                       <a:solidFill>
-                        <a:srgbClr val="D2EFDC"/>
+                        <a:srgbClr val="D5F6E0"/>
                       </a:solidFill>
                       <a:prstDash val="solid"/>
                     </a:lnB>
@@ -3881,7 +4032,7 @@
                       <a:r>
                         <a:rPr sz="1600" b="1">
                           <a:solidFill>
-                            <a:srgbClr val="183A23"/>
+                            <a:srgbClr val="274932"/>
                           </a:solidFill>
                         </a:rPr>
                         <a:t>나이</a:t>
@@ -3891,30 +4042,30 @@
                   <a:tcPr anchor="ctr" marL="73152" marR="73152">
                     <a:lnL w="9525" cap="flat" cmpd="sng" algn="ctr">
                       <a:solidFill>
-                        <a:srgbClr val="D2EFDC"/>
+                        <a:srgbClr val="D5F6E0"/>
                       </a:solidFill>
                       <a:prstDash val="solid"/>
                     </a:lnL>
                     <a:lnR w="9525" cap="flat" cmpd="sng" algn="ctr">
                       <a:solidFill>
-                        <a:srgbClr val="D2EFDC"/>
+                        <a:srgbClr val="D5F6E0"/>
                       </a:solidFill>
                       <a:prstDash val="solid"/>
                     </a:lnR>
                     <a:lnT w="9525" cap="flat" cmpd="sng" algn="ctr">
                       <a:solidFill>
-                        <a:srgbClr val="D2EFDC"/>
+                        <a:srgbClr val="D5F6E0"/>
                       </a:solidFill>
                       <a:prstDash val="solid"/>
                     </a:lnT>
                     <a:lnB w="9525" cap="flat" cmpd="sng" algn="ctr">
                       <a:solidFill>
-                        <a:srgbClr val="D2EFDC"/>
+                        <a:srgbClr val="D5F6E0"/>
                       </a:solidFill>
                       <a:prstDash val="solid"/>
                     </a:lnB>
                     <a:solidFill>
-                      <a:srgbClr val="D2EFDC"/>
+                      <a:srgbClr val="D5F6E0"/>
                     </a:solidFill>
                   </a:tcPr>
                 </a:tc>
@@ -3927,7 +4078,7 @@
                       <a:r>
                         <a:rPr sz="1600" b="0">
                           <a:solidFill>
-                            <a:srgbClr val="2B2B2B"/>
+                            <a:srgbClr val="26231F"/>
                           </a:solidFill>
                         </a:rPr>
                         <a:t/>
@@ -3937,30 +4088,30 @@
                   <a:tcPr anchor="ctr" marL="73152" marR="73152">
                     <a:lnL w="9525" cap="flat" cmpd="sng" algn="ctr">
                       <a:solidFill>
-                        <a:srgbClr val="D2EFDC"/>
+                        <a:srgbClr val="D5F6E0"/>
                       </a:solidFill>
                       <a:prstDash val="solid"/>
                     </a:lnL>
                     <a:lnR w="9525" cap="flat" cmpd="sng" algn="ctr">
                       <a:solidFill>
-                        <a:srgbClr val="D2EFDC"/>
+                        <a:srgbClr val="D5F6E0"/>
                       </a:solidFill>
                       <a:prstDash val="solid"/>
                     </a:lnR>
                     <a:lnT w="9525" cap="flat" cmpd="sng" algn="ctr">
                       <a:solidFill>
-                        <a:srgbClr val="D2EFDC"/>
+                        <a:srgbClr val="D5F6E0"/>
                       </a:solidFill>
                       <a:prstDash val="solid"/>
                     </a:lnT>
                     <a:lnB w="9525" cap="flat" cmpd="sng" algn="ctr">
                       <a:solidFill>
-                        <a:srgbClr val="D2EFDC"/>
+                        <a:srgbClr val="D5F6E0"/>
                       </a:solidFill>
                       <a:prstDash val="solid"/>
                     </a:lnB>
                     <a:solidFill>
-                      <a:srgbClr val="F1F9F3"/>
+                      <a:srgbClr val="ECFBF1"/>
                     </a:solidFill>
                   </a:tcPr>
                 </a:tc>
@@ -3973,7 +4124,7 @@
                       <a:r>
                         <a:rPr sz="1600" b="0">
                           <a:solidFill>
-                            <a:srgbClr val="2B2B2B"/>
+                            <a:srgbClr val="26231F"/>
                           </a:solidFill>
                         </a:rPr>
                         <a:t/>
@@ -3983,30 +4134,30 @@
                   <a:tcPr anchor="ctr" marL="73152" marR="73152">
                     <a:lnL w="9525" cap="flat" cmpd="sng" algn="ctr">
                       <a:solidFill>
-                        <a:srgbClr val="D2EFDC"/>
+                        <a:srgbClr val="D5F6E0"/>
                       </a:solidFill>
                       <a:prstDash val="solid"/>
                     </a:lnL>
                     <a:lnR w="9525" cap="flat" cmpd="sng" algn="ctr">
                       <a:solidFill>
-                        <a:srgbClr val="D2EFDC"/>
+                        <a:srgbClr val="D5F6E0"/>
                       </a:solidFill>
                       <a:prstDash val="solid"/>
                     </a:lnR>
                     <a:lnT w="9525" cap="flat" cmpd="sng" algn="ctr">
                       <a:solidFill>
-                        <a:srgbClr val="D2EFDC"/>
+                        <a:srgbClr val="D5F6E0"/>
                       </a:solidFill>
                       <a:prstDash val="solid"/>
                     </a:lnT>
                     <a:lnB w="9525" cap="flat" cmpd="sng" algn="ctr">
                       <a:solidFill>
-                        <a:srgbClr val="D2EFDC"/>
+                        <a:srgbClr val="D5F6E0"/>
                       </a:solidFill>
                       <a:prstDash val="solid"/>
                     </a:lnB>
                     <a:solidFill>
-                      <a:srgbClr val="F1F9F3"/>
+                      <a:srgbClr val="ECFBF1"/>
                     </a:solidFill>
                   </a:tcPr>
                 </a:tc>
@@ -4021,7 +4172,7 @@
                       <a:r>
                         <a:rPr sz="1600" b="1">
                           <a:solidFill>
-                            <a:srgbClr val="183A23"/>
+                            <a:srgbClr val="274932"/>
                           </a:solidFill>
                         </a:rPr>
                         <a:t>직업</a:t>
@@ -4031,30 +4182,30 @@
                   <a:tcPr anchor="ctr" marL="73152" marR="73152">
                     <a:lnL w="9525" cap="flat" cmpd="sng" algn="ctr">
                       <a:solidFill>
-                        <a:srgbClr val="D2EFDC"/>
+                        <a:srgbClr val="D5F6E0"/>
                       </a:solidFill>
                       <a:prstDash val="solid"/>
                     </a:lnL>
                     <a:lnR w="9525" cap="flat" cmpd="sng" algn="ctr">
                       <a:solidFill>
-                        <a:srgbClr val="D2EFDC"/>
+                        <a:srgbClr val="D5F6E0"/>
                       </a:solidFill>
                       <a:prstDash val="solid"/>
                     </a:lnR>
                     <a:lnT w="9525" cap="flat" cmpd="sng" algn="ctr">
                       <a:solidFill>
-                        <a:srgbClr val="D2EFDC"/>
+                        <a:srgbClr val="D5F6E0"/>
                       </a:solidFill>
                       <a:prstDash val="solid"/>
                     </a:lnT>
                     <a:lnB w="9525" cap="flat" cmpd="sng" algn="ctr">
                       <a:solidFill>
-                        <a:srgbClr val="D2EFDC"/>
+                        <a:srgbClr val="D5F6E0"/>
                       </a:solidFill>
                       <a:prstDash val="solid"/>
                     </a:lnB>
                     <a:solidFill>
-                      <a:srgbClr val="D2EFDC"/>
+                      <a:srgbClr val="D5F6E0"/>
                     </a:solidFill>
                   </a:tcPr>
                 </a:tc>
@@ -4067,7 +4218,7 @@
                       <a:r>
                         <a:rPr sz="1600" b="0">
                           <a:solidFill>
-                            <a:srgbClr val="2B2B2B"/>
+                            <a:srgbClr val="26231F"/>
                           </a:solidFill>
                         </a:rPr>
                         <a:t/>
@@ -4077,25 +4228,25 @@
                   <a:tcPr anchor="ctr" marL="73152" marR="73152">
                     <a:lnL w="9525" cap="flat" cmpd="sng" algn="ctr">
                       <a:solidFill>
-                        <a:srgbClr val="D2EFDC"/>
+                        <a:srgbClr val="D5F6E0"/>
                       </a:solidFill>
                       <a:prstDash val="solid"/>
                     </a:lnL>
                     <a:lnR w="9525" cap="flat" cmpd="sng" algn="ctr">
                       <a:solidFill>
-                        <a:srgbClr val="D2EFDC"/>
+                        <a:srgbClr val="D5F6E0"/>
                       </a:solidFill>
                       <a:prstDash val="solid"/>
                     </a:lnR>
                     <a:lnT w="9525" cap="flat" cmpd="sng" algn="ctr">
                       <a:solidFill>
-                        <a:srgbClr val="D2EFDC"/>
+                        <a:srgbClr val="D5F6E0"/>
                       </a:solidFill>
                       <a:prstDash val="solid"/>
                     </a:lnT>
                     <a:lnB w="9525" cap="flat" cmpd="sng" algn="ctr">
                       <a:solidFill>
-                        <a:srgbClr val="D2EFDC"/>
+                        <a:srgbClr val="D5F6E0"/>
                       </a:solidFill>
                       <a:prstDash val="solid"/>
                     </a:lnB>
@@ -4113,7 +4264,7 @@
                       <a:r>
                         <a:rPr sz="1600" b="0">
                           <a:solidFill>
-                            <a:srgbClr val="2B2B2B"/>
+                            <a:srgbClr val="26231F"/>
                           </a:solidFill>
                         </a:rPr>
                         <a:t/>
@@ -4123,25 +4274,25 @@
                   <a:tcPr anchor="ctr" marL="73152" marR="73152">
                     <a:lnL w="9525" cap="flat" cmpd="sng" algn="ctr">
                       <a:solidFill>
-                        <a:srgbClr val="D2EFDC"/>
+                        <a:srgbClr val="D5F6E0"/>
                       </a:solidFill>
                       <a:prstDash val="solid"/>
                     </a:lnL>
                     <a:lnR w="9525" cap="flat" cmpd="sng" algn="ctr">
                       <a:solidFill>
-                        <a:srgbClr val="D2EFDC"/>
+                        <a:srgbClr val="D5F6E0"/>
                       </a:solidFill>
                       <a:prstDash val="solid"/>
                     </a:lnR>
                     <a:lnT w="9525" cap="flat" cmpd="sng" algn="ctr">
                       <a:solidFill>
-                        <a:srgbClr val="D2EFDC"/>
+                        <a:srgbClr val="D5F6E0"/>
                       </a:solidFill>
                       <a:prstDash val="solid"/>
                     </a:lnT>
                     <a:lnB w="9525" cap="flat" cmpd="sng" algn="ctr">
                       <a:solidFill>
-                        <a:srgbClr val="D2EFDC"/>
+                        <a:srgbClr val="D5F6E0"/>
                       </a:solidFill>
                       <a:prstDash val="solid"/>
                     </a:lnB>
@@ -4161,7 +4312,7 @@
                       <a:r>
                         <a:rPr sz="1600" b="1">
                           <a:solidFill>
-                            <a:srgbClr val="183A23"/>
+                            <a:srgbClr val="274932"/>
                           </a:solidFill>
                         </a:rPr>
                         <a:t>건강 상태 메모</a:t>
@@ -4171,30 +4322,30 @@
                   <a:tcPr anchor="ctr" marL="73152" marR="73152">
                     <a:lnL w="9525" cap="flat" cmpd="sng" algn="ctr">
                       <a:solidFill>
-                        <a:srgbClr val="D2EFDC"/>
+                        <a:srgbClr val="D5F6E0"/>
                       </a:solidFill>
                       <a:prstDash val="solid"/>
                     </a:lnL>
                     <a:lnR w="9525" cap="flat" cmpd="sng" algn="ctr">
                       <a:solidFill>
-                        <a:srgbClr val="D2EFDC"/>
+                        <a:srgbClr val="D5F6E0"/>
                       </a:solidFill>
                       <a:prstDash val="solid"/>
                     </a:lnR>
                     <a:lnT w="9525" cap="flat" cmpd="sng" algn="ctr">
                       <a:solidFill>
-                        <a:srgbClr val="D2EFDC"/>
+                        <a:srgbClr val="D5F6E0"/>
                       </a:solidFill>
                       <a:prstDash val="solid"/>
                     </a:lnT>
                     <a:lnB w="9525" cap="flat" cmpd="sng" algn="ctr">
                       <a:solidFill>
-                        <a:srgbClr val="D2EFDC"/>
+                        <a:srgbClr val="D5F6E0"/>
                       </a:solidFill>
                       <a:prstDash val="solid"/>
                     </a:lnB>
                     <a:solidFill>
-                      <a:srgbClr val="D2EFDC"/>
+                      <a:srgbClr val="D5F6E0"/>
                     </a:solidFill>
                   </a:tcPr>
                 </a:tc>
@@ -4207,7 +4358,7 @@
                       <a:r>
                         <a:rPr sz="1600" b="0">
                           <a:solidFill>
-                            <a:srgbClr val="2B2B2B"/>
+                            <a:srgbClr val="26231F"/>
                           </a:solidFill>
                         </a:rPr>
                         <a:t/>
@@ -4217,30 +4368,30 @@
                   <a:tcPr anchor="ctr" marL="73152" marR="73152">
                     <a:lnL w="9525" cap="flat" cmpd="sng" algn="ctr">
                       <a:solidFill>
-                        <a:srgbClr val="D2EFDC"/>
+                        <a:srgbClr val="D5F6E0"/>
                       </a:solidFill>
                       <a:prstDash val="solid"/>
                     </a:lnL>
                     <a:lnR w="9525" cap="flat" cmpd="sng" algn="ctr">
                       <a:solidFill>
-                        <a:srgbClr val="D2EFDC"/>
+                        <a:srgbClr val="D5F6E0"/>
                       </a:solidFill>
                       <a:prstDash val="solid"/>
                     </a:lnR>
                     <a:lnT w="9525" cap="flat" cmpd="sng" algn="ctr">
                       <a:solidFill>
-                        <a:srgbClr val="D2EFDC"/>
+                        <a:srgbClr val="D5F6E0"/>
                       </a:solidFill>
                       <a:prstDash val="solid"/>
                     </a:lnT>
                     <a:lnB w="9525" cap="flat" cmpd="sng" algn="ctr">
                       <a:solidFill>
-                        <a:srgbClr val="D2EFDC"/>
+                        <a:srgbClr val="D5F6E0"/>
                       </a:solidFill>
                       <a:prstDash val="solid"/>
                     </a:lnB>
                     <a:solidFill>
-                      <a:srgbClr val="F1F9F3"/>
+                      <a:srgbClr val="ECFBF1"/>
                     </a:solidFill>
                   </a:tcPr>
                 </a:tc>
@@ -4253,7 +4404,7 @@
                       <a:r>
                         <a:rPr sz="1600" b="0">
                           <a:solidFill>
-                            <a:srgbClr val="2B2B2B"/>
+                            <a:srgbClr val="26231F"/>
                           </a:solidFill>
                         </a:rPr>
                         <a:t/>
@@ -4263,30 +4414,30 @@
                   <a:tcPr anchor="ctr" marL="73152" marR="73152">
                     <a:lnL w="9525" cap="flat" cmpd="sng" algn="ctr">
                       <a:solidFill>
-                        <a:srgbClr val="D2EFDC"/>
+                        <a:srgbClr val="D5F6E0"/>
                       </a:solidFill>
                       <a:prstDash val="solid"/>
                     </a:lnL>
                     <a:lnR w="9525" cap="flat" cmpd="sng" algn="ctr">
                       <a:solidFill>
-                        <a:srgbClr val="D2EFDC"/>
+                        <a:srgbClr val="D5F6E0"/>
                       </a:solidFill>
                       <a:prstDash val="solid"/>
                     </a:lnR>
                     <a:lnT w="9525" cap="flat" cmpd="sng" algn="ctr">
                       <a:solidFill>
-                        <a:srgbClr val="D2EFDC"/>
+                        <a:srgbClr val="D5F6E0"/>
                       </a:solidFill>
                       <a:prstDash val="solid"/>
                     </a:lnT>
                     <a:lnB w="9525" cap="flat" cmpd="sng" algn="ctr">
                       <a:solidFill>
-                        <a:srgbClr val="D2EFDC"/>
+                        <a:srgbClr val="D5F6E0"/>
                       </a:solidFill>
                       <a:prstDash val="solid"/>
                     </a:lnB>
                     <a:solidFill>
-                      <a:srgbClr val="F1F9F3"/>
+                      <a:srgbClr val="ECFBF1"/>
                     </a:solidFill>
                   </a:tcPr>
                 </a:tc>
@@ -4329,14 +4480,43 @@
         </p:nvSpPr>
         <p:spPr>
           <a:xfrm>
-            <a:off x="9905695" y="-1463040"/>
-            <a:ext cx="3840480" cy="3840480"/>
+            <a:off x="0" y="6565392"/>
+            <a:ext cx="12191695" cy="292608"/>
+          </a:xfrm>
+          <a:prstGeom prst="rect">
+            <a:avLst/>
+          </a:prstGeom>
+          <a:solidFill>
+            <a:srgbClr val="ADEBC2"/>
+          </a:solidFill>
+          <a:ln>
+            <a:noFill/>
+          </a:ln>
+        </p:spPr>
+        <p:txBody>
+          <a:bodyPr rtlCol="0" anchor="ctr"/>
+          <a:lstStyle/>
+          <a:p>
+            <a:pPr algn="ctr"/>
+          </a:p>
+        </p:txBody>
+      </p:sp>
+      <p:sp>
+        <p:nvSpPr>
+          <p:cNvPr id="4" name="장식"/>
+          <p:cNvSpPr/>
+          <p:nvPr/>
+        </p:nvSpPr>
+        <p:spPr>
+          <a:xfrm>
+            <a:off x="10180015" y="-1645920"/>
+            <a:ext cx="3474720" cy="3474720"/>
           </a:xfrm>
           <a:prstGeom prst="ellipse">
             <a:avLst/>
           </a:prstGeom>
           <a:solidFill>
-            <a:srgbClr val="D2EFDC"/>
+            <a:srgbClr val="ADEBC2"/>
           </a:solidFill>
           <a:ln>
             <a:noFill/>
@@ -4352,20 +4532,58 @@
       </p:sp>
       <p:sp>
         <p:nvSpPr>
-          <p:cNvPr id="4" name="장식"/>
+          <p:cNvPr id="5" name="상단 라벨"/>
+          <p:cNvSpPr txBox="1"/>
+          <p:nvPr/>
+        </p:nvSpPr>
+        <p:spPr>
+          <a:xfrm>
+            <a:off x="640080" y="274320"/>
+            <a:ext cx="5486400" cy="274320"/>
+          </a:xfrm>
+          <a:prstGeom prst="rect">
+            <a:avLst/>
+          </a:prstGeom>
+          <a:noFill/>
+        </p:spPr>
+        <p:txBody>
+          <a:bodyPr wrap="square" lIns="54864" rIns="54864" tIns="27432" bIns="27432" anchor="ctr">
+            <a:noAutofit/>
+          </a:bodyPr>
+          <a:lstStyle/>
+          <a:p>
+            <a:pPr algn="l">
+              <a:lnSpc>
+                <a:spcPct val="115000"/>
+              </a:lnSpc>
+            </a:pPr>
+            <a:r>
+              <a:rPr sz="900" b="1" i="0" spc="250">
+                <a:solidFill>
+                  <a:srgbClr val="26231F"/>
+                </a:solidFill>
+              </a:rPr>
+              <a:t>INSURANCE CHECK</a:t>
+            </a:r>
+          </a:p>
+        </p:txBody>
+      </p:sp>
+      <p:sp>
+        <p:nvSpPr>
+          <p:cNvPr id="6" name="포인트"/>
           <p:cNvSpPr/>
           <p:nvPr/>
         </p:nvSpPr>
         <p:spPr>
           <a:xfrm>
-            <a:off x="11094415" y="274320"/>
-            <a:ext cx="411480" cy="411480"/>
-          </a:xfrm>
-          <a:prstGeom prst="ellipse">
+            <a:off x="11048695" y="502919"/>
+            <a:ext cx="274320" cy="274320"/>
+          </a:xfrm>
+          <a:prstGeom prst="star4">
             <a:avLst/>
           </a:prstGeom>
           <a:solidFill>
-            <a:srgbClr val="29653D"/>
+            <a:srgbClr val="FFFFFF"/>
           </a:solidFill>
           <a:ln>
             <a:noFill/>
@@ -4391,8 +4609,8 @@
         </p:nvSpPr>
         <p:spPr>
           <a:xfrm>
-            <a:off x="640080" y="457200"/>
-            <a:ext cx="9722815" cy="868680"/>
+            <a:off x="640080" y="658368"/>
+            <a:ext cx="9082735" cy="868680"/>
           </a:xfrm>
         </p:spPr>
         <p:txBody>
@@ -4409,7 +4627,7 @@
             <a:r>
               <a:rPr sz="3000" b="1" i="0">
                 <a:solidFill>
-                  <a:srgbClr val="183A23"/>
+                  <a:srgbClr val="26231F"/>
                 </a:solidFill>
               </a:rPr>
               <a:t>가입한 보험 목록</a:t>
@@ -4419,14 +4637,14 @@
       </p:sp>
       <p:graphicFrame>
         <p:nvGraphicFramePr>
-          <p:cNvPr id="5" name="표"/>
+          <p:cNvPr id="7" name="표"/>
           <p:cNvGraphicFramePr>
             <a:graphicFrameLocks noGrp="1"/>
           </p:cNvGraphicFramePr>
           <p:nvPr/>
         </p:nvGraphicFramePr>
         <p:xfrm>
-          <a:off x="640080" y="1600200"/>
+          <a:off x="640080" y="1783080"/>
           <a:ext cx="10911535" cy="4224528"/>
         </p:xfrm>
         <a:graphic>
@@ -4452,7 +4670,7 @@
                       <a:r>
                         <a:rPr sz="1400" b="1">
                           <a:solidFill>
-                            <a:srgbClr val="FFFFFF"/>
+                            <a:srgbClr val="26231F"/>
                           </a:solidFill>
                         </a:rPr>
                         <a:t>보험회사</a:t>
@@ -4462,30 +4680,30 @@
                   <a:tcPr anchor="ctr" marL="73152" marR="73152">
                     <a:lnL w="9525" cap="flat" cmpd="sng" algn="ctr">
                       <a:solidFill>
-                        <a:srgbClr val="29653D"/>
+                        <a:srgbClr val="98E1B1"/>
                       </a:solidFill>
                       <a:prstDash val="solid"/>
                     </a:lnL>
                     <a:lnR w="9525" cap="flat" cmpd="sng" algn="ctr">
                       <a:solidFill>
-                        <a:srgbClr val="29653D"/>
+                        <a:srgbClr val="98E1B1"/>
                       </a:solidFill>
                       <a:prstDash val="solid"/>
                     </a:lnR>
                     <a:lnT w="9525" cap="flat" cmpd="sng" algn="ctr">
                       <a:solidFill>
-                        <a:srgbClr val="29653D"/>
+                        <a:srgbClr val="98E1B1"/>
                       </a:solidFill>
                       <a:prstDash val="solid"/>
                     </a:lnT>
                     <a:lnB w="9525" cap="flat" cmpd="sng" algn="ctr">
                       <a:solidFill>
-                        <a:srgbClr val="29653D"/>
+                        <a:srgbClr val="98E1B1"/>
                       </a:solidFill>
                       <a:prstDash val="solid"/>
                     </a:lnB>
                     <a:solidFill>
-                      <a:srgbClr val="29653D"/>
+                      <a:srgbClr val="98E1B1"/>
                     </a:solidFill>
                   </a:tcPr>
                 </a:tc>
@@ -4498,7 +4716,7 @@
                       <a:r>
                         <a:rPr sz="1400" b="1">
                           <a:solidFill>
-                            <a:srgbClr val="FFFFFF"/>
+                            <a:srgbClr val="26231F"/>
                           </a:solidFill>
                         </a:rPr>
                         <a:t>상품명</a:t>
@@ -4508,30 +4726,30 @@
                   <a:tcPr anchor="ctr" marL="73152" marR="73152">
                     <a:lnL w="9525" cap="flat" cmpd="sng" algn="ctr">
                       <a:solidFill>
-                        <a:srgbClr val="29653D"/>
+                        <a:srgbClr val="98E1B1"/>
                       </a:solidFill>
                       <a:prstDash val="solid"/>
                     </a:lnL>
                     <a:lnR w="9525" cap="flat" cmpd="sng" algn="ctr">
                       <a:solidFill>
-                        <a:srgbClr val="29653D"/>
+                        <a:srgbClr val="98E1B1"/>
                       </a:solidFill>
                       <a:prstDash val="solid"/>
                     </a:lnR>
                     <a:lnT w="9525" cap="flat" cmpd="sng" algn="ctr">
                       <a:solidFill>
-                        <a:srgbClr val="29653D"/>
+                        <a:srgbClr val="98E1B1"/>
                       </a:solidFill>
                       <a:prstDash val="solid"/>
                     </a:lnT>
                     <a:lnB w="9525" cap="flat" cmpd="sng" algn="ctr">
                       <a:solidFill>
-                        <a:srgbClr val="29653D"/>
+                        <a:srgbClr val="98E1B1"/>
                       </a:solidFill>
                       <a:prstDash val="solid"/>
                     </a:lnB>
                     <a:solidFill>
-                      <a:srgbClr val="29653D"/>
+                      <a:srgbClr val="98E1B1"/>
                     </a:solidFill>
                   </a:tcPr>
                 </a:tc>
@@ -4544,7 +4762,7 @@
                       <a:r>
                         <a:rPr sz="1400" b="1">
                           <a:solidFill>
-                            <a:srgbClr val="FFFFFF"/>
+                            <a:srgbClr val="26231F"/>
                           </a:solidFill>
                         </a:rPr>
                         <a:t>종류</a:t>
@@ -4554,30 +4772,30 @@
                   <a:tcPr anchor="ctr" marL="73152" marR="73152">
                     <a:lnL w="9525" cap="flat" cmpd="sng" algn="ctr">
                       <a:solidFill>
-                        <a:srgbClr val="29653D"/>
+                        <a:srgbClr val="98E1B1"/>
                       </a:solidFill>
                       <a:prstDash val="solid"/>
                     </a:lnL>
                     <a:lnR w="9525" cap="flat" cmpd="sng" algn="ctr">
                       <a:solidFill>
-                        <a:srgbClr val="29653D"/>
+                        <a:srgbClr val="98E1B1"/>
                       </a:solidFill>
                       <a:prstDash val="solid"/>
                     </a:lnR>
                     <a:lnT w="9525" cap="flat" cmpd="sng" algn="ctr">
                       <a:solidFill>
-                        <a:srgbClr val="29653D"/>
+                        <a:srgbClr val="98E1B1"/>
                       </a:solidFill>
                       <a:prstDash val="solid"/>
                     </a:lnT>
                     <a:lnB w="9525" cap="flat" cmpd="sng" algn="ctr">
                       <a:solidFill>
-                        <a:srgbClr val="29653D"/>
+                        <a:srgbClr val="98E1B1"/>
                       </a:solidFill>
                       <a:prstDash val="solid"/>
                     </a:lnB>
                     <a:solidFill>
-                      <a:srgbClr val="29653D"/>
+                      <a:srgbClr val="98E1B1"/>
                     </a:solidFill>
                   </a:tcPr>
                 </a:tc>
@@ -4590,7 +4808,7 @@
                       <a:r>
                         <a:rPr sz="1400" b="1">
                           <a:solidFill>
-                            <a:srgbClr val="FFFFFF"/>
+                            <a:srgbClr val="26231F"/>
                           </a:solidFill>
                         </a:rPr>
                         <a:t>만기일</a:t>
@@ -4600,30 +4818,30 @@
                   <a:tcPr anchor="ctr" marL="73152" marR="73152">
                     <a:lnL w="9525" cap="flat" cmpd="sng" algn="ctr">
                       <a:solidFill>
-                        <a:srgbClr val="29653D"/>
+                        <a:srgbClr val="98E1B1"/>
                       </a:solidFill>
                       <a:prstDash val="solid"/>
                     </a:lnL>
                     <a:lnR w="9525" cap="flat" cmpd="sng" algn="ctr">
                       <a:solidFill>
-                        <a:srgbClr val="29653D"/>
+                        <a:srgbClr val="98E1B1"/>
                       </a:solidFill>
                       <a:prstDash val="solid"/>
                     </a:lnR>
                     <a:lnT w="9525" cap="flat" cmpd="sng" algn="ctr">
                       <a:solidFill>
-                        <a:srgbClr val="29653D"/>
+                        <a:srgbClr val="98E1B1"/>
                       </a:solidFill>
                       <a:prstDash val="solid"/>
                     </a:lnT>
                     <a:lnB w="9525" cap="flat" cmpd="sng" algn="ctr">
                       <a:solidFill>
-                        <a:srgbClr val="29653D"/>
+                        <a:srgbClr val="98E1B1"/>
                       </a:solidFill>
                       <a:prstDash val="solid"/>
                     </a:lnB>
                     <a:solidFill>
-                      <a:srgbClr val="29653D"/>
+                      <a:srgbClr val="98E1B1"/>
                     </a:solidFill>
                   </a:tcPr>
                 </a:tc>
@@ -4636,7 +4854,7 @@
                       <a:r>
                         <a:rPr sz="1400" b="1">
                           <a:solidFill>
-                            <a:srgbClr val="FFFFFF"/>
+                            <a:srgbClr val="26231F"/>
                           </a:solidFill>
                         </a:rPr>
                         <a:t>월 보험료</a:t>
@@ -4646,30 +4864,30 @@
                   <a:tcPr anchor="ctr" marL="73152" marR="73152">
                     <a:lnL w="9525" cap="flat" cmpd="sng" algn="ctr">
                       <a:solidFill>
-                        <a:srgbClr val="29653D"/>
+                        <a:srgbClr val="98E1B1"/>
                       </a:solidFill>
                       <a:prstDash val="solid"/>
                     </a:lnL>
                     <a:lnR w="9525" cap="flat" cmpd="sng" algn="ctr">
                       <a:solidFill>
-                        <a:srgbClr val="29653D"/>
+                        <a:srgbClr val="98E1B1"/>
                       </a:solidFill>
                       <a:prstDash val="solid"/>
                     </a:lnR>
                     <a:lnT w="9525" cap="flat" cmpd="sng" algn="ctr">
                       <a:solidFill>
-                        <a:srgbClr val="29653D"/>
+                        <a:srgbClr val="98E1B1"/>
                       </a:solidFill>
                       <a:prstDash val="solid"/>
                     </a:lnT>
                     <a:lnB w="9525" cap="flat" cmpd="sng" algn="ctr">
                       <a:solidFill>
-                        <a:srgbClr val="29653D"/>
+                        <a:srgbClr val="98E1B1"/>
                       </a:solidFill>
                       <a:prstDash val="solid"/>
                     </a:lnB>
                     <a:solidFill>
-                      <a:srgbClr val="29653D"/>
+                      <a:srgbClr val="98E1B1"/>
                     </a:solidFill>
                   </a:tcPr>
                 </a:tc>
@@ -4684,7 +4902,7 @@
                       <a:r>
                         <a:rPr sz="1400" b="0">
                           <a:solidFill>
-                            <a:srgbClr val="2B2B2B"/>
+                            <a:srgbClr val="26231F"/>
                           </a:solidFill>
                         </a:rPr>
                         <a:t/>
@@ -4694,25 +4912,25 @@
                   <a:tcPr anchor="ctr" marL="73152" marR="73152">
                     <a:lnL w="9525" cap="flat" cmpd="sng" algn="ctr">
                       <a:solidFill>
-                        <a:srgbClr val="D2EFDC"/>
+                        <a:srgbClr val="D5F6E0"/>
                       </a:solidFill>
                       <a:prstDash val="solid"/>
                     </a:lnL>
                     <a:lnR w="9525" cap="flat" cmpd="sng" algn="ctr">
                       <a:solidFill>
-                        <a:srgbClr val="D2EFDC"/>
+                        <a:srgbClr val="D5F6E0"/>
                       </a:solidFill>
                       <a:prstDash val="solid"/>
                     </a:lnR>
                     <a:lnT w="9525" cap="flat" cmpd="sng" algn="ctr">
                       <a:solidFill>
-                        <a:srgbClr val="D2EFDC"/>
+                        <a:srgbClr val="D5F6E0"/>
                       </a:solidFill>
                       <a:prstDash val="solid"/>
                     </a:lnT>
                     <a:lnB w="9525" cap="flat" cmpd="sng" algn="ctr">
                       <a:solidFill>
-                        <a:srgbClr val="D2EFDC"/>
+                        <a:srgbClr val="D5F6E0"/>
                       </a:solidFill>
                       <a:prstDash val="solid"/>
                     </a:lnB>
@@ -4730,7 +4948,7 @@
                       <a:r>
                         <a:rPr sz="1400" b="0">
                           <a:solidFill>
-                            <a:srgbClr val="2B2B2B"/>
+                            <a:srgbClr val="26231F"/>
                           </a:solidFill>
                         </a:rPr>
                         <a:t/>
@@ -4740,25 +4958,25 @@
                   <a:tcPr anchor="ctr" marL="73152" marR="73152">
                     <a:lnL w="9525" cap="flat" cmpd="sng" algn="ctr">
                       <a:solidFill>
-                        <a:srgbClr val="D2EFDC"/>
+                        <a:srgbClr val="D5F6E0"/>
                       </a:solidFill>
                       <a:prstDash val="solid"/>
                     </a:lnL>
                     <a:lnR w="9525" cap="flat" cmpd="sng" algn="ctr">
                       <a:solidFill>
-                        <a:srgbClr val="D2EFDC"/>
+                        <a:srgbClr val="D5F6E0"/>
                       </a:solidFill>
                       <a:prstDash val="solid"/>
                     </a:lnR>
                     <a:lnT w="9525" cap="flat" cmpd="sng" algn="ctr">
                       <a:solidFill>
-                        <a:srgbClr val="D2EFDC"/>
+                        <a:srgbClr val="D5F6E0"/>
                       </a:solidFill>
                       <a:prstDash val="solid"/>
                     </a:lnT>
                     <a:lnB w="9525" cap="flat" cmpd="sng" algn="ctr">
                       <a:solidFill>
-                        <a:srgbClr val="D2EFDC"/>
+                        <a:srgbClr val="D5F6E0"/>
                       </a:solidFill>
                       <a:prstDash val="solid"/>
                     </a:lnB>
@@ -4776,7 +4994,7 @@
                       <a:r>
                         <a:rPr sz="1400" b="0">
                           <a:solidFill>
-                            <a:srgbClr val="2B2B2B"/>
+                            <a:srgbClr val="26231F"/>
                           </a:solidFill>
                         </a:rPr>
                         <a:t/>
@@ -4786,25 +5004,25 @@
                   <a:tcPr anchor="ctr" marL="73152" marR="73152">
                     <a:lnL w="9525" cap="flat" cmpd="sng" algn="ctr">
                       <a:solidFill>
-                        <a:srgbClr val="D2EFDC"/>
+                        <a:srgbClr val="D5F6E0"/>
                       </a:solidFill>
                       <a:prstDash val="solid"/>
                     </a:lnL>
                     <a:lnR w="9525" cap="flat" cmpd="sng" algn="ctr">
                       <a:solidFill>
-                        <a:srgbClr val="D2EFDC"/>
+                        <a:srgbClr val="D5F6E0"/>
                       </a:solidFill>
                       <a:prstDash val="solid"/>
                     </a:lnR>
                     <a:lnT w="9525" cap="flat" cmpd="sng" algn="ctr">
                       <a:solidFill>
-                        <a:srgbClr val="D2EFDC"/>
+                        <a:srgbClr val="D5F6E0"/>
                       </a:solidFill>
                       <a:prstDash val="solid"/>
                     </a:lnT>
                     <a:lnB w="9525" cap="flat" cmpd="sng" algn="ctr">
                       <a:solidFill>
-                        <a:srgbClr val="D2EFDC"/>
+                        <a:srgbClr val="D5F6E0"/>
                       </a:solidFill>
                       <a:prstDash val="solid"/>
                     </a:lnB>
@@ -4822,7 +5040,7 @@
                       <a:r>
                         <a:rPr sz="1400" b="0">
                           <a:solidFill>
-                            <a:srgbClr val="2B2B2B"/>
+                            <a:srgbClr val="26231F"/>
                           </a:solidFill>
                         </a:rPr>
                         <a:t/>
@@ -4832,25 +5050,25 @@
                   <a:tcPr anchor="ctr" marL="73152" marR="73152">
                     <a:lnL w="9525" cap="flat" cmpd="sng" algn="ctr">
                       <a:solidFill>
-                        <a:srgbClr val="D2EFDC"/>
+                        <a:srgbClr val="D5F6E0"/>
                       </a:solidFill>
                       <a:prstDash val="solid"/>
                     </a:lnL>
                     <a:lnR w="9525" cap="flat" cmpd="sng" algn="ctr">
                       <a:solidFill>
-                        <a:srgbClr val="D2EFDC"/>
+                        <a:srgbClr val="D5F6E0"/>
                       </a:solidFill>
                       <a:prstDash val="solid"/>
                     </a:lnR>
                     <a:lnT w="9525" cap="flat" cmpd="sng" algn="ctr">
                       <a:solidFill>
-                        <a:srgbClr val="D2EFDC"/>
+                        <a:srgbClr val="D5F6E0"/>
                       </a:solidFill>
                       <a:prstDash val="solid"/>
                     </a:lnT>
                     <a:lnB w="9525" cap="flat" cmpd="sng" algn="ctr">
                       <a:solidFill>
-                        <a:srgbClr val="D2EFDC"/>
+                        <a:srgbClr val="D5F6E0"/>
                       </a:solidFill>
                       <a:prstDash val="solid"/>
                     </a:lnB>
@@ -4868,7 +5086,7 @@
                       <a:r>
                         <a:rPr sz="1400" b="0">
                           <a:solidFill>
-                            <a:srgbClr val="2B2B2B"/>
+                            <a:srgbClr val="26231F"/>
                           </a:solidFill>
                         </a:rPr>
                         <a:t/>
@@ -4878,25 +5096,25 @@
                   <a:tcPr anchor="ctr" marL="73152" marR="73152">
                     <a:lnL w="9525" cap="flat" cmpd="sng" algn="ctr">
                       <a:solidFill>
-                        <a:srgbClr val="D2EFDC"/>
+                        <a:srgbClr val="D5F6E0"/>
                       </a:solidFill>
                       <a:prstDash val="solid"/>
                     </a:lnL>
                     <a:lnR w="9525" cap="flat" cmpd="sng" algn="ctr">
                       <a:solidFill>
-                        <a:srgbClr val="D2EFDC"/>
+                        <a:srgbClr val="D5F6E0"/>
                       </a:solidFill>
                       <a:prstDash val="solid"/>
                     </a:lnR>
                     <a:lnT w="9525" cap="flat" cmpd="sng" algn="ctr">
                       <a:solidFill>
-                        <a:srgbClr val="D2EFDC"/>
+                        <a:srgbClr val="D5F6E0"/>
                       </a:solidFill>
                       <a:prstDash val="solid"/>
                     </a:lnT>
                     <a:lnB w="9525" cap="flat" cmpd="sng" algn="ctr">
                       <a:solidFill>
-                        <a:srgbClr val="D2EFDC"/>
+                        <a:srgbClr val="D5F6E0"/>
                       </a:solidFill>
                       <a:prstDash val="solid"/>
                     </a:lnB>
@@ -4916,7 +5134,7 @@
                       <a:r>
                         <a:rPr sz="1400" b="0">
                           <a:solidFill>
-                            <a:srgbClr val="2B2B2B"/>
+                            <a:srgbClr val="26231F"/>
                           </a:solidFill>
                         </a:rPr>
                         <a:t/>
@@ -4926,30 +5144,30 @@
                   <a:tcPr anchor="ctr" marL="73152" marR="73152">
                     <a:lnL w="9525" cap="flat" cmpd="sng" algn="ctr">
                       <a:solidFill>
-                        <a:srgbClr val="D2EFDC"/>
+                        <a:srgbClr val="D5F6E0"/>
                       </a:solidFill>
                       <a:prstDash val="solid"/>
                     </a:lnL>
                     <a:lnR w="9525" cap="flat" cmpd="sng" algn="ctr">
                       <a:solidFill>
-                        <a:srgbClr val="D2EFDC"/>
+                        <a:srgbClr val="D5F6E0"/>
                       </a:solidFill>
                       <a:prstDash val="solid"/>
                     </a:lnR>
                     <a:lnT w="9525" cap="flat" cmpd="sng" algn="ctr">
                       <a:solidFill>
-                        <a:srgbClr val="D2EFDC"/>
+                        <a:srgbClr val="D5F6E0"/>
                       </a:solidFill>
                       <a:prstDash val="solid"/>
                     </a:lnT>
                     <a:lnB w="9525" cap="flat" cmpd="sng" algn="ctr">
                       <a:solidFill>
-                        <a:srgbClr val="D2EFDC"/>
+                        <a:srgbClr val="D5F6E0"/>
                       </a:solidFill>
                       <a:prstDash val="solid"/>
                     </a:lnB>
                     <a:solidFill>
-                      <a:srgbClr val="F1F9F3"/>
+                      <a:srgbClr val="ECFBF1"/>
                     </a:solidFill>
                   </a:tcPr>
                 </a:tc>
@@ -4962,7 +5180,7 @@
                       <a:r>
                         <a:rPr sz="1400" b="0">
                           <a:solidFill>
-                            <a:srgbClr val="2B2B2B"/>
+                            <a:srgbClr val="26231F"/>
                           </a:solidFill>
                         </a:rPr>
                         <a:t/>
@@ -4972,30 +5190,30 @@
                   <a:tcPr anchor="ctr" marL="73152" marR="73152">
                     <a:lnL w="9525" cap="flat" cmpd="sng" algn="ctr">
                       <a:solidFill>
-                        <a:srgbClr val="D2EFDC"/>
+                        <a:srgbClr val="D5F6E0"/>
                       </a:solidFill>
                       <a:prstDash val="solid"/>
                     </a:lnL>
                     <a:lnR w="9525" cap="flat" cmpd="sng" algn="ctr">
                       <a:solidFill>
-                        <a:srgbClr val="D2EFDC"/>
+                        <a:srgbClr val="D5F6E0"/>
                       </a:solidFill>
                       <a:prstDash val="solid"/>
                     </a:lnR>
                     <a:lnT w="9525" cap="flat" cmpd="sng" algn="ctr">
                       <a:solidFill>
-                        <a:srgbClr val="D2EFDC"/>
+                        <a:srgbClr val="D5F6E0"/>
                       </a:solidFill>
                       <a:prstDash val="solid"/>
                     </a:lnT>
                     <a:lnB w="9525" cap="flat" cmpd="sng" algn="ctr">
                       <a:solidFill>
-                        <a:srgbClr val="D2EFDC"/>
+                        <a:srgbClr val="D5F6E0"/>
                       </a:solidFill>
                       <a:prstDash val="solid"/>
                     </a:lnB>
                     <a:solidFill>
-                      <a:srgbClr val="F1F9F3"/>
+                      <a:srgbClr val="ECFBF1"/>
                     </a:solidFill>
                   </a:tcPr>
                 </a:tc>
@@ -5008,7 +5226,7 @@
                       <a:r>
                         <a:rPr sz="1400" b="0">
                           <a:solidFill>
-                            <a:srgbClr val="2B2B2B"/>
+                            <a:srgbClr val="26231F"/>
                           </a:solidFill>
                         </a:rPr>
                         <a:t/>
@@ -5018,30 +5236,30 @@
                   <a:tcPr anchor="ctr" marL="73152" marR="73152">
                     <a:lnL w="9525" cap="flat" cmpd="sng" algn="ctr">
                       <a:solidFill>
-                        <a:srgbClr val="D2EFDC"/>
+                        <a:srgbClr val="D5F6E0"/>
                       </a:solidFill>
                       <a:prstDash val="solid"/>
                     </a:lnL>
                     <a:lnR w="9525" cap="flat" cmpd="sng" algn="ctr">
                       <a:solidFill>
-                        <a:srgbClr val="D2EFDC"/>
+                        <a:srgbClr val="D5F6E0"/>
                       </a:solidFill>
                       <a:prstDash val="solid"/>
                     </a:lnR>
                     <a:lnT w="9525" cap="flat" cmpd="sng" algn="ctr">
                       <a:solidFill>
-                        <a:srgbClr val="D2EFDC"/>
+                        <a:srgbClr val="D5F6E0"/>
                       </a:solidFill>
                       <a:prstDash val="solid"/>
                     </a:lnT>
                     <a:lnB w="9525" cap="flat" cmpd="sng" algn="ctr">
                       <a:solidFill>
-                        <a:srgbClr val="D2EFDC"/>
+                        <a:srgbClr val="D5F6E0"/>
                       </a:solidFill>
                       <a:prstDash val="solid"/>
                     </a:lnB>
                     <a:solidFill>
-                      <a:srgbClr val="F1F9F3"/>
+                      <a:srgbClr val="ECFBF1"/>
                     </a:solidFill>
                   </a:tcPr>
                 </a:tc>
@@ -5054,7 +5272,7 @@
                       <a:r>
                         <a:rPr sz="1400" b="0">
                           <a:solidFill>
-                            <a:srgbClr val="2B2B2B"/>
+                            <a:srgbClr val="26231F"/>
                           </a:solidFill>
                         </a:rPr>
                         <a:t/>
@@ -5064,30 +5282,30 @@
                   <a:tcPr anchor="ctr" marL="73152" marR="73152">
                     <a:lnL w="9525" cap="flat" cmpd="sng" algn="ctr">
                       <a:solidFill>
-                        <a:srgbClr val="D2EFDC"/>
+                        <a:srgbClr val="D5F6E0"/>
                       </a:solidFill>
                       <a:prstDash val="solid"/>
                     </a:lnL>
                     <a:lnR w="9525" cap="flat" cmpd="sng" algn="ctr">
                       <a:solidFill>
-                        <a:srgbClr val="D2EFDC"/>
+                        <a:srgbClr val="D5F6E0"/>
                       </a:solidFill>
                       <a:prstDash val="solid"/>
                     </a:lnR>
                     <a:lnT w="9525" cap="flat" cmpd="sng" algn="ctr">
                       <a:solidFill>
-                        <a:srgbClr val="D2EFDC"/>
+                        <a:srgbClr val="D5F6E0"/>
                       </a:solidFill>
                       <a:prstDash val="solid"/>
                     </a:lnT>
                     <a:lnB w="9525" cap="flat" cmpd="sng" algn="ctr">
                       <a:solidFill>
-                        <a:srgbClr val="D2EFDC"/>
+                        <a:srgbClr val="D5F6E0"/>
                       </a:solidFill>
                       <a:prstDash val="solid"/>
                     </a:lnB>
                     <a:solidFill>
-                      <a:srgbClr val="F1F9F3"/>
+                      <a:srgbClr val="ECFBF1"/>
                     </a:solidFill>
                   </a:tcPr>
                 </a:tc>
@@ -5100,7 +5318,7 @@
                       <a:r>
                         <a:rPr sz="1400" b="0">
                           <a:solidFill>
-                            <a:srgbClr val="2B2B2B"/>
+                            <a:srgbClr val="26231F"/>
                           </a:solidFill>
                         </a:rPr>
                         <a:t/>
@@ -5110,30 +5328,30 @@
                   <a:tcPr anchor="ctr" marL="73152" marR="73152">
                     <a:lnL w="9525" cap="flat" cmpd="sng" algn="ctr">
                       <a:solidFill>
-                        <a:srgbClr val="D2EFDC"/>
+                        <a:srgbClr val="D5F6E0"/>
                       </a:solidFill>
                       <a:prstDash val="solid"/>
                     </a:lnL>
                     <a:lnR w="9525" cap="flat" cmpd="sng" algn="ctr">
                       <a:solidFill>
-                        <a:srgbClr val="D2EFDC"/>
+                        <a:srgbClr val="D5F6E0"/>
                       </a:solidFill>
                       <a:prstDash val="solid"/>
                     </a:lnR>
                     <a:lnT w="9525" cap="flat" cmpd="sng" algn="ctr">
                       <a:solidFill>
-                        <a:srgbClr val="D2EFDC"/>
+                        <a:srgbClr val="D5F6E0"/>
                       </a:solidFill>
                       <a:prstDash val="solid"/>
                     </a:lnT>
                     <a:lnB w="9525" cap="flat" cmpd="sng" algn="ctr">
                       <a:solidFill>
-                        <a:srgbClr val="D2EFDC"/>
+                        <a:srgbClr val="D5F6E0"/>
                       </a:solidFill>
                       <a:prstDash val="solid"/>
                     </a:lnB>
                     <a:solidFill>
-                      <a:srgbClr val="F1F9F3"/>
+                      <a:srgbClr val="ECFBF1"/>
                     </a:solidFill>
                   </a:tcPr>
                 </a:tc>
@@ -5148,7 +5366,7 @@
                       <a:r>
                         <a:rPr sz="1400" b="0">
                           <a:solidFill>
-                            <a:srgbClr val="2B2B2B"/>
+                            <a:srgbClr val="26231F"/>
                           </a:solidFill>
                         </a:rPr>
                         <a:t/>
@@ -5158,25 +5376,25 @@
                   <a:tcPr anchor="ctr" marL="73152" marR="73152">
                     <a:lnL w="9525" cap="flat" cmpd="sng" algn="ctr">
                       <a:solidFill>
-                        <a:srgbClr val="D2EFDC"/>
+                        <a:srgbClr val="D5F6E0"/>
                       </a:solidFill>
                       <a:prstDash val="solid"/>
                     </a:lnL>
                     <a:lnR w="9525" cap="flat" cmpd="sng" algn="ctr">
                       <a:solidFill>
-                        <a:srgbClr val="D2EFDC"/>
+                        <a:srgbClr val="D5F6E0"/>
                       </a:solidFill>
                       <a:prstDash val="solid"/>
                     </a:lnR>
                     <a:lnT w="9525" cap="flat" cmpd="sng" algn="ctr">
                       <a:solidFill>
-                        <a:srgbClr val="D2EFDC"/>
+                        <a:srgbClr val="D5F6E0"/>
                       </a:solidFill>
                       <a:prstDash val="solid"/>
                     </a:lnT>
                     <a:lnB w="9525" cap="flat" cmpd="sng" algn="ctr">
                       <a:solidFill>
-                        <a:srgbClr val="D2EFDC"/>
+                        <a:srgbClr val="D5F6E0"/>
                       </a:solidFill>
                       <a:prstDash val="solid"/>
                     </a:lnB>
@@ -5194,7 +5412,7 @@
                       <a:r>
                         <a:rPr sz="1400" b="0">
                           <a:solidFill>
-                            <a:srgbClr val="2B2B2B"/>
+                            <a:srgbClr val="26231F"/>
                           </a:solidFill>
                         </a:rPr>
                         <a:t/>
@@ -5204,25 +5422,25 @@
                   <a:tcPr anchor="ctr" marL="73152" marR="73152">
                     <a:lnL w="9525" cap="flat" cmpd="sng" algn="ctr">
                       <a:solidFill>
-                        <a:srgbClr val="D2EFDC"/>
+                        <a:srgbClr val="D5F6E0"/>
                       </a:solidFill>
                       <a:prstDash val="solid"/>
                     </a:lnL>
                     <a:lnR w="9525" cap="flat" cmpd="sng" algn="ctr">
                       <a:solidFill>
-                        <a:srgbClr val="D2EFDC"/>
+                        <a:srgbClr val="D5F6E0"/>
                       </a:solidFill>
                       <a:prstDash val="solid"/>
                     </a:lnR>
                     <a:lnT w="9525" cap="flat" cmpd="sng" algn="ctr">
                       <a:solidFill>
-                        <a:srgbClr val="D2EFDC"/>
+                        <a:srgbClr val="D5F6E0"/>
                       </a:solidFill>
                       <a:prstDash val="solid"/>
                     </a:lnT>
                     <a:lnB w="9525" cap="flat" cmpd="sng" algn="ctr">
                       <a:solidFill>
-                        <a:srgbClr val="D2EFDC"/>
+                        <a:srgbClr val="D5F6E0"/>
                       </a:solidFill>
                       <a:prstDash val="solid"/>
                     </a:lnB>
@@ -5240,7 +5458,7 @@
                       <a:r>
                         <a:rPr sz="1400" b="0">
                           <a:solidFill>
-                            <a:srgbClr val="2B2B2B"/>
+                            <a:srgbClr val="26231F"/>
                           </a:solidFill>
                         </a:rPr>
                         <a:t/>
@@ -5250,25 +5468,25 @@
                   <a:tcPr anchor="ctr" marL="73152" marR="73152">
                     <a:lnL w="9525" cap="flat" cmpd="sng" algn="ctr">
                       <a:solidFill>
-                        <a:srgbClr val="D2EFDC"/>
+                        <a:srgbClr val="D5F6E0"/>
                       </a:solidFill>
                       <a:prstDash val="solid"/>
                     </a:lnL>
                     <a:lnR w="9525" cap="flat" cmpd="sng" algn="ctr">
                       <a:solidFill>
-                        <a:srgbClr val="D2EFDC"/>
+                        <a:srgbClr val="D5F6E0"/>
                       </a:solidFill>
                       <a:prstDash val="solid"/>
                     </a:lnR>
                     <a:lnT w="9525" cap="flat" cmpd="sng" algn="ctr">
                       <a:solidFill>
-                        <a:srgbClr val="D2EFDC"/>
+                        <a:srgbClr val="D5F6E0"/>
                       </a:solidFill>
                       <a:prstDash val="solid"/>
                     </a:lnT>
                     <a:lnB w="9525" cap="flat" cmpd="sng" algn="ctr">
                       <a:solidFill>
-                        <a:srgbClr val="D2EFDC"/>
+                        <a:srgbClr val="D5F6E0"/>
                       </a:solidFill>
                       <a:prstDash val="solid"/>
                     </a:lnB>
@@ -5286,7 +5504,7 @@
                       <a:r>
                         <a:rPr sz="1400" b="0">
                           <a:solidFill>
-                            <a:srgbClr val="2B2B2B"/>
+                            <a:srgbClr val="26231F"/>
                           </a:solidFill>
                         </a:rPr>
                         <a:t/>
@@ -5296,25 +5514,25 @@
                   <a:tcPr anchor="ctr" marL="73152" marR="73152">
                     <a:lnL w="9525" cap="flat" cmpd="sng" algn="ctr">
                       <a:solidFill>
-                        <a:srgbClr val="D2EFDC"/>
+                        <a:srgbClr val="D5F6E0"/>
                       </a:solidFill>
                       <a:prstDash val="solid"/>
                     </a:lnL>
                     <a:lnR w="9525" cap="flat" cmpd="sng" algn="ctr">
                       <a:solidFill>
-                        <a:srgbClr val="D2EFDC"/>
+                        <a:srgbClr val="D5F6E0"/>
                       </a:solidFill>
                       <a:prstDash val="solid"/>
                     </a:lnR>
                     <a:lnT w="9525" cap="flat" cmpd="sng" algn="ctr">
                       <a:solidFill>
-                        <a:srgbClr val="D2EFDC"/>
+                        <a:srgbClr val="D5F6E0"/>
                       </a:solidFill>
                       <a:prstDash val="solid"/>
                     </a:lnT>
                     <a:lnB w="9525" cap="flat" cmpd="sng" algn="ctr">
                       <a:solidFill>
-                        <a:srgbClr val="D2EFDC"/>
+                        <a:srgbClr val="D5F6E0"/>
                       </a:solidFill>
                       <a:prstDash val="solid"/>
                     </a:lnB>
@@ -5332,7 +5550,7 @@
                       <a:r>
                         <a:rPr sz="1400" b="0">
                           <a:solidFill>
-                            <a:srgbClr val="2B2B2B"/>
+                            <a:srgbClr val="26231F"/>
                           </a:solidFill>
                         </a:rPr>
                         <a:t/>
@@ -5342,25 +5560,25 @@
                   <a:tcPr anchor="ctr" marL="73152" marR="73152">
                     <a:lnL w="9525" cap="flat" cmpd="sng" algn="ctr">
                       <a:solidFill>
-                        <a:srgbClr val="D2EFDC"/>
+                        <a:srgbClr val="D5F6E0"/>
                       </a:solidFill>
                       <a:prstDash val="solid"/>
                     </a:lnL>
                     <a:lnR w="9525" cap="flat" cmpd="sng" algn="ctr">
                       <a:solidFill>
-                        <a:srgbClr val="D2EFDC"/>
+                        <a:srgbClr val="D5F6E0"/>
                       </a:solidFill>
                       <a:prstDash val="solid"/>
                     </a:lnR>
                     <a:lnT w="9525" cap="flat" cmpd="sng" algn="ctr">
                       <a:solidFill>
-                        <a:srgbClr val="D2EFDC"/>
+                        <a:srgbClr val="D5F6E0"/>
                       </a:solidFill>
                       <a:prstDash val="solid"/>
                     </a:lnT>
                     <a:lnB w="9525" cap="flat" cmpd="sng" algn="ctr">
                       <a:solidFill>
-                        <a:srgbClr val="D2EFDC"/>
+                        <a:srgbClr val="D5F6E0"/>
                       </a:solidFill>
                       <a:prstDash val="solid"/>
                     </a:lnB>
@@ -5380,7 +5598,7 @@
                       <a:r>
                         <a:rPr sz="1400" b="0">
                           <a:solidFill>
-                            <a:srgbClr val="2B2B2B"/>
+                            <a:srgbClr val="26231F"/>
                           </a:solidFill>
                         </a:rPr>
                         <a:t/>
@@ -5390,30 +5608,30 @@
                   <a:tcPr anchor="ctr" marL="73152" marR="73152">
                     <a:lnL w="9525" cap="flat" cmpd="sng" algn="ctr">
                       <a:solidFill>
-                        <a:srgbClr val="D2EFDC"/>
+                        <a:srgbClr val="D5F6E0"/>
                       </a:solidFill>
                       <a:prstDash val="solid"/>
                     </a:lnL>
                     <a:lnR w="9525" cap="flat" cmpd="sng" algn="ctr">
                       <a:solidFill>
-                        <a:srgbClr val="D2EFDC"/>
+                        <a:srgbClr val="D5F6E0"/>
                       </a:solidFill>
                       <a:prstDash val="solid"/>
                     </a:lnR>
                     <a:lnT w="9525" cap="flat" cmpd="sng" algn="ctr">
                       <a:solidFill>
-                        <a:srgbClr val="D2EFDC"/>
+                        <a:srgbClr val="D5F6E0"/>
                       </a:solidFill>
                       <a:prstDash val="solid"/>
                     </a:lnT>
                     <a:lnB w="9525" cap="flat" cmpd="sng" algn="ctr">
                       <a:solidFill>
-                        <a:srgbClr val="D2EFDC"/>
+                        <a:srgbClr val="D5F6E0"/>
                       </a:solidFill>
                       <a:prstDash val="solid"/>
                     </a:lnB>
                     <a:solidFill>
-                      <a:srgbClr val="F1F9F3"/>
+                      <a:srgbClr val="ECFBF1"/>
                     </a:solidFill>
                   </a:tcPr>
                 </a:tc>
@@ -5426,7 +5644,7 @@
                       <a:r>
                         <a:rPr sz="1400" b="0">
                           <a:solidFill>
-                            <a:srgbClr val="2B2B2B"/>
+                            <a:srgbClr val="26231F"/>
                           </a:solidFill>
                         </a:rPr>
                         <a:t/>
@@ -5436,30 +5654,30 @@
                   <a:tcPr anchor="ctr" marL="73152" marR="73152">
                     <a:lnL w="9525" cap="flat" cmpd="sng" algn="ctr">
                       <a:solidFill>
-                        <a:srgbClr val="D2EFDC"/>
+                        <a:srgbClr val="D5F6E0"/>
                       </a:solidFill>
                       <a:prstDash val="solid"/>
                     </a:lnL>
                     <a:lnR w="9525" cap="flat" cmpd="sng" algn="ctr">
                       <a:solidFill>
-                        <a:srgbClr val="D2EFDC"/>
+                        <a:srgbClr val="D5F6E0"/>
                       </a:solidFill>
                       <a:prstDash val="solid"/>
                     </a:lnR>
                     <a:lnT w="9525" cap="flat" cmpd="sng" algn="ctr">
                       <a:solidFill>
-                        <a:srgbClr val="D2EFDC"/>
+                        <a:srgbClr val="D5F6E0"/>
                       </a:solidFill>
                       <a:prstDash val="solid"/>
                     </a:lnT>
                     <a:lnB w="9525" cap="flat" cmpd="sng" algn="ctr">
                       <a:solidFill>
-                        <a:srgbClr val="D2EFDC"/>
+                        <a:srgbClr val="D5F6E0"/>
                       </a:solidFill>
                       <a:prstDash val="solid"/>
                     </a:lnB>
                     <a:solidFill>
-                      <a:srgbClr val="F1F9F3"/>
+                      <a:srgbClr val="ECFBF1"/>
                     </a:solidFill>
                   </a:tcPr>
                 </a:tc>
@@ -5472,7 +5690,7 @@
                       <a:r>
                         <a:rPr sz="1400" b="0">
                           <a:solidFill>
-                            <a:srgbClr val="2B2B2B"/>
+                            <a:srgbClr val="26231F"/>
                           </a:solidFill>
                         </a:rPr>
                         <a:t/>
@@ -5482,30 +5700,30 @@
                   <a:tcPr anchor="ctr" marL="73152" marR="73152">
                     <a:lnL w="9525" cap="flat" cmpd="sng" algn="ctr">
                       <a:solidFill>
-                        <a:srgbClr val="D2EFDC"/>
+                        <a:srgbClr val="D5F6E0"/>
                       </a:solidFill>
                       <a:prstDash val="solid"/>
                     </a:lnL>
                     <a:lnR w="9525" cap="flat" cmpd="sng" algn="ctr">
                       <a:solidFill>
-                        <a:srgbClr val="D2EFDC"/>
+                        <a:srgbClr val="D5F6E0"/>
                       </a:solidFill>
                       <a:prstDash val="solid"/>
                     </a:lnR>
                     <a:lnT w="9525" cap="flat" cmpd="sng" algn="ctr">
                       <a:solidFill>
-                        <a:srgbClr val="D2EFDC"/>
+                        <a:srgbClr val="D5F6E0"/>
                       </a:solidFill>
                       <a:prstDash val="solid"/>
                     </a:lnT>
                     <a:lnB w="9525" cap="flat" cmpd="sng" algn="ctr">
                       <a:solidFill>
-                        <a:srgbClr val="D2EFDC"/>
+                        <a:srgbClr val="D5F6E0"/>
                       </a:solidFill>
                       <a:prstDash val="solid"/>
                     </a:lnB>
                     <a:solidFill>
-                      <a:srgbClr val="F1F9F3"/>
+                      <a:srgbClr val="ECFBF1"/>
                     </a:solidFill>
                   </a:tcPr>
                 </a:tc>
@@ -5518,7 +5736,7 @@
                       <a:r>
                         <a:rPr sz="1400" b="0">
                           <a:solidFill>
-                            <a:srgbClr val="2B2B2B"/>
+                            <a:srgbClr val="26231F"/>
                           </a:solidFill>
                         </a:rPr>
                         <a:t/>
@@ -5528,30 +5746,30 @@
                   <a:tcPr anchor="ctr" marL="73152" marR="73152">
                     <a:lnL w="9525" cap="flat" cmpd="sng" algn="ctr">
                       <a:solidFill>
-                        <a:srgbClr val="D2EFDC"/>
+                        <a:srgbClr val="D5F6E0"/>
                       </a:solidFill>
                       <a:prstDash val="solid"/>
                     </a:lnL>
                     <a:lnR w="9525" cap="flat" cmpd="sng" algn="ctr">
                       <a:solidFill>
-                        <a:srgbClr val="D2EFDC"/>
+                        <a:srgbClr val="D5F6E0"/>
                       </a:solidFill>
                       <a:prstDash val="solid"/>
                     </a:lnR>
                     <a:lnT w="9525" cap="flat" cmpd="sng" algn="ctr">
                       <a:solidFill>
-                        <a:srgbClr val="D2EFDC"/>
+                        <a:srgbClr val="D5F6E0"/>
                       </a:solidFill>
                       <a:prstDash val="solid"/>
                     </a:lnT>
                     <a:lnB w="9525" cap="flat" cmpd="sng" algn="ctr">
                       <a:solidFill>
-                        <a:srgbClr val="D2EFDC"/>
+                        <a:srgbClr val="D5F6E0"/>
                       </a:solidFill>
                       <a:prstDash val="solid"/>
                     </a:lnB>
                     <a:solidFill>
-                      <a:srgbClr val="F1F9F3"/>
+                      <a:srgbClr val="ECFBF1"/>
                     </a:solidFill>
                   </a:tcPr>
                 </a:tc>
@@ -5564,7 +5782,7 @@
                       <a:r>
                         <a:rPr sz="1400" b="0">
                           <a:solidFill>
-                            <a:srgbClr val="2B2B2B"/>
+                            <a:srgbClr val="26231F"/>
                           </a:solidFill>
                         </a:rPr>
                         <a:t/>
@@ -5574,30 +5792,30 @@
                   <a:tcPr anchor="ctr" marL="73152" marR="73152">
                     <a:lnL w="9525" cap="flat" cmpd="sng" algn="ctr">
                       <a:solidFill>
-                        <a:srgbClr val="D2EFDC"/>
+                        <a:srgbClr val="D5F6E0"/>
                       </a:solidFill>
                       <a:prstDash val="solid"/>
                     </a:lnL>
                     <a:lnR w="9525" cap="flat" cmpd="sng" algn="ctr">
                       <a:solidFill>
-                        <a:srgbClr val="D2EFDC"/>
+                        <a:srgbClr val="D5F6E0"/>
                       </a:solidFill>
                       <a:prstDash val="solid"/>
                     </a:lnR>
                     <a:lnT w="9525" cap="flat" cmpd="sng" algn="ctr">
                       <a:solidFill>
-                        <a:srgbClr val="D2EFDC"/>
+                        <a:srgbClr val="D5F6E0"/>
                       </a:solidFill>
                       <a:prstDash val="solid"/>
                     </a:lnT>
                     <a:lnB w="9525" cap="flat" cmpd="sng" algn="ctr">
                       <a:solidFill>
-                        <a:srgbClr val="D2EFDC"/>
+                        <a:srgbClr val="D5F6E0"/>
                       </a:solidFill>
                       <a:prstDash val="solid"/>
                     </a:lnB>
                     <a:solidFill>
-                      <a:srgbClr val="F1F9F3"/>
+                      <a:srgbClr val="ECFBF1"/>
                     </a:solidFill>
                   </a:tcPr>
                 </a:tc>
@@ -5612,7 +5830,7 @@
                       <a:r>
                         <a:rPr sz="1400" b="0">
                           <a:solidFill>
-                            <a:srgbClr val="2B2B2B"/>
+                            <a:srgbClr val="26231F"/>
                           </a:solidFill>
                         </a:rPr>
                         <a:t/>
@@ -5622,25 +5840,25 @@
                   <a:tcPr anchor="ctr" marL="73152" marR="73152">
                     <a:lnL w="9525" cap="flat" cmpd="sng" algn="ctr">
                       <a:solidFill>
-                        <a:srgbClr val="D2EFDC"/>
+                        <a:srgbClr val="D5F6E0"/>
                       </a:solidFill>
                       <a:prstDash val="solid"/>
                     </a:lnL>
                     <a:lnR w="9525" cap="flat" cmpd="sng" algn="ctr">
                       <a:solidFill>
-                        <a:srgbClr val="D2EFDC"/>
+                        <a:srgbClr val="D5F6E0"/>
                       </a:solidFill>
                       <a:prstDash val="solid"/>
                     </a:lnR>
                     <a:lnT w="9525" cap="flat" cmpd="sng" algn="ctr">
                       <a:solidFill>
-                        <a:srgbClr val="D2EFDC"/>
+                        <a:srgbClr val="D5F6E0"/>
                       </a:solidFill>
                       <a:prstDash val="solid"/>
                     </a:lnT>
                     <a:lnB w="9525" cap="flat" cmpd="sng" algn="ctr">
                       <a:solidFill>
-                        <a:srgbClr val="D2EFDC"/>
+                        <a:srgbClr val="D5F6E0"/>
                       </a:solidFill>
                       <a:prstDash val="solid"/>
                     </a:lnB>
@@ -5658,7 +5876,7 @@
                       <a:r>
                         <a:rPr sz="1400" b="0">
                           <a:solidFill>
-                            <a:srgbClr val="2B2B2B"/>
+                            <a:srgbClr val="26231F"/>
                           </a:solidFill>
                         </a:rPr>
                         <a:t/>
@@ -5668,25 +5886,25 @@
                   <a:tcPr anchor="ctr" marL="73152" marR="73152">
                     <a:lnL w="9525" cap="flat" cmpd="sng" algn="ctr">
                       <a:solidFill>
-                        <a:srgbClr val="D2EFDC"/>
+                        <a:srgbClr val="D5F6E0"/>
                       </a:solidFill>
                       <a:prstDash val="solid"/>
                     </a:lnL>
                     <a:lnR w="9525" cap="flat" cmpd="sng" algn="ctr">
                       <a:solidFill>
-                        <a:srgbClr val="D2EFDC"/>
+                        <a:srgbClr val="D5F6E0"/>
                       </a:solidFill>
                       <a:prstDash val="solid"/>
                     </a:lnR>
                     <a:lnT w="9525" cap="flat" cmpd="sng" algn="ctr">
                       <a:solidFill>
-                        <a:srgbClr val="D2EFDC"/>
+                        <a:srgbClr val="D5F6E0"/>
                       </a:solidFill>
                       <a:prstDash val="solid"/>
                     </a:lnT>
                     <a:lnB w="9525" cap="flat" cmpd="sng" algn="ctr">
                       <a:solidFill>
-                        <a:srgbClr val="D2EFDC"/>
+                        <a:srgbClr val="D5F6E0"/>
                       </a:solidFill>
                       <a:prstDash val="solid"/>
                     </a:lnB>
@@ -5704,7 +5922,7 @@
                       <a:r>
                         <a:rPr sz="1400" b="0">
                           <a:solidFill>
-                            <a:srgbClr val="2B2B2B"/>
+                            <a:srgbClr val="26231F"/>
                           </a:solidFill>
                         </a:rPr>
                         <a:t/>
@@ -5714,25 +5932,25 @@
                   <a:tcPr anchor="ctr" marL="73152" marR="73152">
                     <a:lnL w="9525" cap="flat" cmpd="sng" algn="ctr">
                       <a:solidFill>
-                        <a:srgbClr val="D2EFDC"/>
+                        <a:srgbClr val="D5F6E0"/>
                       </a:solidFill>
                       <a:prstDash val="solid"/>
                     </a:lnL>
                     <a:lnR w="9525" cap="flat" cmpd="sng" algn="ctr">
                       <a:solidFill>
-                        <a:srgbClr val="D2EFDC"/>
+                        <a:srgbClr val="D5F6E0"/>
                       </a:solidFill>
                       <a:prstDash val="solid"/>
                     </a:lnR>
                     <a:lnT w="9525" cap="flat" cmpd="sng" algn="ctr">
                       <a:solidFill>
-                        <a:srgbClr val="D2EFDC"/>
+                        <a:srgbClr val="D5F6E0"/>
                       </a:solidFill>
                       <a:prstDash val="solid"/>
                     </a:lnT>
                     <a:lnB w="9525" cap="flat" cmpd="sng" algn="ctr">
                       <a:solidFill>
-                        <a:srgbClr val="D2EFDC"/>
+                        <a:srgbClr val="D5F6E0"/>
                       </a:solidFill>
                       <a:prstDash val="solid"/>
                     </a:lnB>
@@ -5750,7 +5968,7 @@
                       <a:r>
                         <a:rPr sz="1400" b="0">
                           <a:solidFill>
-                            <a:srgbClr val="2B2B2B"/>
+                            <a:srgbClr val="26231F"/>
                           </a:solidFill>
                         </a:rPr>
                         <a:t/>
@@ -5760,25 +5978,25 @@
                   <a:tcPr anchor="ctr" marL="73152" marR="73152">
                     <a:lnL w="9525" cap="flat" cmpd="sng" algn="ctr">
                       <a:solidFill>
-                        <a:srgbClr val="D2EFDC"/>
+                        <a:srgbClr val="D5F6E0"/>
                       </a:solidFill>
                       <a:prstDash val="solid"/>
                     </a:lnL>
                     <a:lnR w="9525" cap="flat" cmpd="sng" algn="ctr">
                       <a:solidFill>
-                        <a:srgbClr val="D2EFDC"/>
+                        <a:srgbClr val="D5F6E0"/>
                       </a:solidFill>
                       <a:prstDash val="solid"/>
                     </a:lnR>
                     <a:lnT w="9525" cap="flat" cmpd="sng" algn="ctr">
                       <a:solidFill>
-                        <a:srgbClr val="D2EFDC"/>
+                        <a:srgbClr val="D5F6E0"/>
                       </a:solidFill>
                       <a:prstDash val="solid"/>
                     </a:lnT>
                     <a:lnB w="9525" cap="flat" cmpd="sng" algn="ctr">
                       <a:solidFill>
-                        <a:srgbClr val="D2EFDC"/>
+                        <a:srgbClr val="D5F6E0"/>
                       </a:solidFill>
                       <a:prstDash val="solid"/>
                     </a:lnB>
@@ -5796,7 +6014,7 @@
                       <a:r>
                         <a:rPr sz="1400" b="0">
                           <a:solidFill>
-                            <a:srgbClr val="2B2B2B"/>
+                            <a:srgbClr val="26231F"/>
                           </a:solidFill>
                         </a:rPr>
                         <a:t/>
@@ -5806,25 +6024,25 @@
                   <a:tcPr anchor="ctr" marL="73152" marR="73152">
                     <a:lnL w="9525" cap="flat" cmpd="sng" algn="ctr">
                       <a:solidFill>
-                        <a:srgbClr val="D2EFDC"/>
+                        <a:srgbClr val="D5F6E0"/>
                       </a:solidFill>
                       <a:prstDash val="solid"/>
                     </a:lnL>
                     <a:lnR w="9525" cap="flat" cmpd="sng" algn="ctr">
                       <a:solidFill>
-                        <a:srgbClr val="D2EFDC"/>
+                        <a:srgbClr val="D5F6E0"/>
                       </a:solidFill>
                       <a:prstDash val="solid"/>
                     </a:lnR>
                     <a:lnT w="9525" cap="flat" cmpd="sng" algn="ctr">
                       <a:solidFill>
-                        <a:srgbClr val="D2EFDC"/>
+                        <a:srgbClr val="D5F6E0"/>
                       </a:solidFill>
                       <a:prstDash val="solid"/>
                     </a:lnT>
                     <a:lnB w="9525" cap="flat" cmpd="sng" algn="ctr">
                       <a:solidFill>
-                        <a:srgbClr val="D2EFDC"/>
+                        <a:srgbClr val="D5F6E0"/>
                       </a:solidFill>
                       <a:prstDash val="solid"/>
                     </a:lnB>
@@ -5844,7 +6062,7 @@
                       <a:r>
                         <a:rPr sz="1400" b="0">
                           <a:solidFill>
-                            <a:srgbClr val="2B2B2B"/>
+                            <a:srgbClr val="26231F"/>
                           </a:solidFill>
                         </a:rPr>
                         <a:t/>
@@ -5854,30 +6072,30 @@
                   <a:tcPr anchor="ctr" marL="73152" marR="73152">
                     <a:lnL w="9525" cap="flat" cmpd="sng" algn="ctr">
                       <a:solidFill>
-                        <a:srgbClr val="D2EFDC"/>
+                        <a:srgbClr val="D5F6E0"/>
                       </a:solidFill>
                       <a:prstDash val="solid"/>
                     </a:lnL>
                     <a:lnR w="9525" cap="flat" cmpd="sng" algn="ctr">
                       <a:solidFill>
-                        <a:srgbClr val="D2EFDC"/>
+                        <a:srgbClr val="D5F6E0"/>
                       </a:solidFill>
                       <a:prstDash val="solid"/>
                     </a:lnR>
                     <a:lnT w="9525" cap="flat" cmpd="sng" algn="ctr">
                       <a:solidFill>
-                        <a:srgbClr val="D2EFDC"/>
+                        <a:srgbClr val="D5F6E0"/>
                       </a:solidFill>
                       <a:prstDash val="solid"/>
                     </a:lnT>
                     <a:lnB w="9525" cap="flat" cmpd="sng" algn="ctr">
                       <a:solidFill>
-                        <a:srgbClr val="D2EFDC"/>
+                        <a:srgbClr val="D5F6E0"/>
                       </a:solidFill>
                       <a:prstDash val="solid"/>
                     </a:lnB>
                     <a:solidFill>
-                      <a:srgbClr val="F1F9F3"/>
+                      <a:srgbClr val="ECFBF1"/>
                     </a:solidFill>
                   </a:tcPr>
                 </a:tc>
@@ -5890,7 +6108,7 @@
                       <a:r>
                         <a:rPr sz="1400" b="0">
                           <a:solidFill>
-                            <a:srgbClr val="2B2B2B"/>
+                            <a:srgbClr val="26231F"/>
                           </a:solidFill>
                         </a:rPr>
                         <a:t/>
@@ -5900,30 +6118,30 @@
                   <a:tcPr anchor="ctr" marL="73152" marR="73152">
                     <a:lnL w="9525" cap="flat" cmpd="sng" algn="ctr">
                       <a:solidFill>
-                        <a:srgbClr val="D2EFDC"/>
+                        <a:srgbClr val="D5F6E0"/>
                       </a:solidFill>
                       <a:prstDash val="solid"/>
                     </a:lnL>
                     <a:lnR w="9525" cap="flat" cmpd="sng" algn="ctr">
                       <a:solidFill>
-                        <a:srgbClr val="D2EFDC"/>
+                        <a:srgbClr val="D5F6E0"/>
                       </a:solidFill>
                       <a:prstDash val="solid"/>
                     </a:lnR>
                     <a:lnT w="9525" cap="flat" cmpd="sng" algn="ctr">
                       <a:solidFill>
-                        <a:srgbClr val="D2EFDC"/>
+                        <a:srgbClr val="D5F6E0"/>
                       </a:solidFill>
                       <a:prstDash val="solid"/>
                     </a:lnT>
                     <a:lnB w="9525" cap="flat" cmpd="sng" algn="ctr">
                       <a:solidFill>
-                        <a:srgbClr val="D2EFDC"/>
+                        <a:srgbClr val="D5F6E0"/>
                       </a:solidFill>
                       <a:prstDash val="solid"/>
                     </a:lnB>
                     <a:solidFill>
-                      <a:srgbClr val="F1F9F3"/>
+                      <a:srgbClr val="ECFBF1"/>
                     </a:solidFill>
                   </a:tcPr>
                 </a:tc>
@@ -5936,7 +6154,7 @@
                       <a:r>
                         <a:rPr sz="1400" b="0">
                           <a:solidFill>
-                            <a:srgbClr val="2B2B2B"/>
+                            <a:srgbClr val="26231F"/>
                           </a:solidFill>
                         </a:rPr>
                         <a:t/>
@@ -5946,30 +6164,30 @@
                   <a:tcPr anchor="ctr" marL="73152" marR="73152">
                     <a:lnL w="9525" cap="flat" cmpd="sng" algn="ctr">
                       <a:solidFill>
-                        <a:srgbClr val="D2EFDC"/>
+                        <a:srgbClr val="D5F6E0"/>
                       </a:solidFill>
                       <a:prstDash val="solid"/>
                     </a:lnL>
                     <a:lnR w="9525" cap="flat" cmpd="sng" algn="ctr">
                       <a:solidFill>
-                        <a:srgbClr val="D2EFDC"/>
+                        <a:srgbClr val="D5F6E0"/>
                       </a:solidFill>
                       <a:prstDash val="solid"/>
                     </a:lnR>
                     <a:lnT w="9525" cap="flat" cmpd="sng" algn="ctr">
                       <a:solidFill>
-                        <a:srgbClr val="D2EFDC"/>
+                        <a:srgbClr val="D5F6E0"/>
                       </a:solidFill>
                       <a:prstDash val="solid"/>
                     </a:lnT>
                     <a:lnB w="9525" cap="flat" cmpd="sng" algn="ctr">
                       <a:solidFill>
-                        <a:srgbClr val="D2EFDC"/>
+                        <a:srgbClr val="D5F6E0"/>
                       </a:solidFill>
                       <a:prstDash val="solid"/>
                     </a:lnB>
                     <a:solidFill>
-                      <a:srgbClr val="F1F9F3"/>
+                      <a:srgbClr val="ECFBF1"/>
                     </a:solidFill>
                   </a:tcPr>
                 </a:tc>
@@ -5982,7 +6200,7 @@
                       <a:r>
                         <a:rPr sz="1400" b="0">
                           <a:solidFill>
-                            <a:srgbClr val="2B2B2B"/>
+                            <a:srgbClr val="26231F"/>
                           </a:solidFill>
                         </a:rPr>
                         <a:t/>
@@ -5992,30 +6210,30 @@
                   <a:tcPr anchor="ctr" marL="73152" marR="73152">
                     <a:lnL w="9525" cap="flat" cmpd="sng" algn="ctr">
                       <a:solidFill>
-                        <a:srgbClr val="D2EFDC"/>
+                        <a:srgbClr val="D5F6E0"/>
                       </a:solidFill>
                       <a:prstDash val="solid"/>
                     </a:lnL>
                     <a:lnR w="9525" cap="flat" cmpd="sng" algn="ctr">
                       <a:solidFill>
-                        <a:srgbClr val="D2EFDC"/>
+                        <a:srgbClr val="D5F6E0"/>
                       </a:solidFill>
                       <a:prstDash val="solid"/>
                     </a:lnR>
                     <a:lnT w="9525" cap="flat" cmpd="sng" algn="ctr">
                       <a:solidFill>
-                        <a:srgbClr val="D2EFDC"/>
+                        <a:srgbClr val="D5F6E0"/>
                       </a:solidFill>
                       <a:prstDash val="solid"/>
                     </a:lnT>
                     <a:lnB w="9525" cap="flat" cmpd="sng" algn="ctr">
                       <a:solidFill>
-                        <a:srgbClr val="D2EFDC"/>
+                        <a:srgbClr val="D5F6E0"/>
                       </a:solidFill>
                       <a:prstDash val="solid"/>
                     </a:lnB>
                     <a:solidFill>
-                      <a:srgbClr val="F1F9F3"/>
+                      <a:srgbClr val="ECFBF1"/>
                     </a:solidFill>
                   </a:tcPr>
                 </a:tc>
@@ -6028,7 +6246,7 @@
                       <a:r>
                         <a:rPr sz="1400" b="0">
                           <a:solidFill>
-                            <a:srgbClr val="2B2B2B"/>
+                            <a:srgbClr val="26231F"/>
                           </a:solidFill>
                         </a:rPr>
                         <a:t/>
@@ -6038,30 +6256,30 @@
                   <a:tcPr anchor="ctr" marL="73152" marR="73152">
                     <a:lnL w="9525" cap="flat" cmpd="sng" algn="ctr">
                       <a:solidFill>
-                        <a:srgbClr val="D2EFDC"/>
+                        <a:srgbClr val="D5F6E0"/>
                       </a:solidFill>
                       <a:prstDash val="solid"/>
                     </a:lnL>
                     <a:lnR w="9525" cap="flat" cmpd="sng" algn="ctr">
                       <a:solidFill>
-                        <a:srgbClr val="D2EFDC"/>
+                        <a:srgbClr val="D5F6E0"/>
                       </a:solidFill>
                       <a:prstDash val="solid"/>
                     </a:lnR>
                     <a:lnT w="9525" cap="flat" cmpd="sng" algn="ctr">
                       <a:solidFill>
-                        <a:srgbClr val="D2EFDC"/>
+                        <a:srgbClr val="D5F6E0"/>
                       </a:solidFill>
                       <a:prstDash val="solid"/>
                     </a:lnT>
                     <a:lnB w="9525" cap="flat" cmpd="sng" algn="ctr">
                       <a:solidFill>
-                        <a:srgbClr val="D2EFDC"/>
+                        <a:srgbClr val="D5F6E0"/>
                       </a:solidFill>
                       <a:prstDash val="solid"/>
                     </a:lnB>
                     <a:solidFill>
-                      <a:srgbClr val="F1F9F3"/>
+                      <a:srgbClr val="ECFBF1"/>
                     </a:solidFill>
                   </a:tcPr>
                 </a:tc>
@@ -6104,14 +6322,43 @@
         </p:nvSpPr>
         <p:spPr>
           <a:xfrm>
-            <a:off x="9905695" y="-1463040"/>
-            <a:ext cx="3840480" cy="3840480"/>
+            <a:off x="0" y="6565392"/>
+            <a:ext cx="12191695" cy="292608"/>
+          </a:xfrm>
+          <a:prstGeom prst="rect">
+            <a:avLst/>
+          </a:prstGeom>
+          <a:solidFill>
+            <a:srgbClr val="ADEBC2"/>
+          </a:solidFill>
+          <a:ln>
+            <a:noFill/>
+          </a:ln>
+        </p:spPr>
+        <p:txBody>
+          <a:bodyPr rtlCol="0" anchor="ctr"/>
+          <a:lstStyle/>
+          <a:p>
+            <a:pPr algn="ctr"/>
+          </a:p>
+        </p:txBody>
+      </p:sp>
+      <p:sp>
+        <p:nvSpPr>
+          <p:cNvPr id="4" name="장식"/>
+          <p:cNvSpPr/>
+          <p:nvPr/>
+        </p:nvSpPr>
+        <p:spPr>
+          <a:xfrm>
+            <a:off x="10180015" y="-1645920"/>
+            <a:ext cx="3474720" cy="3474720"/>
           </a:xfrm>
           <a:prstGeom prst="ellipse">
             <a:avLst/>
           </a:prstGeom>
           <a:solidFill>
-            <a:srgbClr val="D2EFDC"/>
+            <a:srgbClr val="ADEBC2"/>
           </a:solidFill>
           <a:ln>
             <a:noFill/>
@@ -6127,20 +6374,58 @@
       </p:sp>
       <p:sp>
         <p:nvSpPr>
-          <p:cNvPr id="4" name="장식"/>
+          <p:cNvPr id="5" name="상단 라벨"/>
+          <p:cNvSpPr txBox="1"/>
+          <p:nvPr/>
+        </p:nvSpPr>
+        <p:spPr>
+          <a:xfrm>
+            <a:off x="640080" y="274320"/>
+            <a:ext cx="5486400" cy="274320"/>
+          </a:xfrm>
+          <a:prstGeom prst="rect">
+            <a:avLst/>
+          </a:prstGeom>
+          <a:noFill/>
+        </p:spPr>
+        <p:txBody>
+          <a:bodyPr wrap="square" lIns="54864" rIns="54864" tIns="27432" bIns="27432" anchor="ctr">
+            <a:noAutofit/>
+          </a:bodyPr>
+          <a:lstStyle/>
+          <a:p>
+            <a:pPr algn="l">
+              <a:lnSpc>
+                <a:spcPct val="115000"/>
+              </a:lnSpc>
+            </a:pPr>
+            <a:r>
+              <a:rPr sz="900" b="1" i="0" spc="250">
+                <a:solidFill>
+                  <a:srgbClr val="26231F"/>
+                </a:solidFill>
+              </a:rPr>
+              <a:t>INSURANCE CHECK</a:t>
+            </a:r>
+          </a:p>
+        </p:txBody>
+      </p:sp>
+      <p:sp>
+        <p:nvSpPr>
+          <p:cNvPr id="6" name="포인트"/>
           <p:cNvSpPr/>
           <p:nvPr/>
         </p:nvSpPr>
         <p:spPr>
           <a:xfrm>
-            <a:off x="11094415" y="274320"/>
-            <a:ext cx="411480" cy="411480"/>
-          </a:xfrm>
-          <a:prstGeom prst="ellipse">
+            <a:off x="11048695" y="502919"/>
+            <a:ext cx="274320" cy="274320"/>
+          </a:xfrm>
+          <a:prstGeom prst="star4">
             <a:avLst/>
           </a:prstGeom>
           <a:solidFill>
-            <a:srgbClr val="29653D"/>
+            <a:srgbClr val="FFFFFF"/>
           </a:solidFill>
           <a:ln>
             <a:noFill/>
@@ -6166,8 +6451,8 @@
         </p:nvSpPr>
         <p:spPr>
           <a:xfrm>
-            <a:off x="640080" y="457200"/>
-            <a:ext cx="9722815" cy="868680"/>
+            <a:off x="640080" y="658368"/>
+            <a:ext cx="9082735" cy="868680"/>
           </a:xfrm>
         </p:spPr>
         <p:txBody>
@@ -6184,7 +6469,7 @@
             <a:r>
               <a:rPr sz="3000" b="1" i="0">
                 <a:solidFill>
-                  <a:srgbClr val="183A23"/>
+                  <a:srgbClr val="26231F"/>
                 </a:solidFill>
               </a:rPr>
               <a:t>보장 항목 체크</a:t>
@@ -6194,14 +6479,14 @@
       </p:sp>
       <p:graphicFrame>
         <p:nvGraphicFramePr>
-          <p:cNvPr id="5" name="표"/>
+          <p:cNvPr id="7" name="표"/>
           <p:cNvGraphicFramePr>
             <a:graphicFrameLocks noGrp="1"/>
           </p:cNvGraphicFramePr>
           <p:nvPr/>
         </p:nvGraphicFramePr>
         <p:xfrm>
-          <a:off x="640080" y="1600200"/>
+          <a:off x="640080" y="1783080"/>
           <a:ext cx="10911534" cy="4773168"/>
         </p:xfrm>
         <a:graphic>
@@ -6226,7 +6511,7 @@
                       <a:r>
                         <a:rPr sz="1400" b="1">
                           <a:solidFill>
-                            <a:srgbClr val="FFFFFF"/>
+                            <a:srgbClr val="26231F"/>
                           </a:solidFill>
                         </a:rPr>
                         <a:t>보장 항목</a:t>
@@ -6236,30 +6521,30 @@
                   <a:tcPr anchor="ctr" marL="73152" marR="73152">
                     <a:lnL w="9525" cap="flat" cmpd="sng" algn="ctr">
                       <a:solidFill>
-                        <a:srgbClr val="29653D"/>
+                        <a:srgbClr val="98E1B1"/>
                       </a:solidFill>
                       <a:prstDash val="solid"/>
                     </a:lnL>
                     <a:lnR w="9525" cap="flat" cmpd="sng" algn="ctr">
                       <a:solidFill>
-                        <a:srgbClr val="29653D"/>
+                        <a:srgbClr val="98E1B1"/>
                       </a:solidFill>
                       <a:prstDash val="solid"/>
                     </a:lnR>
                     <a:lnT w="9525" cap="flat" cmpd="sng" algn="ctr">
                       <a:solidFill>
-                        <a:srgbClr val="29653D"/>
+                        <a:srgbClr val="98E1B1"/>
                       </a:solidFill>
                       <a:prstDash val="solid"/>
                     </a:lnT>
                     <a:lnB w="9525" cap="flat" cmpd="sng" algn="ctr">
                       <a:solidFill>
-                        <a:srgbClr val="29653D"/>
+                        <a:srgbClr val="98E1B1"/>
                       </a:solidFill>
                       <a:prstDash val="solid"/>
                     </a:lnB>
                     <a:solidFill>
-                      <a:srgbClr val="29653D"/>
+                      <a:srgbClr val="98E1B1"/>
                     </a:solidFill>
                   </a:tcPr>
                 </a:tc>
@@ -6272,7 +6557,7 @@
                       <a:r>
                         <a:rPr sz="1400" b="1">
                           <a:solidFill>
-                            <a:srgbClr val="FFFFFF"/>
+                            <a:srgbClr val="26231F"/>
                           </a:solidFill>
                         </a:rPr>
                         <a:t>가입 확인</a:t>
@@ -6282,30 +6567,30 @@
                   <a:tcPr anchor="ctr" marL="73152" marR="73152">
                     <a:lnL w="9525" cap="flat" cmpd="sng" algn="ctr">
                       <a:solidFill>
-                        <a:srgbClr val="29653D"/>
+                        <a:srgbClr val="98E1B1"/>
                       </a:solidFill>
                       <a:prstDash val="solid"/>
                     </a:lnL>
                     <a:lnR w="9525" cap="flat" cmpd="sng" algn="ctr">
                       <a:solidFill>
-                        <a:srgbClr val="29653D"/>
+                        <a:srgbClr val="98E1B1"/>
                       </a:solidFill>
                       <a:prstDash val="solid"/>
                     </a:lnR>
                     <a:lnT w="9525" cap="flat" cmpd="sng" algn="ctr">
                       <a:solidFill>
-                        <a:srgbClr val="29653D"/>
+                        <a:srgbClr val="98E1B1"/>
                       </a:solidFill>
                       <a:prstDash val="solid"/>
                     </a:lnT>
                     <a:lnB w="9525" cap="flat" cmpd="sng" algn="ctr">
                       <a:solidFill>
-                        <a:srgbClr val="29653D"/>
+                        <a:srgbClr val="98E1B1"/>
                       </a:solidFill>
                       <a:prstDash val="solid"/>
                     </a:lnB>
                     <a:solidFill>
-                      <a:srgbClr val="29653D"/>
+                      <a:srgbClr val="98E1B1"/>
                     </a:solidFill>
                   </a:tcPr>
                 </a:tc>
@@ -6318,7 +6603,7 @@
                       <a:r>
                         <a:rPr sz="1400" b="1">
                           <a:solidFill>
-                            <a:srgbClr val="FFFFFF"/>
+                            <a:srgbClr val="26231F"/>
                           </a:solidFill>
                         </a:rPr>
                         <a:t>확인 필요</a:t>
@@ -6328,30 +6613,30 @@
                   <a:tcPr anchor="ctr" marL="73152" marR="73152">
                     <a:lnL w="9525" cap="flat" cmpd="sng" algn="ctr">
                       <a:solidFill>
-                        <a:srgbClr val="29653D"/>
+                        <a:srgbClr val="98E1B1"/>
                       </a:solidFill>
                       <a:prstDash val="solid"/>
                     </a:lnL>
                     <a:lnR w="9525" cap="flat" cmpd="sng" algn="ctr">
                       <a:solidFill>
-                        <a:srgbClr val="29653D"/>
+                        <a:srgbClr val="98E1B1"/>
                       </a:solidFill>
                       <a:prstDash val="solid"/>
                     </a:lnR>
                     <a:lnT w="9525" cap="flat" cmpd="sng" algn="ctr">
                       <a:solidFill>
-                        <a:srgbClr val="29653D"/>
+                        <a:srgbClr val="98E1B1"/>
                       </a:solidFill>
                       <a:prstDash val="solid"/>
                     </a:lnT>
                     <a:lnB w="9525" cap="flat" cmpd="sng" algn="ctr">
                       <a:solidFill>
-                        <a:srgbClr val="29653D"/>
+                        <a:srgbClr val="98E1B1"/>
                       </a:solidFill>
                       <a:prstDash val="solid"/>
                     </a:lnB>
                     <a:solidFill>
-                      <a:srgbClr val="29653D"/>
+                      <a:srgbClr val="98E1B1"/>
                     </a:solidFill>
                   </a:tcPr>
                 </a:tc>
@@ -6364,7 +6649,7 @@
                       <a:r>
                         <a:rPr sz="1400" b="1">
                           <a:solidFill>
-                            <a:srgbClr val="FFFFFF"/>
+                            <a:srgbClr val="26231F"/>
                           </a:solidFill>
                         </a:rPr>
                         <a:t>해당 없음</a:t>
@@ -6374,30 +6659,30 @@
                   <a:tcPr anchor="ctr" marL="73152" marR="73152">
                     <a:lnL w="9525" cap="flat" cmpd="sng" algn="ctr">
                       <a:solidFill>
-                        <a:srgbClr val="29653D"/>
+                        <a:srgbClr val="98E1B1"/>
                       </a:solidFill>
                       <a:prstDash val="solid"/>
                     </a:lnL>
                     <a:lnR w="9525" cap="flat" cmpd="sng" algn="ctr">
                       <a:solidFill>
-                        <a:srgbClr val="29653D"/>
+                        <a:srgbClr val="98E1B1"/>
                       </a:solidFill>
                       <a:prstDash val="solid"/>
                     </a:lnR>
                     <a:lnT w="9525" cap="flat" cmpd="sng" algn="ctr">
                       <a:solidFill>
-                        <a:srgbClr val="29653D"/>
+                        <a:srgbClr val="98E1B1"/>
                       </a:solidFill>
                       <a:prstDash val="solid"/>
                     </a:lnT>
                     <a:lnB w="9525" cap="flat" cmpd="sng" algn="ctr">
                       <a:solidFill>
-                        <a:srgbClr val="29653D"/>
+                        <a:srgbClr val="98E1B1"/>
                       </a:solidFill>
                       <a:prstDash val="solid"/>
                     </a:lnB>
                     <a:solidFill>
-                      <a:srgbClr val="29653D"/>
+                      <a:srgbClr val="98E1B1"/>
                     </a:solidFill>
                   </a:tcPr>
                 </a:tc>
@@ -6412,7 +6697,7 @@
                       <a:r>
                         <a:rPr sz="1400" b="1">
                           <a:solidFill>
-                            <a:srgbClr val="183A23"/>
+                            <a:srgbClr val="274932"/>
                           </a:solidFill>
                         </a:rPr>
                         <a:t>사망·재해</a:t>
@@ -6422,30 +6707,30 @@
                   <a:tcPr anchor="ctr" marL="73152" marR="73152">
                     <a:lnL w="9525" cap="flat" cmpd="sng" algn="ctr">
                       <a:solidFill>
-                        <a:srgbClr val="D2EFDC"/>
+                        <a:srgbClr val="D5F6E0"/>
                       </a:solidFill>
                       <a:prstDash val="solid"/>
                     </a:lnL>
                     <a:lnR w="9525" cap="flat" cmpd="sng" algn="ctr">
                       <a:solidFill>
-                        <a:srgbClr val="D2EFDC"/>
+                        <a:srgbClr val="D5F6E0"/>
                       </a:solidFill>
                       <a:prstDash val="solid"/>
                     </a:lnR>
                     <a:lnT w="9525" cap="flat" cmpd="sng" algn="ctr">
                       <a:solidFill>
-                        <a:srgbClr val="D2EFDC"/>
+                        <a:srgbClr val="D5F6E0"/>
                       </a:solidFill>
                       <a:prstDash val="solid"/>
                     </a:lnT>
                     <a:lnB w="9525" cap="flat" cmpd="sng" algn="ctr">
                       <a:solidFill>
-                        <a:srgbClr val="D2EFDC"/>
+                        <a:srgbClr val="D5F6E0"/>
                       </a:solidFill>
                       <a:prstDash val="solid"/>
                     </a:lnB>
                     <a:solidFill>
-                      <a:srgbClr val="D2EFDC"/>
+                      <a:srgbClr val="D5F6E0"/>
                     </a:solidFill>
                   </a:tcPr>
                 </a:tc>
@@ -6458,7 +6743,7 @@
                       <a:r>
                         <a:rPr sz="1400" b="0">
                           <a:solidFill>
-                            <a:srgbClr val="2B2B2B"/>
+                            <a:srgbClr val="26231F"/>
                           </a:solidFill>
                         </a:rPr>
                         <a:t>□</a:t>
@@ -6468,25 +6753,25 @@
                   <a:tcPr anchor="ctr" marL="73152" marR="73152">
                     <a:lnL w="9525" cap="flat" cmpd="sng" algn="ctr">
                       <a:solidFill>
-                        <a:srgbClr val="D2EFDC"/>
+                        <a:srgbClr val="D5F6E0"/>
                       </a:solidFill>
                       <a:prstDash val="solid"/>
                     </a:lnL>
                     <a:lnR w="9525" cap="flat" cmpd="sng" algn="ctr">
                       <a:solidFill>
-                        <a:srgbClr val="D2EFDC"/>
+                        <a:srgbClr val="D5F6E0"/>
                       </a:solidFill>
                       <a:prstDash val="solid"/>
                     </a:lnR>
                     <a:lnT w="9525" cap="flat" cmpd="sng" algn="ctr">
                       <a:solidFill>
-                        <a:srgbClr val="D2EFDC"/>
+                        <a:srgbClr val="D5F6E0"/>
                       </a:solidFill>
                       <a:prstDash val="solid"/>
                     </a:lnT>
                     <a:lnB w="9525" cap="flat" cmpd="sng" algn="ctr">
                       <a:solidFill>
-                        <a:srgbClr val="D2EFDC"/>
+                        <a:srgbClr val="D5F6E0"/>
                       </a:solidFill>
                       <a:prstDash val="solid"/>
                     </a:lnB>
@@ -6504,7 +6789,7 @@
                       <a:r>
                         <a:rPr sz="1400" b="0">
                           <a:solidFill>
-                            <a:srgbClr val="2B2B2B"/>
+                            <a:srgbClr val="26231F"/>
                           </a:solidFill>
                         </a:rPr>
                         <a:t>□</a:t>
@@ -6514,25 +6799,25 @@
                   <a:tcPr anchor="ctr" marL="73152" marR="73152">
                     <a:lnL w="9525" cap="flat" cmpd="sng" algn="ctr">
                       <a:solidFill>
-                        <a:srgbClr val="D2EFDC"/>
+                        <a:srgbClr val="D5F6E0"/>
                       </a:solidFill>
                       <a:prstDash val="solid"/>
                     </a:lnL>
                     <a:lnR w="9525" cap="flat" cmpd="sng" algn="ctr">
                       <a:solidFill>
-                        <a:srgbClr val="D2EFDC"/>
+                        <a:srgbClr val="D5F6E0"/>
                       </a:solidFill>
                       <a:prstDash val="solid"/>
                     </a:lnR>
                     <a:lnT w="9525" cap="flat" cmpd="sng" algn="ctr">
                       <a:solidFill>
-                        <a:srgbClr val="D2EFDC"/>
+                        <a:srgbClr val="D5F6E0"/>
                       </a:solidFill>
                       <a:prstDash val="solid"/>
                     </a:lnT>
                     <a:lnB w="9525" cap="flat" cmpd="sng" algn="ctr">
                       <a:solidFill>
-                        <a:srgbClr val="D2EFDC"/>
+                        <a:srgbClr val="D5F6E0"/>
                       </a:solidFill>
                       <a:prstDash val="solid"/>
                     </a:lnB>
@@ -6550,7 +6835,7 @@
                       <a:r>
                         <a:rPr sz="1400" b="0">
                           <a:solidFill>
-                            <a:srgbClr val="2B2B2B"/>
+                            <a:srgbClr val="26231F"/>
                           </a:solidFill>
                         </a:rPr>
                         <a:t>□</a:t>
@@ -6560,25 +6845,25 @@
                   <a:tcPr anchor="ctr" marL="73152" marR="73152">
                     <a:lnL w="9525" cap="flat" cmpd="sng" algn="ctr">
                       <a:solidFill>
-                        <a:srgbClr val="D2EFDC"/>
+                        <a:srgbClr val="D5F6E0"/>
                       </a:solidFill>
                       <a:prstDash val="solid"/>
                     </a:lnL>
                     <a:lnR w="9525" cap="flat" cmpd="sng" algn="ctr">
                       <a:solidFill>
-                        <a:srgbClr val="D2EFDC"/>
+                        <a:srgbClr val="D5F6E0"/>
                       </a:solidFill>
                       <a:prstDash val="solid"/>
                     </a:lnR>
                     <a:lnT w="9525" cap="flat" cmpd="sng" algn="ctr">
                       <a:solidFill>
-                        <a:srgbClr val="D2EFDC"/>
+                        <a:srgbClr val="D5F6E0"/>
                       </a:solidFill>
                       <a:prstDash val="solid"/>
                     </a:lnT>
                     <a:lnB w="9525" cap="flat" cmpd="sng" algn="ctr">
                       <a:solidFill>
-                        <a:srgbClr val="D2EFDC"/>
+                        <a:srgbClr val="D5F6E0"/>
                       </a:solidFill>
                       <a:prstDash val="solid"/>
                     </a:lnB>
@@ -6598,7 +6883,7 @@
                       <a:r>
                         <a:rPr sz="1400" b="1">
                           <a:solidFill>
-                            <a:srgbClr val="183A23"/>
+                            <a:srgbClr val="274932"/>
                           </a:solidFill>
                         </a:rPr>
                         <a:t>질병 진단</a:t>
@@ -6608,30 +6893,30 @@
                   <a:tcPr anchor="ctr" marL="73152" marR="73152">
                     <a:lnL w="9525" cap="flat" cmpd="sng" algn="ctr">
                       <a:solidFill>
-                        <a:srgbClr val="D2EFDC"/>
+                        <a:srgbClr val="D5F6E0"/>
                       </a:solidFill>
                       <a:prstDash val="solid"/>
                     </a:lnL>
                     <a:lnR w="9525" cap="flat" cmpd="sng" algn="ctr">
                       <a:solidFill>
-                        <a:srgbClr val="D2EFDC"/>
+                        <a:srgbClr val="D5F6E0"/>
                       </a:solidFill>
                       <a:prstDash val="solid"/>
                     </a:lnR>
                     <a:lnT w="9525" cap="flat" cmpd="sng" algn="ctr">
                       <a:solidFill>
-                        <a:srgbClr val="D2EFDC"/>
+                        <a:srgbClr val="D5F6E0"/>
                       </a:solidFill>
                       <a:prstDash val="solid"/>
                     </a:lnT>
                     <a:lnB w="9525" cap="flat" cmpd="sng" algn="ctr">
                       <a:solidFill>
-                        <a:srgbClr val="D2EFDC"/>
+                        <a:srgbClr val="D5F6E0"/>
                       </a:solidFill>
                       <a:prstDash val="solid"/>
                     </a:lnB>
                     <a:solidFill>
-                      <a:srgbClr val="D2EFDC"/>
+                      <a:srgbClr val="D5F6E0"/>
                     </a:solidFill>
                   </a:tcPr>
                 </a:tc>
@@ -6644,7 +6929,7 @@
                       <a:r>
                         <a:rPr sz="1400" b="0">
                           <a:solidFill>
-                            <a:srgbClr val="2B2B2B"/>
+                            <a:srgbClr val="26231F"/>
                           </a:solidFill>
                         </a:rPr>
                         <a:t>□</a:t>
@@ -6654,30 +6939,30 @@
                   <a:tcPr anchor="ctr" marL="73152" marR="73152">
                     <a:lnL w="9525" cap="flat" cmpd="sng" algn="ctr">
                       <a:solidFill>
-                        <a:srgbClr val="D2EFDC"/>
+                        <a:srgbClr val="D5F6E0"/>
                       </a:solidFill>
                       <a:prstDash val="solid"/>
                     </a:lnL>
                     <a:lnR w="9525" cap="flat" cmpd="sng" algn="ctr">
                       <a:solidFill>
-                        <a:srgbClr val="D2EFDC"/>
+                        <a:srgbClr val="D5F6E0"/>
                       </a:solidFill>
                       <a:prstDash val="solid"/>
                     </a:lnR>
                     <a:lnT w="9525" cap="flat" cmpd="sng" algn="ctr">
                       <a:solidFill>
-                        <a:srgbClr val="D2EFDC"/>
+                        <a:srgbClr val="D5F6E0"/>
                       </a:solidFill>
                       <a:prstDash val="solid"/>
                     </a:lnT>
                     <a:lnB w="9525" cap="flat" cmpd="sng" algn="ctr">
                       <a:solidFill>
-                        <a:srgbClr val="D2EFDC"/>
+                        <a:srgbClr val="D5F6E0"/>
                       </a:solidFill>
                       <a:prstDash val="solid"/>
                     </a:lnB>
                     <a:solidFill>
-                      <a:srgbClr val="F1F9F3"/>
+                      <a:srgbClr val="ECFBF1"/>
                     </a:solidFill>
                   </a:tcPr>
                 </a:tc>
@@ -6690,7 +6975,7 @@
                       <a:r>
                         <a:rPr sz="1400" b="0">
                           <a:solidFill>
-                            <a:srgbClr val="2B2B2B"/>
+                            <a:srgbClr val="26231F"/>
                           </a:solidFill>
                         </a:rPr>
                         <a:t>□</a:t>
@@ -6700,30 +6985,30 @@
                   <a:tcPr anchor="ctr" marL="73152" marR="73152">
                     <a:lnL w="9525" cap="flat" cmpd="sng" algn="ctr">
                       <a:solidFill>
-                        <a:srgbClr val="D2EFDC"/>
+                        <a:srgbClr val="D5F6E0"/>
                       </a:solidFill>
                       <a:prstDash val="solid"/>
                     </a:lnL>
                     <a:lnR w="9525" cap="flat" cmpd="sng" algn="ctr">
                       <a:solidFill>
-                        <a:srgbClr val="D2EFDC"/>
+                        <a:srgbClr val="D5F6E0"/>
                       </a:solidFill>
                       <a:prstDash val="solid"/>
                     </a:lnR>
                     <a:lnT w="9525" cap="flat" cmpd="sng" algn="ctr">
                       <a:solidFill>
-                        <a:srgbClr val="D2EFDC"/>
+                        <a:srgbClr val="D5F6E0"/>
                       </a:solidFill>
                       <a:prstDash val="solid"/>
                     </a:lnT>
                     <a:lnB w="9525" cap="flat" cmpd="sng" algn="ctr">
                       <a:solidFill>
-                        <a:srgbClr val="D2EFDC"/>
+                        <a:srgbClr val="D5F6E0"/>
                       </a:solidFill>
                       <a:prstDash val="solid"/>
                     </a:lnB>
                     <a:solidFill>
-                      <a:srgbClr val="F1F9F3"/>
+                      <a:srgbClr val="ECFBF1"/>
                     </a:solidFill>
                   </a:tcPr>
                 </a:tc>
@@ -6736,7 +7021,7 @@
                       <a:r>
                         <a:rPr sz="1400" b="0">
                           <a:solidFill>
-                            <a:srgbClr val="2B2B2B"/>
+                            <a:srgbClr val="26231F"/>
                           </a:solidFill>
                         </a:rPr>
                         <a:t>□</a:t>
@@ -6746,30 +7031,30 @@
                   <a:tcPr anchor="ctr" marL="73152" marR="73152">
                     <a:lnL w="9525" cap="flat" cmpd="sng" algn="ctr">
                       <a:solidFill>
-                        <a:srgbClr val="D2EFDC"/>
+                        <a:srgbClr val="D5F6E0"/>
                       </a:solidFill>
                       <a:prstDash val="solid"/>
                     </a:lnL>
                     <a:lnR w="9525" cap="flat" cmpd="sng" algn="ctr">
                       <a:solidFill>
-                        <a:srgbClr val="D2EFDC"/>
+                        <a:srgbClr val="D5F6E0"/>
                       </a:solidFill>
                       <a:prstDash val="solid"/>
                     </a:lnR>
                     <a:lnT w="9525" cap="flat" cmpd="sng" algn="ctr">
                       <a:solidFill>
-                        <a:srgbClr val="D2EFDC"/>
+                        <a:srgbClr val="D5F6E0"/>
                       </a:solidFill>
                       <a:prstDash val="solid"/>
                     </a:lnT>
                     <a:lnB w="9525" cap="flat" cmpd="sng" algn="ctr">
                       <a:solidFill>
-                        <a:srgbClr val="D2EFDC"/>
+                        <a:srgbClr val="D5F6E0"/>
                       </a:solidFill>
                       <a:prstDash val="solid"/>
                     </a:lnB>
                     <a:solidFill>
-                      <a:srgbClr val="F1F9F3"/>
+                      <a:srgbClr val="ECFBF1"/>
                     </a:solidFill>
                   </a:tcPr>
                 </a:tc>
@@ -6784,7 +7069,7 @@
                       <a:r>
                         <a:rPr sz="1400" b="1">
                           <a:solidFill>
-                            <a:srgbClr val="183A23"/>
+                            <a:srgbClr val="274932"/>
                           </a:solidFill>
                         </a:rPr>
                         <a:t>암</a:t>
@@ -6794,30 +7079,30 @@
                   <a:tcPr anchor="ctr" marL="73152" marR="73152">
                     <a:lnL w="9525" cap="flat" cmpd="sng" algn="ctr">
                       <a:solidFill>
-                        <a:srgbClr val="D2EFDC"/>
+                        <a:srgbClr val="D5F6E0"/>
                       </a:solidFill>
                       <a:prstDash val="solid"/>
                     </a:lnL>
                     <a:lnR w="9525" cap="flat" cmpd="sng" algn="ctr">
                       <a:solidFill>
-                        <a:srgbClr val="D2EFDC"/>
+                        <a:srgbClr val="D5F6E0"/>
                       </a:solidFill>
                       <a:prstDash val="solid"/>
                     </a:lnR>
                     <a:lnT w="9525" cap="flat" cmpd="sng" algn="ctr">
                       <a:solidFill>
-                        <a:srgbClr val="D2EFDC"/>
+                        <a:srgbClr val="D5F6E0"/>
                       </a:solidFill>
                       <a:prstDash val="solid"/>
                     </a:lnT>
                     <a:lnB w="9525" cap="flat" cmpd="sng" algn="ctr">
                       <a:solidFill>
-                        <a:srgbClr val="D2EFDC"/>
+                        <a:srgbClr val="D5F6E0"/>
                       </a:solidFill>
                       <a:prstDash val="solid"/>
                     </a:lnB>
                     <a:solidFill>
-                      <a:srgbClr val="D2EFDC"/>
+                      <a:srgbClr val="D5F6E0"/>
                     </a:solidFill>
                   </a:tcPr>
                 </a:tc>
@@ -6830,7 +7115,7 @@
                       <a:r>
                         <a:rPr sz="1400" b="0">
                           <a:solidFill>
-                            <a:srgbClr val="2B2B2B"/>
+                            <a:srgbClr val="26231F"/>
                           </a:solidFill>
                         </a:rPr>
                         <a:t>□</a:t>
@@ -6840,25 +7125,25 @@
                   <a:tcPr anchor="ctr" marL="73152" marR="73152">
                     <a:lnL w="9525" cap="flat" cmpd="sng" algn="ctr">
                       <a:solidFill>
-                        <a:srgbClr val="D2EFDC"/>
+                        <a:srgbClr val="D5F6E0"/>
                       </a:solidFill>
                       <a:prstDash val="solid"/>
                     </a:lnL>
                     <a:lnR w="9525" cap="flat" cmpd="sng" algn="ctr">
                       <a:solidFill>
-                        <a:srgbClr val="D2EFDC"/>
+                        <a:srgbClr val="D5F6E0"/>
                       </a:solidFill>
                       <a:prstDash val="solid"/>
                     </a:lnR>
                     <a:lnT w="9525" cap="flat" cmpd="sng" algn="ctr">
                       <a:solidFill>
-                        <a:srgbClr val="D2EFDC"/>
+                        <a:srgbClr val="D5F6E0"/>
                       </a:solidFill>
                       <a:prstDash val="solid"/>
                     </a:lnT>
                     <a:lnB w="9525" cap="flat" cmpd="sng" algn="ctr">
                       <a:solidFill>
-                        <a:srgbClr val="D2EFDC"/>
+                        <a:srgbClr val="D5F6E0"/>
                       </a:solidFill>
                       <a:prstDash val="solid"/>
                     </a:lnB>
@@ -6876,7 +7161,7 @@
                       <a:r>
                         <a:rPr sz="1400" b="0">
                           <a:solidFill>
-                            <a:srgbClr val="2B2B2B"/>
+                            <a:srgbClr val="26231F"/>
                           </a:solidFill>
                         </a:rPr>
                         <a:t>□</a:t>
@@ -6886,25 +7171,25 @@
                   <a:tcPr anchor="ctr" marL="73152" marR="73152">
                     <a:lnL w="9525" cap="flat" cmpd="sng" algn="ctr">
                       <a:solidFill>
-                        <a:srgbClr val="D2EFDC"/>
+                        <a:srgbClr val="D5F6E0"/>
                       </a:solidFill>
                       <a:prstDash val="solid"/>
                     </a:lnL>
                     <a:lnR w="9525" cap="flat" cmpd="sng" algn="ctr">
                       <a:solidFill>
-                        <a:srgbClr val="D2EFDC"/>
+                        <a:srgbClr val="D5F6E0"/>
                       </a:solidFill>
                       <a:prstDash val="solid"/>
                     </a:lnR>
                     <a:lnT w="9525" cap="flat" cmpd="sng" algn="ctr">
                       <a:solidFill>
-                        <a:srgbClr val="D2EFDC"/>
+                        <a:srgbClr val="D5F6E0"/>
                       </a:solidFill>
                       <a:prstDash val="solid"/>
                     </a:lnT>
                     <a:lnB w="9525" cap="flat" cmpd="sng" algn="ctr">
                       <a:solidFill>
-                        <a:srgbClr val="D2EFDC"/>
+                        <a:srgbClr val="D5F6E0"/>
                       </a:solidFill>
                       <a:prstDash val="solid"/>
                     </a:lnB>
@@ -6922,7 +7207,7 @@
                       <a:r>
                         <a:rPr sz="1400" b="0">
                           <a:solidFill>
-                            <a:srgbClr val="2B2B2B"/>
+                            <a:srgbClr val="26231F"/>
                           </a:solidFill>
                         </a:rPr>
                         <a:t>□</a:t>
@@ -6932,25 +7217,25 @@
                   <a:tcPr anchor="ctr" marL="73152" marR="73152">
                     <a:lnL w="9525" cap="flat" cmpd="sng" algn="ctr">
                       <a:solidFill>
-                        <a:srgbClr val="D2EFDC"/>
+                        <a:srgbClr val="D5F6E0"/>
                       </a:solidFill>
                       <a:prstDash val="solid"/>
                     </a:lnL>
                     <a:lnR w="9525" cap="flat" cmpd="sng" algn="ctr">
                       <a:solidFill>
-                        <a:srgbClr val="D2EFDC"/>
+                        <a:srgbClr val="D5F6E0"/>
                       </a:solidFill>
                       <a:prstDash val="solid"/>
                     </a:lnR>
                     <a:lnT w="9525" cap="flat" cmpd="sng" algn="ctr">
                       <a:solidFill>
-                        <a:srgbClr val="D2EFDC"/>
+                        <a:srgbClr val="D5F6E0"/>
                       </a:solidFill>
                       <a:prstDash val="solid"/>
                     </a:lnT>
                     <a:lnB w="9525" cap="flat" cmpd="sng" algn="ctr">
                       <a:solidFill>
-                        <a:srgbClr val="D2EFDC"/>
+                        <a:srgbClr val="D5F6E0"/>
                       </a:solidFill>
                       <a:prstDash val="solid"/>
                     </a:lnB>
@@ -6970,7 +7255,7 @@
                       <a:r>
                         <a:rPr sz="1400" b="1">
                           <a:solidFill>
-                            <a:srgbClr val="183A23"/>
+                            <a:srgbClr val="274932"/>
                           </a:solidFill>
                         </a:rPr>
                         <a:t>뇌·심장</a:t>
@@ -6980,30 +7265,30 @@
                   <a:tcPr anchor="ctr" marL="73152" marR="73152">
                     <a:lnL w="9525" cap="flat" cmpd="sng" algn="ctr">
                       <a:solidFill>
-                        <a:srgbClr val="D2EFDC"/>
+                        <a:srgbClr val="D5F6E0"/>
                       </a:solidFill>
                       <a:prstDash val="solid"/>
                     </a:lnL>
                     <a:lnR w="9525" cap="flat" cmpd="sng" algn="ctr">
                       <a:solidFill>
-                        <a:srgbClr val="D2EFDC"/>
+                        <a:srgbClr val="D5F6E0"/>
                       </a:solidFill>
                       <a:prstDash val="solid"/>
                     </a:lnR>
                     <a:lnT w="9525" cap="flat" cmpd="sng" algn="ctr">
                       <a:solidFill>
-                        <a:srgbClr val="D2EFDC"/>
+                        <a:srgbClr val="D5F6E0"/>
                       </a:solidFill>
                       <a:prstDash val="solid"/>
                     </a:lnT>
                     <a:lnB w="9525" cap="flat" cmpd="sng" algn="ctr">
                       <a:solidFill>
-                        <a:srgbClr val="D2EFDC"/>
+                        <a:srgbClr val="D5F6E0"/>
                       </a:solidFill>
                       <a:prstDash val="solid"/>
                     </a:lnB>
                     <a:solidFill>
-                      <a:srgbClr val="D2EFDC"/>
+                      <a:srgbClr val="D5F6E0"/>
                     </a:solidFill>
                   </a:tcPr>
                 </a:tc>
@@ -7016,7 +7301,7 @@
                       <a:r>
                         <a:rPr sz="1400" b="0">
                           <a:solidFill>
-                            <a:srgbClr val="2B2B2B"/>
+                            <a:srgbClr val="26231F"/>
                           </a:solidFill>
                         </a:rPr>
                         <a:t>□</a:t>
@@ -7026,30 +7311,30 @@
                   <a:tcPr anchor="ctr" marL="73152" marR="73152">
                     <a:lnL w="9525" cap="flat" cmpd="sng" algn="ctr">
                       <a:solidFill>
-                        <a:srgbClr val="D2EFDC"/>
+                        <a:srgbClr val="D5F6E0"/>
                       </a:solidFill>
                       <a:prstDash val="solid"/>
                     </a:lnL>
                     <a:lnR w="9525" cap="flat" cmpd="sng" algn="ctr">
                       <a:solidFill>
-                        <a:srgbClr val="D2EFDC"/>
+                        <a:srgbClr val="D5F6E0"/>
                       </a:solidFill>
                       <a:prstDash val="solid"/>
                     </a:lnR>
                     <a:lnT w="9525" cap="flat" cmpd="sng" algn="ctr">
                       <a:solidFill>
-                        <a:srgbClr val="D2EFDC"/>
+                        <a:srgbClr val="D5F6E0"/>
                       </a:solidFill>
                       <a:prstDash val="solid"/>
                     </a:lnT>
                     <a:lnB w="9525" cap="flat" cmpd="sng" algn="ctr">
                       <a:solidFill>
-                        <a:srgbClr val="D2EFDC"/>
+                        <a:srgbClr val="D5F6E0"/>
                       </a:solidFill>
                       <a:prstDash val="solid"/>
                     </a:lnB>
                     <a:solidFill>
-                      <a:srgbClr val="F1F9F3"/>
+                      <a:srgbClr val="ECFBF1"/>
                     </a:solidFill>
                   </a:tcPr>
                 </a:tc>
@@ -7062,7 +7347,7 @@
                       <a:r>
                         <a:rPr sz="1400" b="0">
                           <a:solidFill>
-                            <a:srgbClr val="2B2B2B"/>
+                            <a:srgbClr val="26231F"/>
                           </a:solidFill>
                         </a:rPr>
                         <a:t>□</a:t>
@@ -7072,30 +7357,30 @@
                   <a:tcPr anchor="ctr" marL="73152" marR="73152">
                     <a:lnL w="9525" cap="flat" cmpd="sng" algn="ctr">
                       <a:solidFill>
-                        <a:srgbClr val="D2EFDC"/>
+                        <a:srgbClr val="D5F6E0"/>
                       </a:solidFill>
                       <a:prstDash val="solid"/>
                     </a:lnL>
                     <a:lnR w="9525" cap="flat" cmpd="sng" algn="ctr">
                       <a:solidFill>
-                        <a:srgbClr val="D2EFDC"/>
+                        <a:srgbClr val="D5F6E0"/>
                       </a:solidFill>
                       <a:prstDash val="solid"/>
                     </a:lnR>
                     <a:lnT w="9525" cap="flat" cmpd="sng" algn="ctr">
                       <a:solidFill>
-                        <a:srgbClr val="D2EFDC"/>
+                        <a:srgbClr val="D5F6E0"/>
                       </a:solidFill>
                       <a:prstDash val="solid"/>
                     </a:lnT>
                     <a:lnB w="9525" cap="flat" cmpd="sng" algn="ctr">
                       <a:solidFill>
-                        <a:srgbClr val="D2EFDC"/>
+                        <a:srgbClr val="D5F6E0"/>
                       </a:solidFill>
                       <a:prstDash val="solid"/>
                     </a:lnB>
                     <a:solidFill>
-                      <a:srgbClr val="F1F9F3"/>
+                      <a:srgbClr val="ECFBF1"/>
                     </a:solidFill>
                   </a:tcPr>
                 </a:tc>
@@ -7108,7 +7393,7 @@
                       <a:r>
                         <a:rPr sz="1400" b="0">
                           <a:solidFill>
-                            <a:srgbClr val="2B2B2B"/>
+                            <a:srgbClr val="26231F"/>
                           </a:solidFill>
                         </a:rPr>
                         <a:t>□</a:t>
@@ -7118,30 +7403,30 @@
                   <a:tcPr anchor="ctr" marL="73152" marR="73152">
                     <a:lnL w="9525" cap="flat" cmpd="sng" algn="ctr">
                       <a:solidFill>
-                        <a:srgbClr val="D2EFDC"/>
+                        <a:srgbClr val="D5F6E0"/>
                       </a:solidFill>
                       <a:prstDash val="solid"/>
                     </a:lnL>
                     <a:lnR w="9525" cap="flat" cmpd="sng" algn="ctr">
                       <a:solidFill>
-                        <a:srgbClr val="D2EFDC"/>
+                        <a:srgbClr val="D5F6E0"/>
                       </a:solidFill>
                       <a:prstDash val="solid"/>
                     </a:lnR>
                     <a:lnT w="9525" cap="flat" cmpd="sng" algn="ctr">
                       <a:solidFill>
-                        <a:srgbClr val="D2EFDC"/>
+                        <a:srgbClr val="D5F6E0"/>
                       </a:solidFill>
                       <a:prstDash val="solid"/>
                     </a:lnT>
                     <a:lnB w="9525" cap="flat" cmpd="sng" algn="ctr">
                       <a:solidFill>
-                        <a:srgbClr val="D2EFDC"/>
+                        <a:srgbClr val="D5F6E0"/>
                       </a:solidFill>
                       <a:prstDash val="solid"/>
                     </a:lnB>
                     <a:solidFill>
-                      <a:srgbClr val="F1F9F3"/>
+                      <a:srgbClr val="ECFBF1"/>
                     </a:solidFill>
                   </a:tcPr>
                 </a:tc>
@@ -7156,7 +7441,7 @@
                       <a:r>
                         <a:rPr sz="1400" b="1">
                           <a:solidFill>
-                            <a:srgbClr val="183A23"/>
+                            <a:srgbClr val="274932"/>
                           </a:solidFill>
                         </a:rPr>
                         <a:t>입원·수술</a:t>
@@ -7166,30 +7451,30 @@
                   <a:tcPr anchor="ctr" marL="73152" marR="73152">
                     <a:lnL w="9525" cap="flat" cmpd="sng" algn="ctr">
                       <a:solidFill>
-                        <a:srgbClr val="D2EFDC"/>
+                        <a:srgbClr val="D5F6E0"/>
                       </a:solidFill>
                       <a:prstDash val="solid"/>
                     </a:lnL>
                     <a:lnR w="9525" cap="flat" cmpd="sng" algn="ctr">
                       <a:solidFill>
-                        <a:srgbClr val="D2EFDC"/>
+                        <a:srgbClr val="D5F6E0"/>
                       </a:solidFill>
                       <a:prstDash val="solid"/>
                     </a:lnR>
                     <a:lnT w="9525" cap="flat" cmpd="sng" algn="ctr">
                       <a:solidFill>
-                        <a:srgbClr val="D2EFDC"/>
+                        <a:srgbClr val="D5F6E0"/>
                       </a:solidFill>
                       <a:prstDash val="solid"/>
                     </a:lnT>
                     <a:lnB w="9525" cap="flat" cmpd="sng" algn="ctr">
                       <a:solidFill>
-                        <a:srgbClr val="D2EFDC"/>
+                        <a:srgbClr val="D5F6E0"/>
                       </a:solidFill>
                       <a:prstDash val="solid"/>
                     </a:lnB>
                     <a:solidFill>
-                      <a:srgbClr val="D2EFDC"/>
+                      <a:srgbClr val="D5F6E0"/>
                     </a:solidFill>
                   </a:tcPr>
                 </a:tc>
@@ -7202,7 +7487,7 @@
                       <a:r>
                         <a:rPr sz="1400" b="0">
                           <a:solidFill>
-                            <a:srgbClr val="2B2B2B"/>
+                            <a:srgbClr val="26231F"/>
                           </a:solidFill>
                         </a:rPr>
                         <a:t>□</a:t>
@@ -7212,25 +7497,25 @@
                   <a:tcPr anchor="ctr" marL="73152" marR="73152">
                     <a:lnL w="9525" cap="flat" cmpd="sng" algn="ctr">
                       <a:solidFill>
-                        <a:srgbClr val="D2EFDC"/>
+                        <a:srgbClr val="D5F6E0"/>
                       </a:solidFill>
                       <a:prstDash val="solid"/>
                     </a:lnL>
                     <a:lnR w="9525" cap="flat" cmpd="sng" algn="ctr">
                       <a:solidFill>
-                        <a:srgbClr val="D2EFDC"/>
+                        <a:srgbClr val="D5F6E0"/>
                       </a:solidFill>
                       <a:prstDash val="solid"/>
                     </a:lnR>
                     <a:lnT w="9525" cap="flat" cmpd="sng" algn="ctr">
                       <a:solidFill>
-                        <a:srgbClr val="D2EFDC"/>
+                        <a:srgbClr val="D5F6E0"/>
                       </a:solidFill>
                       <a:prstDash val="solid"/>
                     </a:lnT>
                     <a:lnB w="9525" cap="flat" cmpd="sng" algn="ctr">
                       <a:solidFill>
-                        <a:srgbClr val="D2EFDC"/>
+                        <a:srgbClr val="D5F6E0"/>
                       </a:solidFill>
                       <a:prstDash val="solid"/>
                     </a:lnB>
@@ -7248,7 +7533,7 @@
                       <a:r>
                         <a:rPr sz="1400" b="0">
                           <a:solidFill>
-                            <a:srgbClr val="2B2B2B"/>
+                            <a:srgbClr val="26231F"/>
                           </a:solidFill>
                         </a:rPr>
                         <a:t>□</a:t>
@@ -7258,25 +7543,25 @@
                   <a:tcPr anchor="ctr" marL="73152" marR="73152">
                     <a:lnL w="9525" cap="flat" cmpd="sng" algn="ctr">
                       <a:solidFill>
-                        <a:srgbClr val="D2EFDC"/>
+                        <a:srgbClr val="D5F6E0"/>
                       </a:solidFill>
                       <a:prstDash val="solid"/>
                     </a:lnL>
                     <a:lnR w="9525" cap="flat" cmpd="sng" algn="ctr">
                       <a:solidFill>
-                        <a:srgbClr val="D2EFDC"/>
+                        <a:srgbClr val="D5F6E0"/>
                       </a:solidFill>
                       <a:prstDash val="solid"/>
                     </a:lnR>
                     <a:lnT w="9525" cap="flat" cmpd="sng" algn="ctr">
                       <a:solidFill>
-                        <a:srgbClr val="D2EFDC"/>
+                        <a:srgbClr val="D5F6E0"/>
                       </a:solidFill>
                       <a:prstDash val="solid"/>
                     </a:lnT>
                     <a:lnB w="9525" cap="flat" cmpd="sng" algn="ctr">
                       <a:solidFill>
-                        <a:srgbClr val="D2EFDC"/>
+                        <a:srgbClr val="D5F6E0"/>
                       </a:solidFill>
                       <a:prstDash val="solid"/>
                     </a:lnB>
@@ -7294,7 +7579,7 @@
                       <a:r>
                         <a:rPr sz="1400" b="0">
                           <a:solidFill>
-                            <a:srgbClr val="2B2B2B"/>
+                            <a:srgbClr val="26231F"/>
                           </a:solidFill>
                         </a:rPr>
                         <a:t>□</a:t>
@@ -7304,25 +7589,25 @@
                   <a:tcPr anchor="ctr" marL="73152" marR="73152">
                     <a:lnL w="9525" cap="flat" cmpd="sng" algn="ctr">
                       <a:solidFill>
-                        <a:srgbClr val="D2EFDC"/>
+                        <a:srgbClr val="D5F6E0"/>
                       </a:solidFill>
                       <a:prstDash val="solid"/>
                     </a:lnL>
                     <a:lnR w="9525" cap="flat" cmpd="sng" algn="ctr">
                       <a:solidFill>
-                        <a:srgbClr val="D2EFDC"/>
+                        <a:srgbClr val="D5F6E0"/>
                       </a:solidFill>
                       <a:prstDash val="solid"/>
                     </a:lnR>
                     <a:lnT w="9525" cap="flat" cmpd="sng" algn="ctr">
                       <a:solidFill>
-                        <a:srgbClr val="D2EFDC"/>
+                        <a:srgbClr val="D5F6E0"/>
                       </a:solidFill>
                       <a:prstDash val="solid"/>
                     </a:lnT>
                     <a:lnB w="9525" cap="flat" cmpd="sng" algn="ctr">
                       <a:solidFill>
-                        <a:srgbClr val="D2EFDC"/>
+                        <a:srgbClr val="D5F6E0"/>
                       </a:solidFill>
                       <a:prstDash val="solid"/>
                     </a:lnB>
@@ -7342,7 +7627,7 @@
                       <a:r>
                         <a:rPr sz="1400" b="1">
                           <a:solidFill>
-                            <a:srgbClr val="183A23"/>
+                            <a:srgbClr val="274932"/>
                           </a:solidFill>
                         </a:rPr>
                         <a:t>상해</a:t>
@@ -7352,30 +7637,30 @@
                   <a:tcPr anchor="ctr" marL="73152" marR="73152">
                     <a:lnL w="9525" cap="flat" cmpd="sng" algn="ctr">
                       <a:solidFill>
-                        <a:srgbClr val="D2EFDC"/>
+                        <a:srgbClr val="D5F6E0"/>
                       </a:solidFill>
                       <a:prstDash val="solid"/>
                     </a:lnL>
                     <a:lnR w="9525" cap="flat" cmpd="sng" algn="ctr">
                       <a:solidFill>
-                        <a:srgbClr val="D2EFDC"/>
+                        <a:srgbClr val="D5F6E0"/>
                       </a:solidFill>
                       <a:prstDash val="solid"/>
                     </a:lnR>
                     <a:lnT w="9525" cap="flat" cmpd="sng" algn="ctr">
                       <a:solidFill>
-                        <a:srgbClr val="D2EFDC"/>
+                        <a:srgbClr val="D5F6E0"/>
                       </a:solidFill>
                       <a:prstDash val="solid"/>
                     </a:lnT>
                     <a:lnB w="9525" cap="flat" cmpd="sng" algn="ctr">
                       <a:solidFill>
-                        <a:srgbClr val="D2EFDC"/>
+                        <a:srgbClr val="D5F6E0"/>
                       </a:solidFill>
                       <a:prstDash val="solid"/>
                     </a:lnB>
                     <a:solidFill>
-                      <a:srgbClr val="D2EFDC"/>
+                      <a:srgbClr val="D5F6E0"/>
                     </a:solidFill>
                   </a:tcPr>
                 </a:tc>
@@ -7388,7 +7673,7 @@
                       <a:r>
                         <a:rPr sz="1400" b="0">
                           <a:solidFill>
-                            <a:srgbClr val="2B2B2B"/>
+                            <a:srgbClr val="26231F"/>
                           </a:solidFill>
                         </a:rPr>
                         <a:t>□</a:t>
@@ -7398,30 +7683,30 @@
                   <a:tcPr anchor="ctr" marL="73152" marR="73152">
                     <a:lnL w="9525" cap="flat" cmpd="sng" algn="ctr">
                       <a:solidFill>
-                        <a:srgbClr val="D2EFDC"/>
+                        <a:srgbClr val="D5F6E0"/>
                       </a:solidFill>
                       <a:prstDash val="solid"/>
                     </a:lnL>
                     <a:lnR w="9525" cap="flat" cmpd="sng" algn="ctr">
                       <a:solidFill>
-                        <a:srgbClr val="D2EFDC"/>
+                        <a:srgbClr val="D5F6E0"/>
                       </a:solidFill>
                       <a:prstDash val="solid"/>
                     </a:lnR>
                     <a:lnT w="9525" cap="flat" cmpd="sng" algn="ctr">
                       <a:solidFill>
-                        <a:srgbClr val="D2EFDC"/>
+                        <a:srgbClr val="D5F6E0"/>
                       </a:solidFill>
                       <a:prstDash val="solid"/>
                     </a:lnT>
                     <a:lnB w="9525" cap="flat" cmpd="sng" algn="ctr">
                       <a:solidFill>
-                        <a:srgbClr val="D2EFDC"/>
+                        <a:srgbClr val="D5F6E0"/>
                       </a:solidFill>
                       <a:prstDash val="solid"/>
                     </a:lnB>
                     <a:solidFill>
-                      <a:srgbClr val="F1F9F3"/>
+                      <a:srgbClr val="ECFBF1"/>
                     </a:solidFill>
                   </a:tcPr>
                 </a:tc>
@@ -7434,7 +7719,7 @@
                       <a:r>
                         <a:rPr sz="1400" b="0">
                           <a:solidFill>
-                            <a:srgbClr val="2B2B2B"/>
+                            <a:srgbClr val="26231F"/>
                           </a:solidFill>
                         </a:rPr>
                         <a:t>□</a:t>
@@ -7444,30 +7729,30 @@
                   <a:tcPr anchor="ctr" marL="73152" marR="73152">
                     <a:lnL w="9525" cap="flat" cmpd="sng" algn="ctr">
                       <a:solidFill>
-                        <a:srgbClr val="D2EFDC"/>
+                        <a:srgbClr val="D5F6E0"/>
                       </a:solidFill>
                       <a:prstDash val="solid"/>
                     </a:lnL>
                     <a:lnR w="9525" cap="flat" cmpd="sng" algn="ctr">
                       <a:solidFill>
-                        <a:srgbClr val="D2EFDC"/>
+                        <a:srgbClr val="D5F6E0"/>
                       </a:solidFill>
                       <a:prstDash val="solid"/>
                     </a:lnR>
                     <a:lnT w="9525" cap="flat" cmpd="sng" algn="ctr">
                       <a:solidFill>
-                        <a:srgbClr val="D2EFDC"/>
+                        <a:srgbClr val="D5F6E0"/>
                       </a:solidFill>
                       <a:prstDash val="solid"/>
                     </a:lnT>
                     <a:lnB w="9525" cap="flat" cmpd="sng" algn="ctr">
                       <a:solidFill>
-                        <a:srgbClr val="D2EFDC"/>
+                        <a:srgbClr val="D5F6E0"/>
                       </a:solidFill>
                       <a:prstDash val="solid"/>
                     </a:lnB>
                     <a:solidFill>
-                      <a:srgbClr val="F1F9F3"/>
+                      <a:srgbClr val="ECFBF1"/>
                     </a:solidFill>
                   </a:tcPr>
                 </a:tc>
@@ -7480,7 +7765,7 @@
                       <a:r>
                         <a:rPr sz="1400" b="0">
                           <a:solidFill>
-                            <a:srgbClr val="2B2B2B"/>
+                            <a:srgbClr val="26231F"/>
                           </a:solidFill>
                         </a:rPr>
                         <a:t>□</a:t>
@@ -7490,30 +7775,30 @@
                   <a:tcPr anchor="ctr" marL="73152" marR="73152">
                     <a:lnL w="9525" cap="flat" cmpd="sng" algn="ctr">
                       <a:solidFill>
-                        <a:srgbClr val="D2EFDC"/>
+                        <a:srgbClr val="D5F6E0"/>
                       </a:solidFill>
                       <a:prstDash val="solid"/>
                     </a:lnL>
                     <a:lnR w="9525" cap="flat" cmpd="sng" algn="ctr">
                       <a:solidFill>
-                        <a:srgbClr val="D2EFDC"/>
+                        <a:srgbClr val="D5F6E0"/>
                       </a:solidFill>
                       <a:prstDash val="solid"/>
                     </a:lnR>
                     <a:lnT w="9525" cap="flat" cmpd="sng" algn="ctr">
                       <a:solidFill>
-                        <a:srgbClr val="D2EFDC"/>
+                        <a:srgbClr val="D5F6E0"/>
                       </a:solidFill>
                       <a:prstDash val="solid"/>
                     </a:lnT>
                     <a:lnB w="9525" cap="flat" cmpd="sng" algn="ctr">
                       <a:solidFill>
-                        <a:srgbClr val="D2EFDC"/>
+                        <a:srgbClr val="D5F6E0"/>
                       </a:solidFill>
                       <a:prstDash val="solid"/>
                     </a:lnB>
                     <a:solidFill>
-                      <a:srgbClr val="F1F9F3"/>
+                      <a:srgbClr val="ECFBF1"/>
                     </a:solidFill>
                   </a:tcPr>
                 </a:tc>
@@ -7528,7 +7813,7 @@
                       <a:r>
                         <a:rPr sz="1400" b="1">
                           <a:solidFill>
-                            <a:srgbClr val="183A23"/>
+                            <a:srgbClr val="274932"/>
                           </a:solidFill>
                         </a:rPr>
                         <a:t>실손의료</a:t>
@@ -7538,30 +7823,30 @@
                   <a:tcPr anchor="ctr" marL="73152" marR="73152">
                     <a:lnL w="9525" cap="flat" cmpd="sng" algn="ctr">
                       <a:solidFill>
-                        <a:srgbClr val="D2EFDC"/>
+                        <a:srgbClr val="D5F6E0"/>
                       </a:solidFill>
                       <a:prstDash val="solid"/>
                     </a:lnL>
                     <a:lnR w="9525" cap="flat" cmpd="sng" algn="ctr">
                       <a:solidFill>
-                        <a:srgbClr val="D2EFDC"/>
+                        <a:srgbClr val="D5F6E0"/>
                       </a:solidFill>
                       <a:prstDash val="solid"/>
                     </a:lnR>
                     <a:lnT w="9525" cap="flat" cmpd="sng" algn="ctr">
                       <a:solidFill>
-                        <a:srgbClr val="D2EFDC"/>
+                        <a:srgbClr val="D5F6E0"/>
                       </a:solidFill>
                       <a:prstDash val="solid"/>
                     </a:lnT>
                     <a:lnB w="9525" cap="flat" cmpd="sng" algn="ctr">
                       <a:solidFill>
-                        <a:srgbClr val="D2EFDC"/>
+                        <a:srgbClr val="D5F6E0"/>
                       </a:solidFill>
                       <a:prstDash val="solid"/>
                     </a:lnB>
                     <a:solidFill>
-                      <a:srgbClr val="D2EFDC"/>
+                      <a:srgbClr val="D5F6E0"/>
                     </a:solidFill>
                   </a:tcPr>
                 </a:tc>
@@ -7574,7 +7859,7 @@
                       <a:r>
                         <a:rPr sz="1400" b="0">
                           <a:solidFill>
-                            <a:srgbClr val="2B2B2B"/>
+                            <a:srgbClr val="26231F"/>
                           </a:solidFill>
                         </a:rPr>
                         <a:t>□</a:t>
@@ -7584,25 +7869,25 @@
                   <a:tcPr anchor="ctr" marL="73152" marR="73152">
                     <a:lnL w="9525" cap="flat" cmpd="sng" algn="ctr">
                       <a:solidFill>
-                        <a:srgbClr val="D2EFDC"/>
+                        <a:srgbClr val="D5F6E0"/>
                       </a:solidFill>
                       <a:prstDash val="solid"/>
                     </a:lnL>
                     <a:lnR w="9525" cap="flat" cmpd="sng" algn="ctr">
                       <a:solidFill>
-                        <a:srgbClr val="D2EFDC"/>
+                        <a:srgbClr val="D5F6E0"/>
                       </a:solidFill>
                       <a:prstDash val="solid"/>
                     </a:lnR>
                     <a:lnT w="9525" cap="flat" cmpd="sng" algn="ctr">
                       <a:solidFill>
-                        <a:srgbClr val="D2EFDC"/>
+                        <a:srgbClr val="D5F6E0"/>
                       </a:solidFill>
                       <a:prstDash val="solid"/>
                     </a:lnT>
                     <a:lnB w="9525" cap="flat" cmpd="sng" algn="ctr">
                       <a:solidFill>
-                        <a:srgbClr val="D2EFDC"/>
+                        <a:srgbClr val="D5F6E0"/>
                       </a:solidFill>
                       <a:prstDash val="solid"/>
                     </a:lnB>
@@ -7620,7 +7905,7 @@
                       <a:r>
                         <a:rPr sz="1400" b="0">
                           <a:solidFill>
-                            <a:srgbClr val="2B2B2B"/>
+                            <a:srgbClr val="26231F"/>
                           </a:solidFill>
                         </a:rPr>
                         <a:t>□</a:t>
@@ -7630,25 +7915,25 @@
                   <a:tcPr anchor="ctr" marL="73152" marR="73152">
                     <a:lnL w="9525" cap="flat" cmpd="sng" algn="ctr">
                       <a:solidFill>
-                        <a:srgbClr val="D2EFDC"/>
+                        <a:srgbClr val="D5F6E0"/>
                       </a:solidFill>
                       <a:prstDash val="solid"/>
                     </a:lnL>
                     <a:lnR w="9525" cap="flat" cmpd="sng" algn="ctr">
                       <a:solidFill>
-                        <a:srgbClr val="D2EFDC"/>
+                        <a:srgbClr val="D5F6E0"/>
                       </a:solidFill>
                       <a:prstDash val="solid"/>
                     </a:lnR>
                     <a:lnT w="9525" cap="flat" cmpd="sng" algn="ctr">
                       <a:solidFill>
-                        <a:srgbClr val="D2EFDC"/>
+                        <a:srgbClr val="D5F6E0"/>
                       </a:solidFill>
                       <a:prstDash val="solid"/>
                     </a:lnT>
                     <a:lnB w="9525" cap="flat" cmpd="sng" algn="ctr">
                       <a:solidFill>
-                        <a:srgbClr val="D2EFDC"/>
+                        <a:srgbClr val="D5F6E0"/>
                       </a:solidFill>
                       <a:prstDash val="solid"/>
                     </a:lnB>
@@ -7666,7 +7951,7 @@
                       <a:r>
                         <a:rPr sz="1400" b="0">
                           <a:solidFill>
-                            <a:srgbClr val="2B2B2B"/>
+                            <a:srgbClr val="26231F"/>
                           </a:solidFill>
                         </a:rPr>
                         <a:t>□</a:t>
@@ -7676,25 +7961,25 @@
                   <a:tcPr anchor="ctr" marL="73152" marR="73152">
                     <a:lnL w="9525" cap="flat" cmpd="sng" algn="ctr">
                       <a:solidFill>
-                        <a:srgbClr val="D2EFDC"/>
+                        <a:srgbClr val="D5F6E0"/>
                       </a:solidFill>
                       <a:prstDash val="solid"/>
                     </a:lnL>
                     <a:lnR w="9525" cap="flat" cmpd="sng" algn="ctr">
                       <a:solidFill>
-                        <a:srgbClr val="D2EFDC"/>
+                        <a:srgbClr val="D5F6E0"/>
                       </a:solidFill>
                       <a:prstDash val="solid"/>
                     </a:lnR>
                     <a:lnT w="9525" cap="flat" cmpd="sng" algn="ctr">
                       <a:solidFill>
-                        <a:srgbClr val="D2EFDC"/>
+                        <a:srgbClr val="D5F6E0"/>
                       </a:solidFill>
                       <a:prstDash val="solid"/>
                     </a:lnT>
                     <a:lnB w="9525" cap="flat" cmpd="sng" algn="ctr">
                       <a:solidFill>
-                        <a:srgbClr val="D2EFDC"/>
+                        <a:srgbClr val="D5F6E0"/>
                       </a:solidFill>
                       <a:prstDash val="solid"/>
                     </a:lnB>
@@ -7714,7 +7999,7 @@
                       <a:r>
                         <a:rPr sz="1400" b="1">
                           <a:solidFill>
-                            <a:srgbClr val="183A23"/>
+                            <a:srgbClr val="274932"/>
                           </a:solidFill>
                         </a:rPr>
                         <a:t>연금·노후자금</a:t>
@@ -7724,30 +8009,30 @@
                   <a:tcPr anchor="ctr" marL="73152" marR="73152">
                     <a:lnL w="9525" cap="flat" cmpd="sng" algn="ctr">
                       <a:solidFill>
-                        <a:srgbClr val="D2EFDC"/>
+                        <a:srgbClr val="D5F6E0"/>
                       </a:solidFill>
                       <a:prstDash val="solid"/>
                     </a:lnL>
                     <a:lnR w="9525" cap="flat" cmpd="sng" algn="ctr">
                       <a:solidFill>
-                        <a:srgbClr val="D2EFDC"/>
+                        <a:srgbClr val="D5F6E0"/>
                       </a:solidFill>
                       <a:prstDash val="solid"/>
                     </a:lnR>
                     <a:lnT w="9525" cap="flat" cmpd="sng" algn="ctr">
                       <a:solidFill>
-                        <a:srgbClr val="D2EFDC"/>
+                        <a:srgbClr val="D5F6E0"/>
                       </a:solidFill>
                       <a:prstDash val="solid"/>
                     </a:lnT>
                     <a:lnB w="9525" cap="flat" cmpd="sng" algn="ctr">
                       <a:solidFill>
-                        <a:srgbClr val="D2EFDC"/>
+                        <a:srgbClr val="D5F6E0"/>
                       </a:solidFill>
                       <a:prstDash val="solid"/>
                     </a:lnB>
                     <a:solidFill>
-                      <a:srgbClr val="D2EFDC"/>
+                      <a:srgbClr val="D5F6E0"/>
                     </a:solidFill>
                   </a:tcPr>
                 </a:tc>
@@ -7760,7 +8045,7 @@
                       <a:r>
                         <a:rPr sz="1400" b="0">
                           <a:solidFill>
-                            <a:srgbClr val="2B2B2B"/>
+                            <a:srgbClr val="26231F"/>
                           </a:solidFill>
                         </a:rPr>
                         <a:t>□</a:t>
@@ -7770,30 +8055,30 @@
                   <a:tcPr anchor="ctr" marL="73152" marR="73152">
                     <a:lnL w="9525" cap="flat" cmpd="sng" algn="ctr">
                       <a:solidFill>
-                        <a:srgbClr val="D2EFDC"/>
+                        <a:srgbClr val="D5F6E0"/>
                       </a:solidFill>
                       <a:prstDash val="solid"/>
                     </a:lnL>
                     <a:lnR w="9525" cap="flat" cmpd="sng" algn="ctr">
                       <a:solidFill>
-                        <a:srgbClr val="D2EFDC"/>
+                        <a:srgbClr val="D5F6E0"/>
                       </a:solidFill>
                       <a:prstDash val="solid"/>
                     </a:lnR>
                     <a:lnT w="9525" cap="flat" cmpd="sng" algn="ctr">
                       <a:solidFill>
-                        <a:srgbClr val="D2EFDC"/>
+                        <a:srgbClr val="D5F6E0"/>
                       </a:solidFill>
                       <a:prstDash val="solid"/>
                     </a:lnT>
                     <a:lnB w="9525" cap="flat" cmpd="sng" algn="ctr">
                       <a:solidFill>
-                        <a:srgbClr val="D2EFDC"/>
+                        <a:srgbClr val="D5F6E0"/>
                       </a:solidFill>
                       <a:prstDash val="solid"/>
                     </a:lnB>
                     <a:solidFill>
-                      <a:srgbClr val="F1F9F3"/>
+                      <a:srgbClr val="ECFBF1"/>
                     </a:solidFill>
                   </a:tcPr>
                 </a:tc>
@@ -7806,7 +8091,7 @@
                       <a:r>
                         <a:rPr sz="1400" b="0">
                           <a:solidFill>
-                            <a:srgbClr val="2B2B2B"/>
+                            <a:srgbClr val="26231F"/>
                           </a:solidFill>
                         </a:rPr>
                         <a:t>□</a:t>
@@ -7816,30 +8101,30 @@
                   <a:tcPr anchor="ctr" marL="73152" marR="73152">
                     <a:lnL w="9525" cap="flat" cmpd="sng" algn="ctr">
                       <a:solidFill>
-                        <a:srgbClr val="D2EFDC"/>
+                        <a:srgbClr val="D5F6E0"/>
                       </a:solidFill>
                       <a:prstDash val="solid"/>
                     </a:lnL>
                     <a:lnR w="9525" cap="flat" cmpd="sng" algn="ctr">
                       <a:solidFill>
-                        <a:srgbClr val="D2EFDC"/>
+                        <a:srgbClr val="D5F6E0"/>
                       </a:solidFill>
                       <a:prstDash val="solid"/>
                     </a:lnR>
                     <a:lnT w="9525" cap="flat" cmpd="sng" algn="ctr">
                       <a:solidFill>
-                        <a:srgbClr val="D2EFDC"/>
+                        <a:srgbClr val="D5F6E0"/>
                       </a:solidFill>
                       <a:prstDash val="solid"/>
                     </a:lnT>
                     <a:lnB w="9525" cap="flat" cmpd="sng" algn="ctr">
                       <a:solidFill>
-                        <a:srgbClr val="D2EFDC"/>
+                        <a:srgbClr val="D5F6E0"/>
                       </a:solidFill>
                       <a:prstDash val="solid"/>
                     </a:lnB>
                     <a:solidFill>
-                      <a:srgbClr val="F1F9F3"/>
+                      <a:srgbClr val="ECFBF1"/>
                     </a:solidFill>
                   </a:tcPr>
                 </a:tc>
@@ -7852,7 +8137,7 @@
                       <a:r>
                         <a:rPr sz="1400" b="0">
                           <a:solidFill>
-                            <a:srgbClr val="2B2B2B"/>
+                            <a:srgbClr val="26231F"/>
                           </a:solidFill>
                         </a:rPr>
                         <a:t>□</a:t>
@@ -7862,30 +8147,30 @@
                   <a:tcPr anchor="ctr" marL="73152" marR="73152">
                     <a:lnL w="9525" cap="flat" cmpd="sng" algn="ctr">
                       <a:solidFill>
-                        <a:srgbClr val="D2EFDC"/>
+                        <a:srgbClr val="D5F6E0"/>
                       </a:solidFill>
                       <a:prstDash val="solid"/>
                     </a:lnL>
                     <a:lnR w="9525" cap="flat" cmpd="sng" algn="ctr">
                       <a:solidFill>
-                        <a:srgbClr val="D2EFDC"/>
+                        <a:srgbClr val="D5F6E0"/>
                       </a:solidFill>
                       <a:prstDash val="solid"/>
                     </a:lnR>
                     <a:lnT w="9525" cap="flat" cmpd="sng" algn="ctr">
                       <a:solidFill>
-                        <a:srgbClr val="D2EFDC"/>
+                        <a:srgbClr val="D5F6E0"/>
                       </a:solidFill>
                       <a:prstDash val="solid"/>
                     </a:lnT>
                     <a:lnB w="9525" cap="flat" cmpd="sng" algn="ctr">
                       <a:solidFill>
-                        <a:srgbClr val="D2EFDC"/>
+                        <a:srgbClr val="D5F6E0"/>
                       </a:solidFill>
                       <a:prstDash val="solid"/>
                     </a:lnB>
                     <a:solidFill>
-                      <a:srgbClr val="F1F9F3"/>
+                      <a:srgbClr val="ECFBF1"/>
                     </a:solidFill>
                   </a:tcPr>
                 </a:tc>
@@ -7928,14 +8213,43 @@
         </p:nvSpPr>
         <p:spPr>
           <a:xfrm>
-            <a:off x="9905695" y="-1463040"/>
-            <a:ext cx="3840480" cy="3840480"/>
+            <a:off x="0" y="6565392"/>
+            <a:ext cx="12191695" cy="292608"/>
+          </a:xfrm>
+          <a:prstGeom prst="rect">
+            <a:avLst/>
+          </a:prstGeom>
+          <a:solidFill>
+            <a:srgbClr val="ADEBC2"/>
+          </a:solidFill>
+          <a:ln>
+            <a:noFill/>
+          </a:ln>
+        </p:spPr>
+        <p:txBody>
+          <a:bodyPr rtlCol="0" anchor="ctr"/>
+          <a:lstStyle/>
+          <a:p>
+            <a:pPr algn="ctr"/>
+          </a:p>
+        </p:txBody>
+      </p:sp>
+      <p:sp>
+        <p:nvSpPr>
+          <p:cNvPr id="4" name="장식"/>
+          <p:cNvSpPr/>
+          <p:nvPr/>
+        </p:nvSpPr>
+        <p:spPr>
+          <a:xfrm>
+            <a:off x="10180015" y="-1645920"/>
+            <a:ext cx="3474720" cy="3474720"/>
           </a:xfrm>
           <a:prstGeom prst="ellipse">
             <a:avLst/>
           </a:prstGeom>
           <a:solidFill>
-            <a:srgbClr val="D2EFDC"/>
+            <a:srgbClr val="ADEBC2"/>
           </a:solidFill>
           <a:ln>
             <a:noFill/>
@@ -7951,20 +8265,58 @@
       </p:sp>
       <p:sp>
         <p:nvSpPr>
-          <p:cNvPr id="4" name="장식"/>
+          <p:cNvPr id="5" name="상단 라벨"/>
+          <p:cNvSpPr txBox="1"/>
+          <p:nvPr/>
+        </p:nvSpPr>
+        <p:spPr>
+          <a:xfrm>
+            <a:off x="640080" y="274320"/>
+            <a:ext cx="5486400" cy="274320"/>
+          </a:xfrm>
+          <a:prstGeom prst="rect">
+            <a:avLst/>
+          </a:prstGeom>
+          <a:noFill/>
+        </p:spPr>
+        <p:txBody>
+          <a:bodyPr wrap="square" lIns="54864" rIns="54864" tIns="27432" bIns="27432" anchor="ctr">
+            <a:noAutofit/>
+          </a:bodyPr>
+          <a:lstStyle/>
+          <a:p>
+            <a:pPr algn="l">
+              <a:lnSpc>
+                <a:spcPct val="115000"/>
+              </a:lnSpc>
+            </a:pPr>
+            <a:r>
+              <a:rPr sz="900" b="1" i="0" spc="250">
+                <a:solidFill>
+                  <a:srgbClr val="26231F"/>
+                </a:solidFill>
+              </a:rPr>
+              <a:t>INSURANCE CHECK</a:t>
+            </a:r>
+          </a:p>
+        </p:txBody>
+      </p:sp>
+      <p:sp>
+        <p:nvSpPr>
+          <p:cNvPr id="6" name="포인트"/>
           <p:cNvSpPr/>
           <p:nvPr/>
         </p:nvSpPr>
         <p:spPr>
           <a:xfrm>
-            <a:off x="11094415" y="274320"/>
-            <a:ext cx="411480" cy="411480"/>
-          </a:xfrm>
-          <a:prstGeom prst="ellipse">
+            <a:off x="11048695" y="502919"/>
+            <a:ext cx="274320" cy="274320"/>
+          </a:xfrm>
+          <a:prstGeom prst="star4">
             <a:avLst/>
           </a:prstGeom>
           <a:solidFill>
-            <a:srgbClr val="29653D"/>
+            <a:srgbClr val="FFFFFF"/>
           </a:solidFill>
           <a:ln>
             <a:noFill/>
@@ -7990,8 +8342,8 @@
         </p:nvSpPr>
         <p:spPr>
           <a:xfrm>
-            <a:off x="640080" y="457200"/>
-            <a:ext cx="9722815" cy="868680"/>
+            <a:off x="640080" y="658368"/>
+            <a:ext cx="9082735" cy="868680"/>
           </a:xfrm>
         </p:spPr>
         <p:txBody>
@@ -8008,7 +8360,7 @@
             <a:r>
               <a:rPr sz="3000" b="1" i="0">
                 <a:solidFill>
-                  <a:srgbClr val="183A23"/>
+                  <a:srgbClr val="26231F"/>
                 </a:solidFill>
               </a:rPr>
               <a:t>월 보험료 한눈에</a:t>
@@ -8018,27 +8370,25 @@
       </p:sp>
       <p:sp>
         <p:nvSpPr>
-          <p:cNvPr id="5" name="카드 1"/>
+          <p:cNvPr id="7" name="카드 1"/>
           <p:cNvSpPr/>
           <p:nvPr/>
         </p:nvSpPr>
         <p:spPr>
           <a:xfrm>
-            <a:off x="640080" y="1600200"/>
+            <a:off x="640080" y="1783080"/>
             <a:ext cx="3484778" cy="2926080"/>
           </a:xfrm>
           <a:prstGeom prst="roundRect">
             <a:avLst>
-              <a:gd name="adj" fmla="val 8000"/>
+              <a:gd name="adj" fmla="val 4000"/>
             </a:avLst>
           </a:prstGeom>
           <a:solidFill>
-            <a:srgbClr val="F1F9F3"/>
+            <a:srgbClr val="ECFBF1"/>
           </a:solidFill>
-          <a:ln w="15875">
-            <a:solidFill>
-              <a:srgbClr val="D2EFDC"/>
-            </a:solidFill>
+          <a:ln>
+            <a:noFill/>
           </a:ln>
         </p:spPr>
         <p:txBody>
@@ -8051,20 +8401,49 @@
       </p:sp>
       <p:sp>
         <p:nvSpPr>
-          <p:cNvPr id="6" name="번호 1"/>
+          <p:cNvPr id="8" name="포인트 막대"/>
           <p:cNvSpPr/>
           <p:nvPr/>
         </p:nvSpPr>
         <p:spPr>
           <a:xfrm>
-            <a:off x="822959" y="1783080"/>
+            <a:off x="640080" y="1892807"/>
+            <a:ext cx="54864" cy="2706624"/>
+          </a:xfrm>
+          <a:prstGeom prst="rect">
+            <a:avLst/>
+          </a:prstGeom>
+          <a:solidFill>
+            <a:srgbClr val="98E1B1"/>
+          </a:solidFill>
+          <a:ln>
+            <a:noFill/>
+          </a:ln>
+        </p:spPr>
+        <p:txBody>
+          <a:bodyPr rtlCol="0" anchor="ctr"/>
+          <a:lstStyle/>
+          <a:p>
+            <a:pPr algn="ctr"/>
+          </a:p>
+        </p:txBody>
+      </p:sp>
+      <p:sp>
+        <p:nvSpPr>
+          <p:cNvPr id="9" name="번호 1"/>
+          <p:cNvSpPr/>
+          <p:nvPr/>
+        </p:nvSpPr>
+        <p:spPr>
+          <a:xfrm>
+            <a:off x="822959" y="1965960"/>
             <a:ext cx="457200" cy="457200"/>
           </a:xfrm>
           <a:prstGeom prst="ellipse">
             <a:avLst/>
           </a:prstGeom>
           <a:solidFill>
-            <a:srgbClr val="29653D"/>
+            <a:srgbClr val="B8EAE0"/>
           </a:solidFill>
           <a:ln>
             <a:noFill/>
@@ -8084,7 +8463,7 @@
             <a:r>
               <a:rPr sz="1600" b="1" i="0">
                 <a:solidFill>
-                  <a:srgbClr val="FFFFFF"/>
+                  <a:srgbClr val="26231F"/>
                 </a:solidFill>
               </a:rPr>
               <a:t>1</a:t>
@@ -8094,13 +8473,13 @@
       </p:sp>
       <p:sp>
         <p:nvSpPr>
-          <p:cNvPr id="7" name="TextBox 6"/>
+          <p:cNvPr id="10" name="TextBox 9"/>
           <p:cNvSpPr txBox="1"/>
           <p:nvPr/>
         </p:nvSpPr>
         <p:spPr>
           <a:xfrm>
-            <a:off x="777240" y="2377440"/>
+            <a:off x="777240" y="2560320"/>
             <a:ext cx="3210458" cy="640080"/>
           </a:xfrm>
           <a:prstGeom prst="rect">
@@ -8122,7 +8501,7 @@
             <a:r>
               <a:rPr sz="1700" b="1" i="0">
                 <a:solidFill>
-                  <a:srgbClr val="183A23"/>
+                  <a:srgbClr val="274932"/>
                 </a:solidFill>
               </a:rPr>
               <a:t>월 보험료 합계</a:t>
@@ -8132,13 +8511,13 @@
       </p:sp>
       <p:sp>
         <p:nvSpPr>
-          <p:cNvPr id="8" name="TextBox 7"/>
+          <p:cNvPr id="11" name="TextBox 10"/>
           <p:cNvSpPr txBox="1"/>
           <p:nvPr/>
         </p:nvSpPr>
         <p:spPr>
           <a:xfrm>
-            <a:off x="777240" y="3063240"/>
+            <a:off x="777240" y="3246120"/>
             <a:ext cx="3210458" cy="1325880"/>
           </a:xfrm>
           <a:prstGeom prst="rect">
@@ -8160,7 +8539,7 @@
             <a:r>
               <a:rPr sz="3000" b="0" i="0">
                 <a:solidFill>
-                  <a:srgbClr val="2B2B2B"/>
+                  <a:srgbClr val="26231F"/>
                 </a:solidFill>
               </a:rPr>
               <a:t>0원</a:t>
@@ -8170,27 +8549,25 @@
       </p:sp>
       <p:sp>
         <p:nvSpPr>
-          <p:cNvPr id="9" name="카드 2"/>
+          <p:cNvPr id="12" name="카드 2"/>
           <p:cNvSpPr/>
           <p:nvPr/>
         </p:nvSpPr>
         <p:spPr>
           <a:xfrm>
-            <a:off x="4353458" y="1600200"/>
+            <a:off x="4353458" y="1783080"/>
             <a:ext cx="3484778" cy="2926080"/>
           </a:xfrm>
           <a:prstGeom prst="roundRect">
             <a:avLst>
-              <a:gd name="adj" fmla="val 8000"/>
+              <a:gd name="adj" fmla="val 4000"/>
             </a:avLst>
           </a:prstGeom>
           <a:solidFill>
-            <a:srgbClr val="F1F9F3"/>
+            <a:srgbClr val="ECFBF1"/>
           </a:solidFill>
-          <a:ln w="15875">
-            <a:solidFill>
-              <a:srgbClr val="D2EFDC"/>
-            </a:solidFill>
+          <a:ln>
+            <a:noFill/>
           </a:ln>
         </p:spPr>
         <p:txBody>
@@ -8203,20 +8580,49 @@
       </p:sp>
       <p:sp>
         <p:nvSpPr>
-          <p:cNvPr id="10" name="번호 2"/>
+          <p:cNvPr id="13" name="포인트 막대"/>
           <p:cNvSpPr/>
           <p:nvPr/>
         </p:nvSpPr>
         <p:spPr>
           <a:xfrm>
-            <a:off x="4536338" y="1783080"/>
+            <a:off x="4353458" y="1892807"/>
+            <a:ext cx="54864" cy="2706624"/>
+          </a:xfrm>
+          <a:prstGeom prst="rect">
+            <a:avLst/>
+          </a:prstGeom>
+          <a:solidFill>
+            <a:srgbClr val="98E1B1"/>
+          </a:solidFill>
+          <a:ln>
+            <a:noFill/>
+          </a:ln>
+        </p:spPr>
+        <p:txBody>
+          <a:bodyPr rtlCol="0" anchor="ctr"/>
+          <a:lstStyle/>
+          <a:p>
+            <a:pPr algn="ctr"/>
+          </a:p>
+        </p:txBody>
+      </p:sp>
+      <p:sp>
+        <p:nvSpPr>
+          <p:cNvPr id="14" name="번호 2"/>
+          <p:cNvSpPr/>
+          <p:nvPr/>
+        </p:nvSpPr>
+        <p:spPr>
+          <a:xfrm>
+            <a:off x="4536338" y="1965960"/>
             <a:ext cx="457200" cy="457200"/>
           </a:xfrm>
           <a:prstGeom prst="ellipse">
             <a:avLst/>
           </a:prstGeom>
           <a:solidFill>
-            <a:srgbClr val="29653D"/>
+            <a:srgbClr val="B8EAE0"/>
           </a:solidFill>
           <a:ln>
             <a:noFill/>
@@ -8236,7 +8642,7 @@
             <a:r>
               <a:rPr sz="1600" b="1" i="0">
                 <a:solidFill>
-                  <a:srgbClr val="FFFFFF"/>
+                  <a:srgbClr val="26231F"/>
                 </a:solidFill>
               </a:rPr>
               <a:t>2</a:t>
@@ -8246,13 +8652,13 @@
       </p:sp>
       <p:sp>
         <p:nvSpPr>
-          <p:cNvPr id="11" name="TextBox 10"/>
+          <p:cNvPr id="15" name="TextBox 14"/>
           <p:cNvSpPr txBox="1"/>
           <p:nvPr/>
         </p:nvSpPr>
         <p:spPr>
           <a:xfrm>
-            <a:off x="4490618" y="2377440"/>
+            <a:off x="4490618" y="2560320"/>
             <a:ext cx="3210458" cy="640080"/>
           </a:xfrm>
           <a:prstGeom prst="rect">
@@ -8274,7 +8680,7 @@
             <a:r>
               <a:rPr sz="1700" b="1" i="0">
                 <a:solidFill>
-                  <a:srgbClr val="183A23"/>
+                  <a:srgbClr val="274932"/>
                 </a:solidFill>
               </a:rPr>
               <a:t>연 보험료 합계</a:t>
@@ -8284,13 +8690,13 @@
       </p:sp>
       <p:sp>
         <p:nvSpPr>
-          <p:cNvPr id="12" name="TextBox 11"/>
+          <p:cNvPr id="16" name="TextBox 15"/>
           <p:cNvSpPr txBox="1"/>
           <p:nvPr/>
         </p:nvSpPr>
         <p:spPr>
           <a:xfrm>
-            <a:off x="4490618" y="3063240"/>
+            <a:off x="4490618" y="3246120"/>
             <a:ext cx="3210458" cy="1325880"/>
           </a:xfrm>
           <a:prstGeom prst="rect">
@@ -8312,7 +8718,7 @@
             <a:r>
               <a:rPr sz="3000" b="0" i="0">
                 <a:solidFill>
-                  <a:srgbClr val="2B2B2B"/>
+                  <a:srgbClr val="26231F"/>
                 </a:solidFill>
               </a:rPr>
               <a:t>0원</a:t>
@@ -8322,27 +8728,25 @@
       </p:sp>
       <p:sp>
         <p:nvSpPr>
-          <p:cNvPr id="13" name="카드 3"/>
+          <p:cNvPr id="17" name="카드 3"/>
           <p:cNvSpPr/>
           <p:nvPr/>
         </p:nvSpPr>
         <p:spPr>
           <a:xfrm>
-            <a:off x="8066836" y="1600200"/>
+            <a:off x="8066836" y="1783080"/>
             <a:ext cx="3484778" cy="2926080"/>
           </a:xfrm>
           <a:prstGeom prst="roundRect">
             <a:avLst>
-              <a:gd name="adj" fmla="val 8000"/>
+              <a:gd name="adj" fmla="val 4000"/>
             </a:avLst>
           </a:prstGeom>
           <a:solidFill>
-            <a:srgbClr val="F1F9F3"/>
+            <a:srgbClr val="ECFBF1"/>
           </a:solidFill>
-          <a:ln w="15875">
-            <a:solidFill>
-              <a:srgbClr val="D2EFDC"/>
-            </a:solidFill>
+          <a:ln>
+            <a:noFill/>
           </a:ln>
         </p:spPr>
         <p:txBody>
@@ -8355,20 +8759,49 @@
       </p:sp>
       <p:sp>
         <p:nvSpPr>
-          <p:cNvPr id="14" name="번호 3"/>
+          <p:cNvPr id="18" name="포인트 막대"/>
           <p:cNvSpPr/>
           <p:nvPr/>
         </p:nvSpPr>
         <p:spPr>
           <a:xfrm>
-            <a:off x="8249716" y="1783080"/>
+            <a:off x="8066836" y="1892807"/>
+            <a:ext cx="54864" cy="2706624"/>
+          </a:xfrm>
+          <a:prstGeom prst="rect">
+            <a:avLst/>
+          </a:prstGeom>
+          <a:solidFill>
+            <a:srgbClr val="98E1B1"/>
+          </a:solidFill>
+          <a:ln>
+            <a:noFill/>
+          </a:ln>
+        </p:spPr>
+        <p:txBody>
+          <a:bodyPr rtlCol="0" anchor="ctr"/>
+          <a:lstStyle/>
+          <a:p>
+            <a:pPr algn="ctr"/>
+          </a:p>
+        </p:txBody>
+      </p:sp>
+      <p:sp>
+        <p:nvSpPr>
+          <p:cNvPr id="19" name="번호 3"/>
+          <p:cNvSpPr/>
+          <p:nvPr/>
+        </p:nvSpPr>
+        <p:spPr>
+          <a:xfrm>
+            <a:off x="8249716" y="1965960"/>
             <a:ext cx="457200" cy="457200"/>
           </a:xfrm>
           <a:prstGeom prst="ellipse">
             <a:avLst/>
           </a:prstGeom>
           <a:solidFill>
-            <a:srgbClr val="29653D"/>
+            <a:srgbClr val="B8EAE0"/>
           </a:solidFill>
           <a:ln>
             <a:noFill/>
@@ -8388,7 +8821,7 @@
             <a:r>
               <a:rPr sz="1600" b="1" i="0">
                 <a:solidFill>
-                  <a:srgbClr val="FFFFFF"/>
+                  <a:srgbClr val="26231F"/>
                 </a:solidFill>
               </a:rPr>
               <a:t>3</a:t>
@@ -8398,13 +8831,13 @@
       </p:sp>
       <p:sp>
         <p:nvSpPr>
-          <p:cNvPr id="15" name="TextBox 14"/>
+          <p:cNvPr id="20" name="TextBox 19"/>
           <p:cNvSpPr txBox="1"/>
           <p:nvPr/>
         </p:nvSpPr>
         <p:spPr>
           <a:xfrm>
-            <a:off x="8203996" y="2377440"/>
+            <a:off x="8203996" y="2560320"/>
             <a:ext cx="3210458" cy="640080"/>
           </a:xfrm>
           <a:prstGeom prst="rect">
@@ -8426,7 +8859,7 @@
             <a:r>
               <a:rPr sz="1700" b="1" i="0">
                 <a:solidFill>
-                  <a:srgbClr val="183A23"/>
+                  <a:srgbClr val="274932"/>
                 </a:solidFill>
               </a:rPr>
               <a:t>월 소득 대비</a:t>
@@ -8436,13 +8869,13 @@
       </p:sp>
       <p:sp>
         <p:nvSpPr>
-          <p:cNvPr id="16" name="TextBox 15"/>
+          <p:cNvPr id="21" name="TextBox 20"/>
           <p:cNvSpPr txBox="1"/>
           <p:nvPr/>
         </p:nvSpPr>
         <p:spPr>
           <a:xfrm>
-            <a:off x="8203996" y="3063240"/>
+            <a:off x="8203996" y="3246120"/>
             <a:ext cx="3210458" cy="1325880"/>
           </a:xfrm>
           <a:prstGeom prst="rect">
@@ -8464,7 +8897,7 @@
             <a:r>
               <a:rPr sz="3000" b="0" i="0">
                 <a:solidFill>
-                  <a:srgbClr val="2B2B2B"/>
+                  <a:srgbClr val="26231F"/>
                 </a:solidFill>
               </a:rPr>
               <a:t>0 %</a:t>
@@ -8474,13 +8907,13 @@
       </p:sp>
       <p:sp>
         <p:nvSpPr>
-          <p:cNvPr id="17" name="안내"/>
+          <p:cNvPr id="22" name="안내"/>
           <p:cNvSpPr txBox="1"/>
           <p:nvPr/>
         </p:nvSpPr>
         <p:spPr>
           <a:xfrm>
-            <a:off x="640080" y="4709160"/>
+            <a:off x="640080" y="4892040"/>
             <a:ext cx="10911535" cy="365760"/>
           </a:xfrm>
           <a:prstGeom prst="rect">
@@ -8544,14 +8977,43 @@
         </p:nvSpPr>
         <p:spPr>
           <a:xfrm>
-            <a:off x="9905695" y="-1463040"/>
-            <a:ext cx="3840480" cy="3840480"/>
+            <a:off x="0" y="6565392"/>
+            <a:ext cx="12191695" cy="292608"/>
+          </a:xfrm>
+          <a:prstGeom prst="rect">
+            <a:avLst/>
+          </a:prstGeom>
+          <a:solidFill>
+            <a:srgbClr val="ADEBC2"/>
+          </a:solidFill>
+          <a:ln>
+            <a:noFill/>
+          </a:ln>
+        </p:spPr>
+        <p:txBody>
+          <a:bodyPr rtlCol="0" anchor="ctr"/>
+          <a:lstStyle/>
+          <a:p>
+            <a:pPr algn="ctr"/>
+          </a:p>
+        </p:txBody>
+      </p:sp>
+      <p:sp>
+        <p:nvSpPr>
+          <p:cNvPr id="4" name="장식"/>
+          <p:cNvSpPr/>
+          <p:nvPr/>
+        </p:nvSpPr>
+        <p:spPr>
+          <a:xfrm>
+            <a:off x="10180015" y="-1645920"/>
+            <a:ext cx="3474720" cy="3474720"/>
           </a:xfrm>
           <a:prstGeom prst="ellipse">
             <a:avLst/>
           </a:prstGeom>
           <a:solidFill>
-            <a:srgbClr val="D2EFDC"/>
+            <a:srgbClr val="ADEBC2"/>
           </a:solidFill>
           <a:ln>
             <a:noFill/>
@@ -8567,20 +9029,58 @@
       </p:sp>
       <p:sp>
         <p:nvSpPr>
-          <p:cNvPr id="4" name="장식"/>
+          <p:cNvPr id="5" name="상단 라벨"/>
+          <p:cNvSpPr txBox="1"/>
+          <p:nvPr/>
+        </p:nvSpPr>
+        <p:spPr>
+          <a:xfrm>
+            <a:off x="640080" y="274320"/>
+            <a:ext cx="5486400" cy="274320"/>
+          </a:xfrm>
+          <a:prstGeom prst="rect">
+            <a:avLst/>
+          </a:prstGeom>
+          <a:noFill/>
+        </p:spPr>
+        <p:txBody>
+          <a:bodyPr wrap="square" lIns="54864" rIns="54864" tIns="27432" bIns="27432" anchor="ctr">
+            <a:noAutofit/>
+          </a:bodyPr>
+          <a:lstStyle/>
+          <a:p>
+            <a:pPr algn="l">
+              <a:lnSpc>
+                <a:spcPct val="115000"/>
+              </a:lnSpc>
+            </a:pPr>
+            <a:r>
+              <a:rPr sz="900" b="1" i="0" spc="250">
+                <a:solidFill>
+                  <a:srgbClr val="26231F"/>
+                </a:solidFill>
+              </a:rPr>
+              <a:t>INSURANCE CHECK</a:t>
+            </a:r>
+          </a:p>
+        </p:txBody>
+      </p:sp>
+      <p:sp>
+        <p:nvSpPr>
+          <p:cNvPr id="6" name="포인트"/>
           <p:cNvSpPr/>
           <p:nvPr/>
         </p:nvSpPr>
         <p:spPr>
           <a:xfrm>
-            <a:off x="11094415" y="274320"/>
-            <a:ext cx="411480" cy="411480"/>
-          </a:xfrm>
-          <a:prstGeom prst="ellipse">
+            <a:off x="11048695" y="502919"/>
+            <a:ext cx="274320" cy="274320"/>
+          </a:xfrm>
+          <a:prstGeom prst="star4">
             <a:avLst/>
           </a:prstGeom>
           <a:solidFill>
-            <a:srgbClr val="29653D"/>
+            <a:srgbClr val="FFFFFF"/>
           </a:solidFill>
           <a:ln>
             <a:noFill/>
@@ -8606,8 +9106,8 @@
         </p:nvSpPr>
         <p:spPr>
           <a:xfrm>
-            <a:off x="640080" y="457200"/>
-            <a:ext cx="9722815" cy="868680"/>
+            <a:off x="640080" y="658368"/>
+            <a:ext cx="9082735" cy="868680"/>
           </a:xfrm>
         </p:spPr>
         <p:txBody>
@@ -8624,7 +9124,7 @@
             <a:r>
               <a:rPr sz="3000" b="1" i="0">
                 <a:solidFill>
-                  <a:srgbClr val="183A23"/>
+                  <a:srgbClr val="26231F"/>
                 </a:solidFill>
               </a:rPr>
               <a:t>점검 메모와 다음 할 일</a:t>
@@ -8634,27 +9134,25 @@
       </p:sp>
       <p:sp>
         <p:nvSpPr>
-          <p:cNvPr id="5" name="카드 1"/>
+          <p:cNvPr id="7" name="카드 1"/>
           <p:cNvSpPr/>
           <p:nvPr/>
         </p:nvSpPr>
         <p:spPr>
           <a:xfrm>
-            <a:off x="640080" y="1600200"/>
-            <a:ext cx="3484778" cy="4160520"/>
+            <a:off x="640080" y="1783080"/>
+            <a:ext cx="3484778" cy="3749039"/>
           </a:xfrm>
           <a:prstGeom prst="roundRect">
             <a:avLst>
-              <a:gd name="adj" fmla="val 8000"/>
+              <a:gd name="adj" fmla="val 4000"/>
             </a:avLst>
           </a:prstGeom>
           <a:solidFill>
-            <a:srgbClr val="F1F9F3"/>
+            <a:srgbClr val="ECFBF1"/>
           </a:solidFill>
-          <a:ln w="15875">
-            <a:solidFill>
-              <a:srgbClr val="D2EFDC"/>
-            </a:solidFill>
+          <a:ln>
+            <a:noFill/>
           </a:ln>
         </p:spPr>
         <p:txBody>
@@ -8667,20 +9165,49 @@
       </p:sp>
       <p:sp>
         <p:nvSpPr>
-          <p:cNvPr id="6" name="번호 1"/>
+          <p:cNvPr id="8" name="포인트 막대"/>
           <p:cNvSpPr/>
           <p:nvPr/>
         </p:nvSpPr>
         <p:spPr>
           <a:xfrm>
-            <a:off x="822959" y="1783080"/>
+            <a:off x="640080" y="1892807"/>
+            <a:ext cx="54864" cy="3529583"/>
+          </a:xfrm>
+          <a:prstGeom prst="rect">
+            <a:avLst/>
+          </a:prstGeom>
+          <a:solidFill>
+            <a:srgbClr val="98E1B1"/>
+          </a:solidFill>
+          <a:ln>
+            <a:noFill/>
+          </a:ln>
+        </p:spPr>
+        <p:txBody>
+          <a:bodyPr rtlCol="0" anchor="ctr"/>
+          <a:lstStyle/>
+          <a:p>
+            <a:pPr algn="ctr"/>
+          </a:p>
+        </p:txBody>
+      </p:sp>
+      <p:sp>
+        <p:nvSpPr>
+          <p:cNvPr id="9" name="번호 1"/>
+          <p:cNvSpPr/>
+          <p:nvPr/>
+        </p:nvSpPr>
+        <p:spPr>
+          <a:xfrm>
+            <a:off x="822959" y="1965960"/>
             <a:ext cx="457200" cy="457200"/>
           </a:xfrm>
           <a:prstGeom prst="ellipse">
             <a:avLst/>
           </a:prstGeom>
           <a:solidFill>
-            <a:srgbClr val="29653D"/>
+            <a:srgbClr val="B8EAE0"/>
           </a:solidFill>
           <a:ln>
             <a:noFill/>
@@ -8700,7 +9227,7 @@
             <a:r>
               <a:rPr sz="1600" b="1" i="0">
                 <a:solidFill>
-                  <a:srgbClr val="FFFFFF"/>
+                  <a:srgbClr val="26231F"/>
                 </a:solidFill>
               </a:rPr>
               <a:t>1</a:t>
@@ -8710,13 +9237,13 @@
       </p:sp>
       <p:sp>
         <p:nvSpPr>
-          <p:cNvPr id="7" name="TextBox 6"/>
+          <p:cNvPr id="10" name="TextBox 9"/>
           <p:cNvSpPr txBox="1"/>
           <p:nvPr/>
         </p:nvSpPr>
         <p:spPr>
           <a:xfrm>
-            <a:off x="777240" y="2377440"/>
+            <a:off x="777240" y="2560320"/>
             <a:ext cx="3210458" cy="640080"/>
           </a:xfrm>
           <a:prstGeom prst="rect">
@@ -8738,7 +9265,7 @@
             <a:r>
               <a:rPr sz="1800" b="1" i="0">
                 <a:solidFill>
-                  <a:srgbClr val="183A23"/>
+                  <a:srgbClr val="274932"/>
                 </a:solidFill>
               </a:rPr>
               <a:t>확인할 것</a:t>
@@ -8748,14 +9275,14 @@
       </p:sp>
       <p:sp>
         <p:nvSpPr>
-          <p:cNvPr id="8" name="TextBox 7"/>
+          <p:cNvPr id="11" name="TextBox 10"/>
           <p:cNvSpPr txBox="1"/>
           <p:nvPr/>
         </p:nvSpPr>
         <p:spPr>
           <a:xfrm>
-            <a:off x="777240" y="3063240"/>
-            <a:ext cx="3210458" cy="2560320"/>
+            <a:off x="777240" y="3246120"/>
+            <a:ext cx="3210458" cy="2148839"/>
           </a:xfrm>
           <a:prstGeom prst="rect">
             <a:avLst/>
@@ -8776,7 +9303,7 @@
             <a:r>
               <a:rPr sz="1500" b="0" i="0">
                 <a:solidFill>
-                  <a:srgbClr val="2B2B2B"/>
+                  <a:srgbClr val="26231F"/>
                 </a:solidFill>
               </a:rPr>
               <a:t>내용을 입력하세요</a:t>
@@ -8786,27 +9313,25 @@
       </p:sp>
       <p:sp>
         <p:nvSpPr>
-          <p:cNvPr id="9" name="카드 2"/>
+          <p:cNvPr id="12" name="카드 2"/>
           <p:cNvSpPr/>
           <p:nvPr/>
         </p:nvSpPr>
         <p:spPr>
           <a:xfrm>
-            <a:off x="4353458" y="1600200"/>
-            <a:ext cx="3484778" cy="4160520"/>
+            <a:off x="4353458" y="1783080"/>
+            <a:ext cx="3484778" cy="3749039"/>
           </a:xfrm>
           <a:prstGeom prst="roundRect">
             <a:avLst>
-              <a:gd name="adj" fmla="val 8000"/>
+              <a:gd name="adj" fmla="val 4000"/>
             </a:avLst>
           </a:prstGeom>
           <a:solidFill>
-            <a:srgbClr val="F1F9F3"/>
+            <a:srgbClr val="ECFBF1"/>
           </a:solidFill>
-          <a:ln w="15875">
-            <a:solidFill>
-              <a:srgbClr val="D2EFDC"/>
-            </a:solidFill>
+          <a:ln>
+            <a:noFill/>
           </a:ln>
         </p:spPr>
         <p:txBody>
@@ -8819,20 +9344,49 @@
       </p:sp>
       <p:sp>
         <p:nvSpPr>
-          <p:cNvPr id="10" name="번호 2"/>
+          <p:cNvPr id="13" name="포인트 막대"/>
           <p:cNvSpPr/>
           <p:nvPr/>
         </p:nvSpPr>
         <p:spPr>
           <a:xfrm>
-            <a:off x="4536338" y="1783080"/>
+            <a:off x="4353458" y="1892807"/>
+            <a:ext cx="54864" cy="3529583"/>
+          </a:xfrm>
+          <a:prstGeom prst="rect">
+            <a:avLst/>
+          </a:prstGeom>
+          <a:solidFill>
+            <a:srgbClr val="98E1B1"/>
+          </a:solidFill>
+          <a:ln>
+            <a:noFill/>
+          </a:ln>
+        </p:spPr>
+        <p:txBody>
+          <a:bodyPr rtlCol="0" anchor="ctr"/>
+          <a:lstStyle/>
+          <a:p>
+            <a:pPr algn="ctr"/>
+          </a:p>
+        </p:txBody>
+      </p:sp>
+      <p:sp>
+        <p:nvSpPr>
+          <p:cNvPr id="14" name="번호 2"/>
+          <p:cNvSpPr/>
+          <p:nvPr/>
+        </p:nvSpPr>
+        <p:spPr>
+          <a:xfrm>
+            <a:off x="4536338" y="1965960"/>
             <a:ext cx="457200" cy="457200"/>
           </a:xfrm>
           <a:prstGeom prst="ellipse">
             <a:avLst/>
           </a:prstGeom>
           <a:solidFill>
-            <a:srgbClr val="29653D"/>
+            <a:srgbClr val="B8EAE0"/>
           </a:solidFill>
           <a:ln>
             <a:noFill/>
@@ -8852,7 +9406,7 @@
             <a:r>
               <a:rPr sz="1600" b="1" i="0">
                 <a:solidFill>
-                  <a:srgbClr val="FFFFFF"/>
+                  <a:srgbClr val="26231F"/>
                 </a:solidFill>
               </a:rPr>
               <a:t>2</a:t>
@@ -8862,13 +9416,13 @@
       </p:sp>
       <p:sp>
         <p:nvSpPr>
-          <p:cNvPr id="11" name="TextBox 10"/>
+          <p:cNvPr id="15" name="TextBox 14"/>
           <p:cNvSpPr txBox="1"/>
           <p:nvPr/>
         </p:nvSpPr>
         <p:spPr>
           <a:xfrm>
-            <a:off x="4490618" y="2377440"/>
+            <a:off x="4490618" y="2560320"/>
             <a:ext cx="3210458" cy="640080"/>
           </a:xfrm>
           <a:prstGeom prst="rect">
@@ -8890,7 +9444,7 @@
             <a:r>
               <a:rPr sz="1800" b="1" i="0">
                 <a:solidFill>
-                  <a:srgbClr val="183A23"/>
+                  <a:srgbClr val="274932"/>
                 </a:solidFill>
               </a:rPr>
               <a:t>문의할 것</a:t>
@@ -8900,14 +9454,14 @@
       </p:sp>
       <p:sp>
         <p:nvSpPr>
-          <p:cNvPr id="12" name="TextBox 11"/>
+          <p:cNvPr id="16" name="TextBox 15"/>
           <p:cNvSpPr txBox="1"/>
           <p:nvPr/>
         </p:nvSpPr>
         <p:spPr>
           <a:xfrm>
-            <a:off x="4490618" y="3063240"/>
-            <a:ext cx="3210458" cy="2560320"/>
+            <a:off x="4490618" y="3246120"/>
+            <a:ext cx="3210458" cy="2148839"/>
           </a:xfrm>
           <a:prstGeom prst="rect">
             <a:avLst/>
@@ -8928,7 +9482,7 @@
             <a:r>
               <a:rPr sz="1500" b="0" i="0">
                 <a:solidFill>
-                  <a:srgbClr val="2B2B2B"/>
+                  <a:srgbClr val="26231F"/>
                 </a:solidFill>
               </a:rPr>
               <a:t>내용을 입력하세요</a:t>
@@ -8938,27 +9492,25 @@
       </p:sp>
       <p:sp>
         <p:nvSpPr>
-          <p:cNvPr id="13" name="카드 3"/>
+          <p:cNvPr id="17" name="카드 3"/>
           <p:cNvSpPr/>
           <p:nvPr/>
         </p:nvSpPr>
         <p:spPr>
           <a:xfrm>
-            <a:off x="8066836" y="1600200"/>
-            <a:ext cx="3484778" cy="4160520"/>
+            <a:off x="8066836" y="1783080"/>
+            <a:ext cx="3484778" cy="3749039"/>
           </a:xfrm>
           <a:prstGeom prst="roundRect">
             <a:avLst>
-              <a:gd name="adj" fmla="val 8000"/>
+              <a:gd name="adj" fmla="val 4000"/>
             </a:avLst>
           </a:prstGeom>
           <a:solidFill>
-            <a:srgbClr val="F1F9F3"/>
+            <a:srgbClr val="ECFBF1"/>
           </a:solidFill>
-          <a:ln w="15875">
-            <a:solidFill>
-              <a:srgbClr val="D2EFDC"/>
-            </a:solidFill>
+          <a:ln>
+            <a:noFill/>
           </a:ln>
         </p:spPr>
         <p:txBody>
@@ -8971,20 +9523,49 @@
       </p:sp>
       <p:sp>
         <p:nvSpPr>
-          <p:cNvPr id="14" name="번호 3"/>
+          <p:cNvPr id="18" name="포인트 막대"/>
           <p:cNvSpPr/>
           <p:nvPr/>
         </p:nvSpPr>
         <p:spPr>
           <a:xfrm>
-            <a:off x="8249716" y="1783080"/>
+            <a:off x="8066836" y="1892807"/>
+            <a:ext cx="54864" cy="3529583"/>
+          </a:xfrm>
+          <a:prstGeom prst="rect">
+            <a:avLst/>
+          </a:prstGeom>
+          <a:solidFill>
+            <a:srgbClr val="98E1B1"/>
+          </a:solidFill>
+          <a:ln>
+            <a:noFill/>
+          </a:ln>
+        </p:spPr>
+        <p:txBody>
+          <a:bodyPr rtlCol="0" anchor="ctr"/>
+          <a:lstStyle/>
+          <a:p>
+            <a:pPr algn="ctr"/>
+          </a:p>
+        </p:txBody>
+      </p:sp>
+      <p:sp>
+        <p:nvSpPr>
+          <p:cNvPr id="19" name="번호 3"/>
+          <p:cNvSpPr/>
+          <p:nvPr/>
+        </p:nvSpPr>
+        <p:spPr>
+          <a:xfrm>
+            <a:off x="8249716" y="1965960"/>
             <a:ext cx="457200" cy="457200"/>
           </a:xfrm>
           <a:prstGeom prst="ellipse">
             <a:avLst/>
           </a:prstGeom>
           <a:solidFill>
-            <a:srgbClr val="29653D"/>
+            <a:srgbClr val="B8EAE0"/>
           </a:solidFill>
           <a:ln>
             <a:noFill/>
@@ -9004,7 +9585,7 @@
             <a:r>
               <a:rPr sz="1600" b="1" i="0">
                 <a:solidFill>
-                  <a:srgbClr val="FFFFFF"/>
+                  <a:srgbClr val="26231F"/>
                 </a:solidFill>
               </a:rPr>
               <a:t>3</a:t>
@@ -9014,13 +9595,13 @@
       </p:sp>
       <p:sp>
         <p:nvSpPr>
-          <p:cNvPr id="15" name="TextBox 14"/>
+          <p:cNvPr id="20" name="TextBox 19"/>
           <p:cNvSpPr txBox="1"/>
           <p:nvPr/>
         </p:nvSpPr>
         <p:spPr>
           <a:xfrm>
-            <a:off x="8203996" y="2377440"/>
+            <a:off x="8203996" y="2560320"/>
             <a:ext cx="3210458" cy="640080"/>
           </a:xfrm>
           <a:prstGeom prst="rect">
@@ -9042,7 +9623,7 @@
             <a:r>
               <a:rPr sz="1800" b="1" i="0">
                 <a:solidFill>
-                  <a:srgbClr val="183A23"/>
+                  <a:srgbClr val="274932"/>
                 </a:solidFill>
               </a:rPr>
               <a:t>정리할 날짜</a:t>
@@ -9052,14 +9633,14 @@
       </p:sp>
       <p:sp>
         <p:nvSpPr>
-          <p:cNvPr id="16" name="TextBox 15"/>
+          <p:cNvPr id="21" name="TextBox 20"/>
           <p:cNvSpPr txBox="1"/>
           <p:nvPr/>
         </p:nvSpPr>
         <p:spPr>
           <a:xfrm>
-            <a:off x="8203996" y="3063240"/>
-            <a:ext cx="3210458" cy="2560320"/>
+            <a:off x="8203996" y="3246120"/>
+            <a:ext cx="3210458" cy="2148839"/>
           </a:xfrm>
           <a:prstGeom prst="rect">
             <a:avLst/>
@@ -9080,7 +9661,7 @@
             <a:r>
               <a:rPr sz="1500" b="0" i="0">
                 <a:solidFill>
-                  <a:srgbClr val="2B2B2B"/>
+                  <a:srgbClr val="26231F"/>
                 </a:solidFill>
               </a:rPr>
               <a:t>내용을 입력하세요</a:t>
@@ -9090,13 +9671,13 @@
       </p:sp>
       <p:sp>
         <p:nvSpPr>
-          <p:cNvPr id="17" name="안내 문구"/>
+          <p:cNvPr id="22" name="안내 문구"/>
           <p:cNvSpPr txBox="1"/>
           <p:nvPr/>
         </p:nvSpPr>
         <p:spPr>
           <a:xfrm>
-            <a:off x="640080" y="5852160"/>
+            <a:off x="640080" y="5623560"/>
             <a:ext cx="10911535" cy="548640"/>
           </a:xfrm>
           <a:prstGeom prst="rect">
@@ -9145,34 +9726,34 @@
         <a:sysClr val="window" lastClr="FFFFFF"/>
       </a:lt1>
       <a:dk2>
-        <a:srgbClr val="183A23"/>
+        <a:srgbClr val="274932"/>
       </a:dk2>
       <a:lt2>
-        <a:srgbClr val="F1F9F3"/>
+        <a:srgbClr val="ECFBF1"/>
       </a:lt2>
       <a:accent1>
-        <a:srgbClr val="29653D"/>
+        <a:srgbClr val="98E1B1"/>
       </a:accent1>
       <a:accent2>
-        <a:srgbClr val="833B91"/>
+        <a:srgbClr val="B8EAE0"/>
       </a:accent2>
       <a:accent3>
-        <a:srgbClr val="183A23"/>
+        <a:srgbClr val="274932"/>
       </a:accent3>
       <a:accent4>
-        <a:srgbClr val="D2EFDC"/>
+        <a:srgbClr val="D5F6E0"/>
       </a:accent4>
       <a:accent5>
-        <a:srgbClr val="565067"/>
+        <a:srgbClr val="A8E6C8"/>
       </a:accent5>
       <a:accent6>
-        <a:srgbClr val="74897B"/>
+        <a:srgbClr val="7D9284"/>
       </a:accent6>
       <a:hlink>
-        <a:srgbClr val="29653D"/>
+        <a:srgbClr val="98E1B1"/>
       </a:hlink>
       <a:folHlink>
-        <a:srgbClr val="183A23"/>
+        <a:srgbClr val="274932"/>
       </a:folHlink>
     </a:clrScheme>
     <a:fontScheme name="Office">
